--- a/schools-presentations/A Lykeiou/A5 - Computer Networks and Internet/A.5.M1 Εισαγωγή - Μέρος 2.pptx
+++ b/schools-presentations/A Lykeiou/A5 - Computer Networks and Internet/A.5.M1 Εισαγωγή - Μέρος 2.pptx
@@ -5,7 +5,7 @@
     <p:sldMasterId id="2147483648" r:id="rId1"/>
   </p:sldMasterIdLst>
   <p:notesMasterIdLst>
-    <p:notesMasterId r:id="rId12"/>
+    <p:notesMasterId r:id="rId10"/>
   </p:notesMasterIdLst>
   <p:sldIdLst>
     <p:sldId id="256" r:id="rId2"/>
@@ -13,11 +13,9 @@
     <p:sldId id="258" r:id="rId4"/>
     <p:sldId id="259" r:id="rId5"/>
     <p:sldId id="260" r:id="rId6"/>
-    <p:sldId id="261" r:id="rId7"/>
-    <p:sldId id="272" r:id="rId8"/>
-    <p:sldId id="273" r:id="rId9"/>
-    <p:sldId id="262" r:id="rId10"/>
-    <p:sldId id="263" r:id="rId11"/>
+    <p:sldId id="273" r:id="rId7"/>
+    <p:sldId id="262" r:id="rId8"/>
+    <p:sldId id="263" r:id="rId9"/>
   </p:sldIdLst>
   <p:sldSz cx="12192000" cy="6858000"/>
   <p:notesSz cx="6858000" cy="9144000"/>
@@ -127,7 +125,7 @@
 <file path=ppt/revisionInfo.xml><?xml version="1.0" encoding="utf-8"?>
 <p1510:revInfo xmlns:a="http://schemas.openxmlformats.org/drawingml/2006/main" xmlns:r="http://schemas.openxmlformats.org/officeDocument/2006/relationships" xmlns:p1510="http://schemas.microsoft.com/office/powerpoint/2015/10/main">
   <p1510:revLst>
-    <p1510:client id="{066B80C5-57BC-47FF-B3C0-641E5B3449A0}" v="2" dt="2026-09-19T08:20:23.099"/>
+    <p1510:client id="{066B80C5-57BC-47FF-B3C0-641E5B3449A0}" v="4" dt="2026-10-07T06:57:53.779"/>
   </p1510:revLst>
 </p1510:revInfo>
 </file>
@@ -137,16 +135,24 @@
   <pc:docChgLst>
     <pc:chgData name="Άριστος Αρέστη" userId="813aa191-2d4c-464f-9d05-0a7e494d859f" providerId="ADAL" clId="{49C7B61D-1ACF-4AFF-A04E-A3B433E32474}"/>
     <pc:docChg chg="custSel addSld delSld modSld">
-      <pc:chgData name="Άριστος Αρέστη" userId="813aa191-2d4c-464f-9d05-0a7e494d859f" providerId="ADAL" clId="{49C7B61D-1ACF-4AFF-A04E-A3B433E32474}" dt="2026-09-19T08:28:29.305" v="39" actId="47"/>
+      <pc:chgData name="Άριστος Αρέστη" userId="813aa191-2d4c-464f-9d05-0a7e494d859f" providerId="ADAL" clId="{49C7B61D-1ACF-4AFF-A04E-A3B433E32474}" dt="2026-10-07T19:33:04.501" v="57" actId="47"/>
       <pc:docMkLst>
         <pc:docMk/>
       </pc:docMkLst>
       <pc:sldChg chg="modSp mod">
-        <pc:chgData name="Άριστος Αρέστη" userId="813aa191-2d4c-464f-9d05-0a7e494d859f" providerId="ADAL" clId="{49C7B61D-1ACF-4AFF-A04E-A3B433E32474}" dt="2026-09-19T08:06:08.348" v="0" actId="113"/>
+        <pc:chgData name="Άριστος Αρέστη" userId="813aa191-2d4c-464f-9d05-0a7e494d859f" providerId="ADAL" clId="{49C7B61D-1ACF-4AFF-A04E-A3B433E32474}" dt="2026-10-07T06:57:36.382" v="41"/>
         <pc:sldMkLst>
           <pc:docMk/>
           <pc:sldMk cId="1459875993" sldId="258"/>
         </pc:sldMkLst>
+        <pc:spChg chg="mod">
+          <ac:chgData name="Άριστος Αρέστη" userId="813aa191-2d4c-464f-9d05-0a7e494d859f" providerId="ADAL" clId="{49C7B61D-1ACF-4AFF-A04E-A3B433E32474}" dt="2026-10-07T06:57:36.382" v="41"/>
+          <ac:spMkLst>
+            <pc:docMk/>
+            <pc:sldMk cId="1459875993" sldId="258"/>
+            <ac:spMk id="42" creationId="{FE084515-FC82-4168-8A3C-AC6B893C15FE}"/>
+          </ac:spMkLst>
+        </pc:spChg>
         <pc:spChg chg="mod">
           <ac:chgData name="Άριστος Αρέστη" userId="813aa191-2d4c-464f-9d05-0a7e494d859f" providerId="ADAL" clId="{49C7B61D-1ACF-4AFF-A04E-A3B433E32474}" dt="2026-09-19T08:06:08.348" v="0" actId="113"/>
           <ac:spMkLst>
@@ -156,8 +162,30 @@
           </ac:spMkLst>
         </pc:spChg>
       </pc:sldChg>
-      <pc:sldChg chg="add">
-        <pc:chgData name="Άριστος Αρέστη" userId="813aa191-2d4c-464f-9d05-0a7e494d859f" providerId="ADAL" clId="{49C7B61D-1ACF-4AFF-A04E-A3B433E32474}" dt="2026-09-19T08:08:33.893" v="1"/>
+      <pc:sldChg chg="modSp mod">
+        <pc:chgData name="Άριστος Αρέστη" userId="813aa191-2d4c-464f-9d05-0a7e494d859f" providerId="ADAL" clId="{49C7B61D-1ACF-4AFF-A04E-A3B433E32474}" dt="2026-10-07T19:31:20.954" v="55" actId="20577"/>
+        <pc:sldMkLst>
+          <pc:docMk/>
+          <pc:sldMk cId="643881412" sldId="260"/>
+        </pc:sldMkLst>
+        <pc:spChg chg="mod">
+          <ac:chgData name="Άριστος Αρέστη" userId="813aa191-2d4c-464f-9d05-0a7e494d859f" providerId="ADAL" clId="{49C7B61D-1ACF-4AFF-A04E-A3B433E32474}" dt="2026-10-07T19:31:20.954" v="55" actId="20577"/>
+          <ac:spMkLst>
+            <pc:docMk/>
+            <pc:sldMk cId="643881412" sldId="260"/>
+            <ac:spMk id="12" creationId="{45B4B7F5-0880-4DC5-834A-2960DF836EB9}"/>
+          </ac:spMkLst>
+        </pc:spChg>
+      </pc:sldChg>
+      <pc:sldChg chg="del">
+        <pc:chgData name="Άριστος Αρέστη" userId="813aa191-2d4c-464f-9d05-0a7e494d859f" providerId="ADAL" clId="{49C7B61D-1ACF-4AFF-A04E-A3B433E32474}" dt="2026-10-07T19:32:49.584" v="56" actId="47"/>
+        <pc:sldMkLst>
+          <pc:docMk/>
+          <pc:sldMk cId="1459875993" sldId="261"/>
+        </pc:sldMkLst>
+      </pc:sldChg>
+      <pc:sldChg chg="add del">
+        <pc:chgData name="Άριστος Αρέστη" userId="813aa191-2d4c-464f-9d05-0a7e494d859f" providerId="ADAL" clId="{49C7B61D-1ACF-4AFF-A04E-A3B433E32474}" dt="2026-10-07T19:33:04.501" v="57" actId="47"/>
         <pc:sldMkLst>
           <pc:docMk/>
           <pc:sldMk cId="457266055" sldId="272"/>
@@ -169,29 +197,6 @@
           <pc:docMk/>
           <pc:sldMk cId="3963452469" sldId="273"/>
         </pc:sldMkLst>
-      </pc:sldChg>
-      <pc:sldChg chg="addSp modSp new del mod modAnim">
-        <pc:chgData name="Άριστος Αρέστη" userId="813aa191-2d4c-464f-9d05-0a7e494d859f" providerId="ADAL" clId="{49C7B61D-1ACF-4AFF-A04E-A3B433E32474}" dt="2026-09-19T08:28:29.305" v="39" actId="47"/>
-        <pc:sldMkLst>
-          <pc:docMk/>
-          <pc:sldMk cId="3656556390" sldId="274"/>
-        </pc:sldMkLst>
-        <pc:spChg chg="mod">
-          <ac:chgData name="Άριστος Αρέστη" userId="813aa191-2d4c-464f-9d05-0a7e494d859f" providerId="ADAL" clId="{49C7B61D-1ACF-4AFF-A04E-A3B433E32474}" dt="2026-09-19T08:21:45.091" v="38" actId="1076"/>
-          <ac:spMkLst>
-            <pc:docMk/>
-            <pc:sldMk cId="3656556390" sldId="274"/>
-            <ac:spMk id="2" creationId="{DC360C0B-5F94-BE79-5118-80A188CB2156}"/>
-          </ac:spMkLst>
-        </pc:spChg>
-        <pc:picChg chg="add mod">
-          <ac:chgData name="Άριστος Αρέστη" userId="813aa191-2d4c-464f-9d05-0a7e494d859f" providerId="ADAL" clId="{49C7B61D-1ACF-4AFF-A04E-A3B433E32474}" dt="2026-09-19T08:21:26.943" v="35" actId="14100"/>
-          <ac:picMkLst>
-            <pc:docMk/>
-            <pc:sldMk cId="3656556390" sldId="274"/>
-            <ac:picMk id="3" creationId="{CA3D5479-E6E0-5A2F-F4D1-106307FA265C}"/>
-          </ac:picMkLst>
-        </pc:picChg>
       </pc:sldChg>
     </pc:docChg>
   </pc:docChgLst>
@@ -917,98 +922,6 @@
 </file>
 
 <file path=ppt/notesSlides/notesSlide7.xml><?xml version="1.0" encoding="utf-8"?>
-<p:notes xmlns:a="http://schemas.openxmlformats.org/drawingml/2006/main" xmlns:r="http://schemas.openxmlformats.org/officeDocument/2006/relationships" xmlns:p="http://schemas.openxmlformats.org/presentationml/2006/main">
-  <p:cSld>
-    <p:spTree>
-      <p:nvGrpSpPr>
-        <p:cNvPr id="1" name=""/>
-        <p:cNvGrpSpPr/>
-        <p:nvPr/>
-      </p:nvGrpSpPr>
-      <p:grpSpPr>
-        <a:xfrm>
-          <a:off x="0" y="0"/>
-          <a:ext cx="0" cy="0"/>
-          <a:chOff x="0" y="0"/>
-          <a:chExt cx="0" cy="0"/>
-        </a:xfrm>
-      </p:grpSpPr>
-      <p:sp>
-        <p:nvSpPr>
-          <p:cNvPr id="2" name="Slide Image Placeholder 1"/>
-          <p:cNvSpPr>
-            <a:spLocks noGrp="1" noRot="1" noChangeAspect="1"/>
-          </p:cNvSpPr>
-          <p:nvPr>
-            <p:ph type="sldImg"/>
-          </p:nvPr>
-        </p:nvSpPr>
-        <p:spPr/>
-      </p:sp>
-      <p:sp>
-        <p:nvSpPr>
-          <p:cNvPr id="3" name="Notes Placeholder 2"/>
-          <p:cNvSpPr>
-            <a:spLocks noGrp="1"/>
-          </p:cNvSpPr>
-          <p:nvPr>
-            <p:ph type="body" idx="1"/>
-          </p:nvPr>
-        </p:nvSpPr>
-        <p:spPr/>
-        <p:txBody>
-          <a:bodyPr/>
-          <a:lstStyle/>
-          <a:p>
-            <a:r>
-              <a:t>[Sources]</a:t>
-            </a:r>
-          </a:p>
-          <a:p>
-            <a:r>
-              <a:t>- Σημειώσεις Πληροφορικής Α΄ Λυκείου, Α5.1 Εισαγωγή στα Δίκτυα, σελ. 97–105</a:t>
-            </a:r>
-          </a:p>
-          <a:p>
-            <a:r>
-              <a:t>- Τετράδιο Εργασιών Πληροφορικής Α΄ Λυκείου, Φύλλο Εργασίας A.5.M1, σελ. 81–83</a:t>
-            </a:r>
-          </a:p>
-          <a:p>
-            <a:r>
-              <a:t>[/Sources]</a:t>
-            </a:r>
-          </a:p>
-        </p:txBody>
-      </p:sp>
-      <p:sp>
-        <p:nvSpPr>
-          <p:cNvPr id="4" name="Slide Number Placeholder 3"/>
-          <p:cNvSpPr>
-            <a:spLocks noGrp="1"/>
-          </p:cNvSpPr>
-          <p:nvPr>
-            <p:ph type="sldNum" idx="5"/>
-          </p:nvPr>
-        </p:nvSpPr>
-        <p:spPr/>
-        <p:txBody>
-          <a:bodyPr/>
-          <a:lstStyle/>
-          <a:p>
-            <a:endParaRPr/>
-          </a:p>
-        </p:txBody>
-      </p:sp>
-    </p:spTree>
-  </p:cSld>
-  <p:clrMapOvr>
-    <a:masterClrMapping/>
-  </p:clrMapOvr>
-</p:notes>
-</file>
-
-<file path=ppt/notesSlides/notesSlide8.xml><?xml version="1.0" encoding="utf-8"?>
 <p:notes xmlns:a="http://schemas.openxmlformats.org/drawingml/2006/main" xmlns:r="http://schemas.openxmlformats.org/officeDocument/2006/relationships" xmlns:p="http://schemas.openxmlformats.org/presentationml/2006/main">
   <p:cSld>
     <p:spTree>
@@ -1986,7 +1899,7 @@
           <a:lstStyle/>
           <a:p>
             <a:fld id="{0E1AB97B-D0C7-4CCB-8568-F47C13D538D5}" type="datetimeFigureOut">
-              <a:t>19-Sep-26</a:t>
+              <a:t>07-Oct-26</a:t>
             </a:fld>
             <a:endParaRPr/>
           </a:p>
@@ -2260,7 +2173,7 @@
           <a:lstStyle/>
           <a:p>
             <a:fld id="{0E1AB97B-D0C7-4CCB-8568-F47C13D538D5}" type="datetimeFigureOut">
-              <a:t>19-Sep-26</a:t>
+              <a:t>07-Oct-26</a:t>
             </a:fld>
             <a:endParaRPr/>
           </a:p>
@@ -2604,7 +2517,7 @@
           <a:lstStyle/>
           <a:p>
             <a:fld id="{0E1AB97B-D0C7-4CCB-8568-F47C13D538D5}" type="datetimeFigureOut">
-              <a:t>19-Sep-26</a:t>
+              <a:t>07-Oct-26</a:t>
             </a:fld>
             <a:endParaRPr/>
           </a:p>
@@ -2982,7 +2895,7 @@
           <a:lstStyle/>
           <a:p>
             <a:fld id="{0E1AB97B-D0C7-4CCB-8568-F47C13D538D5}" type="datetimeFigureOut">
-              <a:t>19-Sep-26</a:t>
+              <a:t>07-Oct-26</a:t>
             </a:fld>
             <a:endParaRPr/>
           </a:p>
@@ -3326,7 +3239,7 @@
           <a:lstStyle/>
           <a:p>
             <a:fld id="{0E1AB97B-D0C7-4CCB-8568-F47C13D538D5}" type="datetimeFigureOut">
-              <a:t>19-Sep-26</a:t>
+              <a:t>07-Oct-26</a:t>
             </a:fld>
             <a:endParaRPr/>
           </a:p>
@@ -3771,7 +3684,7 @@
           <a:lstStyle/>
           <a:p>
             <a:fld id="{0E1AB97B-D0C7-4CCB-8568-F47C13D538D5}" type="datetimeFigureOut">
-              <a:t>19-Sep-26</a:t>
+              <a:t>07-Oct-26</a:t>
             </a:fld>
             <a:endParaRPr/>
           </a:p>
@@ -3966,7 +3879,7 @@
           <a:lstStyle/>
           <a:p>
             <a:fld id="{0E1AB97B-D0C7-4CCB-8568-F47C13D538D5}" type="datetimeFigureOut">
-              <a:t>19-Sep-26</a:t>
+              <a:t>07-Oct-26</a:t>
             </a:fld>
             <a:endParaRPr/>
           </a:p>
@@ -4171,7 +4084,7 @@
           <a:lstStyle/>
           <a:p>
             <a:fld id="{0E1AB97B-D0C7-4CCB-8568-F47C13D538D5}" type="datetimeFigureOut">
-              <a:t>19-Sep-26</a:t>
+              <a:t>07-Oct-26</a:t>
             </a:fld>
             <a:endParaRPr/>
           </a:p>
@@ -4366,7 +4279,7 @@
           <a:lstStyle/>
           <a:p>
             <a:fld id="{0E1AB97B-D0C7-4CCB-8568-F47C13D538D5}" type="datetimeFigureOut">
-              <a:t>19-Sep-26</a:t>
+              <a:t>07-Oct-26</a:t>
             </a:fld>
             <a:endParaRPr/>
           </a:p>
@@ -4636,7 +4549,7 @@
           <a:lstStyle/>
           <a:p>
             <a:fld id="{0E1AB97B-D0C7-4CCB-8568-F47C13D538D5}" type="datetimeFigureOut">
-              <a:t>19-Sep-26</a:t>
+              <a:t>07-Oct-26</a:t>
             </a:fld>
             <a:endParaRPr/>
           </a:p>
@@ -4903,7 +4816,7 @@
           <a:lstStyle/>
           <a:p>
             <a:fld id="{0E1AB97B-D0C7-4CCB-8568-F47C13D538D5}" type="datetimeFigureOut">
-              <a:t>19-Sep-26</a:t>
+              <a:t>07-Oct-26</a:t>
             </a:fld>
             <a:endParaRPr/>
           </a:p>
@@ -5327,7 +5240,7 @@
           <a:lstStyle/>
           <a:p>
             <a:fld id="{0E1AB97B-D0C7-4CCB-8568-F47C13D538D5}" type="datetimeFigureOut">
-              <a:t>19-Sep-26</a:t>
+              <a:t>07-Oct-26</a:t>
             </a:fld>
             <a:endParaRPr/>
           </a:p>
@@ -5465,7 +5378,7 @@
           <a:lstStyle/>
           <a:p>
             <a:fld id="{0E1AB97B-D0C7-4CCB-8568-F47C13D538D5}" type="datetimeFigureOut">
-              <a:t>19-Sep-26</a:t>
+              <a:t>07-Oct-26</a:t>
             </a:fld>
             <a:endParaRPr/>
           </a:p>
@@ -5571,7 +5484,7 @@
           <a:lstStyle/>
           <a:p>
             <a:fld id="{0E1AB97B-D0C7-4CCB-8568-F47C13D538D5}" type="datetimeFigureOut">
-              <a:t>19-Sep-26</a:t>
+              <a:t>07-Oct-26</a:t>
             </a:fld>
             <a:endParaRPr/>
           </a:p>
@@ -5859,7 +5772,7 @@
           <a:lstStyle/>
           <a:p>
             <a:fld id="{0E1AB97B-D0C7-4CCB-8568-F47C13D538D5}" type="datetimeFigureOut">
-              <a:t>19-Sep-26</a:t>
+              <a:t>07-Oct-26</a:t>
             </a:fld>
             <a:endParaRPr/>
           </a:p>
@@ -6202,7 +6115,7 @@
           <a:lstStyle/>
           <a:p>
             <a:fld id="{0E1AB97B-D0C7-4CCB-8568-F47C13D538D5}" type="datetimeFigureOut">
-              <a:t>19-Sep-26</a:t>
+              <a:t>07-Oct-26</a:t>
             </a:fld>
             <a:endParaRPr/>
           </a:p>
@@ -7046,7 +6959,7 @@
           </a:lstStyle>
           <a:p>
             <a:fld id="{0E1AB97B-D0C7-4CCB-8568-F47C13D538D5}" type="datetimeFigureOut">
-              <a:t>19-Sep-26</a:t>
+              <a:t>07-Oct-26</a:t>
             </a:fld>
             <a:endParaRPr/>
           </a:p>
@@ -7995,572 +7908,6 @@
 </p:sld>
 </file>
 
-<file path=ppt/slides/slide10.xml><?xml version="1.0" encoding="utf-8"?>
-<p:sld xmlns:a="http://schemas.openxmlformats.org/drawingml/2006/main" xmlns:r="http://schemas.openxmlformats.org/officeDocument/2006/relationships" xmlns:p="http://schemas.openxmlformats.org/presentationml/2006/main">
-  <p:cSld>
-    <p:spTree>
-      <p:nvGrpSpPr>
-        <p:cNvPr id="1" name=""/>
-        <p:cNvGrpSpPr/>
-        <p:nvPr/>
-      </p:nvGrpSpPr>
-      <p:grpSpPr>
-        <a:xfrm>
-          <a:off x="0" y="0"/>
-          <a:ext cx="0" cy="0"/>
-          <a:chOff x="0" y="0"/>
-          <a:chExt cx="0" cy="0"/>
-        </a:xfrm>
-      </p:grpSpPr>
-      <p:sp>
-        <p:nvSpPr>
-          <p:cNvPr id="2" name="Title 1">
-            <a:extLst>
-              <a:ext uri="{FF2B5EF4-FFF2-40B4-BE49-F238E27FC236}">
-                <a16:creationId xmlns:a16="http://schemas.microsoft.com/office/drawing/2014/main" id="{00E24EE7-B9BA-0224-B2C0-9853440AA6E9}"/>
-              </a:ext>
-            </a:extLst>
-          </p:cNvPr>
-          <p:cNvSpPr>
-            <a:spLocks noGrp="1"/>
-          </p:cNvSpPr>
-          <p:nvPr>
-            <p:ph type="title"/>
-          </p:nvPr>
-        </p:nvSpPr>
-        <p:spPr>
-          <a:xfrm>
-            <a:off x="677334" y="609600"/>
-            <a:ext cx="8596668" cy="713001"/>
-          </a:xfrm>
-        </p:spPr>
-        <p:txBody>
-          <a:bodyPr/>
-          <a:lstStyle/>
-          <a:p>
-            <a:r>
-              <a:t>Δραστηριότητες Εμπέδωσης</a:t>
-            </a:r>
-          </a:p>
-        </p:txBody>
-      </p:sp>
-      <p:sp>
-        <p:nvSpPr>
-          <p:cNvPr id="4" name="Text Placeholder 3">
-            <a:extLst>
-              <a:ext uri="{FF2B5EF4-FFF2-40B4-BE49-F238E27FC236}">
-                <a16:creationId xmlns:a16="http://schemas.microsoft.com/office/drawing/2014/main" id="{4F7059D2-7234-9A18-8EC3-97389EC073B3}"/>
-              </a:ext>
-            </a:extLst>
-          </p:cNvPr>
-          <p:cNvSpPr>
-            <a:spLocks noGrp="1"/>
-          </p:cNvSpPr>
-          <p:nvPr>
-            <p:ph type="body" idx="1"/>
-          </p:nvPr>
-        </p:nvSpPr>
-        <p:spPr>
-          <a:xfrm>
-            <a:off x="675745" y="1528147"/>
-            <a:ext cx="7080326" cy="576262"/>
-          </a:xfrm>
-          <a:prstGeom prst="rect">
-            <a:avLst/>
-          </a:prstGeom>
-          <a:solidFill>
-            <a:schemeClr val="accent1"/>
-          </a:solidFill>
-        </p:spPr>
-        <p:txBody>
-          <a:bodyPr/>
-          <a:lstStyle/>
-          <a:p>
-            <a:endParaRPr/>
-          </a:p>
-        </p:txBody>
-      </p:sp>
-      <p:sp>
-        <p:nvSpPr>
-          <p:cNvPr id="5" name="Content Placeholder 4">
-            <a:extLst>
-              <a:ext uri="{FF2B5EF4-FFF2-40B4-BE49-F238E27FC236}">
-                <a16:creationId xmlns:a16="http://schemas.microsoft.com/office/drawing/2014/main" id="{9BF9A9EA-A3CB-AC85-3752-6360C044E602}"/>
-              </a:ext>
-            </a:extLst>
-          </p:cNvPr>
-          <p:cNvSpPr>
-            <a:spLocks noGrp="1"/>
-          </p:cNvSpPr>
-          <p:nvPr>
-            <p:ph idx="2"/>
-          </p:nvPr>
-        </p:nvSpPr>
-        <p:spPr>
-          <a:xfrm>
-            <a:off x="675745" y="2309955"/>
-            <a:ext cx="4185623" cy="3304117"/>
-          </a:xfrm>
-        </p:spPr>
-        <p:txBody>
-          <a:bodyPr>
-            <a:normAutofit/>
-          </a:bodyPr>
-          <a:lstStyle/>
-          <a:p>
-            <a:endParaRPr sz="2400"/>
-          </a:p>
-        </p:txBody>
-      </p:sp>
-      <p:sp>
-        <p:nvSpPr>
-          <p:cNvPr id="6" name="Clean content area">
-            <a:extLst>
-              <a:ext uri="{FF2B5EF4-FFF2-40B4-BE49-F238E27FC236}">
-                <a16:creationId xmlns:a16="http://schemas.microsoft.com/office/drawing/2014/main" id="{1385200B-5A3C-4855-A173-8DF2E9CCB76F}"/>
-              </a:ext>
-            </a:extLst>
-          </p:cNvPr>
-          <p:cNvSpPr>
-            <a:spLocks noGrp="1"/>
-          </p:cNvSpPr>
-          <p:nvPr/>
-        </p:nvSpPr>
-        <p:spPr>
-          <a:xfrm>
-            <a:off x="590550" y="1352550"/>
-            <a:ext cx="11049000" cy="5000625"/>
-          </a:xfrm>
-          <a:prstGeom prst="rect">
-            <a:avLst/>
-          </a:prstGeom>
-          <a:solidFill>
-            <a:srgbClr val="FFFFFF"/>
-          </a:solidFill>
-          <a:ln w="0">
-            <a:noFill/>
-          </a:ln>
-        </p:spPr>
-        <p:txBody>
-          <a:bodyPr/>
-          <a:lstStyle/>
-          <a:p>
-            <a:endParaRPr lang="en-GB"/>
-          </a:p>
-        </p:txBody>
-      </p:sp>
-      <p:sp>
-        <p:nvSpPr>
-          <p:cNvPr id="7" name="Section reference">
-            <a:extLst>
-              <a:ext uri="{FF2B5EF4-FFF2-40B4-BE49-F238E27FC236}">
-                <a16:creationId xmlns:a16="http://schemas.microsoft.com/office/drawing/2014/main" id="{89EFA94F-8322-4052-9DD0-EB8F102923AA}"/>
-              </a:ext>
-            </a:extLst>
-          </p:cNvPr>
-          <p:cNvSpPr>
-            <a:spLocks noGrp="1"/>
-          </p:cNvSpPr>
-          <p:nvPr/>
-        </p:nvSpPr>
-        <p:spPr>
-          <a:xfrm>
-            <a:off x="781050" y="1466850"/>
-            <a:ext cx="5334000" cy="266700"/>
-          </a:xfrm>
-          <a:prstGeom prst="rect">
-            <a:avLst/>
-          </a:prstGeom>
-          <a:noFill/>
-          <a:ln w="0">
-            <a:noFill/>
-          </a:ln>
-        </p:spPr>
-        <p:txBody>
-          <a:bodyPr>
-            <a:noAutofit/>
-          </a:bodyPr>
-          <a:lstStyle/>
-          <a:p>
-            <a:pPr>
-              <a:defRPr sz="1275" b="1">
-                <a:solidFill>
-                  <a:srgbClr val="168EAD"/>
-                </a:solidFill>
-                <a:latin typeface="Trebuchet MS"/>
-                <a:ea typeface="Trebuchet MS"/>
-                <a:cs typeface="Trebuchet MS"/>
-              </a:defRPr>
-            </a:pPr>
-            <a:r>
-              <a:rPr sz="1275" b="1">
-                <a:solidFill>
-                  <a:srgbClr val="168EAD"/>
-                </a:solidFill>
-                <a:latin typeface="Trebuchet MS"/>
-                <a:ea typeface="Trebuchet MS"/>
-                <a:cs typeface="Trebuchet MS"/>
-              </a:rPr>
-              <a:t>A.5.M1 | Μέρος 2</a:t>
-            </a:r>
-          </a:p>
-        </p:txBody>
-      </p:sp>
-      <p:sp>
-        <p:nvSpPr>
-          <p:cNvPr id="8" name="Block heading 1">
-            <a:extLst>
-              <a:ext uri="{FF2B5EF4-FFF2-40B4-BE49-F238E27FC236}">
-                <a16:creationId xmlns:a16="http://schemas.microsoft.com/office/drawing/2014/main" id="{83997FA5-1DE0-4658-B52E-9AC082B37F3A}"/>
-              </a:ext>
-            </a:extLst>
-          </p:cNvPr>
-          <p:cNvSpPr>
-            <a:spLocks noGrp="1"/>
-          </p:cNvSpPr>
-          <p:nvPr/>
-        </p:nvSpPr>
-        <p:spPr>
-          <a:xfrm>
-            <a:off x="781050" y="1857375"/>
-            <a:ext cx="10048875" cy="285750"/>
-          </a:xfrm>
-          <a:prstGeom prst="rect">
-            <a:avLst/>
-          </a:prstGeom>
-          <a:noFill/>
-          <a:ln w="0">
-            <a:noFill/>
-          </a:ln>
-        </p:spPr>
-        <p:txBody>
-          <a:bodyPr>
-            <a:noAutofit/>
-          </a:bodyPr>
-          <a:lstStyle/>
-          <a:p>
-            <a:pPr>
-              <a:defRPr sz="1800" b="1">
-                <a:solidFill>
-                  <a:srgbClr val="18A7CC"/>
-                </a:solidFill>
-                <a:latin typeface="Trebuchet MS"/>
-                <a:ea typeface="Trebuchet MS"/>
-                <a:cs typeface="Trebuchet MS"/>
-              </a:defRPr>
-            </a:pPr>
-            <a:r>
-              <a:rPr sz="1800" b="1">
-                <a:solidFill>
-                  <a:srgbClr val="18A7CC"/>
-                </a:solidFill>
-                <a:latin typeface="Trebuchet MS"/>
-                <a:ea typeface="Trebuchet MS"/>
-                <a:cs typeface="Trebuchet MS"/>
-              </a:rPr>
-              <a:t>4</a:t>
-            </a:r>
-          </a:p>
-        </p:txBody>
-      </p:sp>
-      <p:sp>
-        <p:nvSpPr>
-          <p:cNvPr id="9" name="Block body 1">
-            <a:extLst>
-              <a:ext uri="{FF2B5EF4-FFF2-40B4-BE49-F238E27FC236}">
-                <a16:creationId xmlns:a16="http://schemas.microsoft.com/office/drawing/2014/main" id="{285999A5-150B-44D2-BF15-92DD95CB076E}"/>
-              </a:ext>
-            </a:extLst>
-          </p:cNvPr>
-          <p:cNvSpPr>
-            <a:spLocks noGrp="1"/>
-          </p:cNvSpPr>
-          <p:nvPr/>
-        </p:nvSpPr>
-        <p:spPr>
-          <a:xfrm>
-            <a:off x="781050" y="2171700"/>
-            <a:ext cx="10048875" cy="981075"/>
-          </a:xfrm>
-          <a:prstGeom prst="rect">
-            <a:avLst/>
-          </a:prstGeom>
-          <a:noFill/>
-          <a:ln w="0">
-            <a:noFill/>
-          </a:ln>
-        </p:spPr>
-        <p:txBody>
-          <a:bodyPr>
-            <a:noAutofit/>
-          </a:bodyPr>
-          <a:lstStyle/>
-          <a:p>
-            <a:pPr>
-              <a:defRPr sz="1725" b="0">
-                <a:solidFill>
-                  <a:srgbClr val="333333"/>
-                </a:solidFill>
-                <a:latin typeface="Trebuchet MS"/>
-                <a:ea typeface="Trebuchet MS"/>
-                <a:cs typeface="Trebuchet MS"/>
-              </a:defRPr>
-            </a:pPr>
-            <a:r>
-              <a:rPr sz="1725" b="0">
-                <a:solidFill>
-                  <a:srgbClr val="333333"/>
-                </a:solidFill>
-                <a:latin typeface="Trebuchet MS"/>
-                <a:ea typeface="Trebuchet MS"/>
-                <a:cs typeface="Trebuchet MS"/>
-              </a:rPr>
-              <a:t>Επιλογή του κατάλληλου μέσου σύνδεσης για κάθε περίπτωση.</a:t>
-            </a:r>
-          </a:p>
-        </p:txBody>
-      </p:sp>
-      <p:sp>
-        <p:nvSpPr>
-          <p:cNvPr id="10" name="Block heading 2">
-            <a:extLst>
-              <a:ext uri="{FF2B5EF4-FFF2-40B4-BE49-F238E27FC236}">
-                <a16:creationId xmlns:a16="http://schemas.microsoft.com/office/drawing/2014/main" id="{6C94165B-160A-4D73-8B1A-856215A18936}"/>
-              </a:ext>
-            </a:extLst>
-          </p:cNvPr>
-          <p:cNvSpPr>
-            <a:spLocks noGrp="1"/>
-          </p:cNvSpPr>
-          <p:nvPr/>
-        </p:nvSpPr>
-        <p:spPr>
-          <a:xfrm>
-            <a:off x="781050" y="3190875"/>
-            <a:ext cx="10048875" cy="285750"/>
-          </a:xfrm>
-          <a:prstGeom prst="rect">
-            <a:avLst/>
-          </a:prstGeom>
-          <a:noFill/>
-          <a:ln w="0">
-            <a:noFill/>
-          </a:ln>
-        </p:spPr>
-        <p:txBody>
-          <a:bodyPr>
-            <a:noAutofit/>
-          </a:bodyPr>
-          <a:lstStyle/>
-          <a:p>
-            <a:pPr>
-              <a:defRPr sz="1800" b="1">
-                <a:solidFill>
-                  <a:srgbClr val="18A7CC"/>
-                </a:solidFill>
-                <a:latin typeface="Trebuchet MS"/>
-                <a:ea typeface="Trebuchet MS"/>
-                <a:cs typeface="Trebuchet MS"/>
-              </a:defRPr>
-            </a:pPr>
-            <a:r>
-              <a:rPr sz="1800" b="1">
-                <a:solidFill>
-                  <a:srgbClr val="18A7CC"/>
-                </a:solidFill>
-                <a:latin typeface="Trebuchet MS"/>
-                <a:ea typeface="Trebuchet MS"/>
-                <a:cs typeface="Trebuchet MS"/>
-              </a:rPr>
-              <a:t>5</a:t>
-            </a:r>
-          </a:p>
-        </p:txBody>
-      </p:sp>
-      <p:sp>
-        <p:nvSpPr>
-          <p:cNvPr id="11" name="Block body 2">
-            <a:extLst>
-              <a:ext uri="{FF2B5EF4-FFF2-40B4-BE49-F238E27FC236}">
-                <a16:creationId xmlns:a16="http://schemas.microsoft.com/office/drawing/2014/main" id="{A5F9D648-81F9-4956-8EFC-E711AE7164C4}"/>
-              </a:ext>
-            </a:extLst>
-          </p:cNvPr>
-          <p:cNvSpPr>
-            <a:spLocks noGrp="1"/>
-          </p:cNvSpPr>
-          <p:nvPr/>
-        </p:nvSpPr>
-        <p:spPr>
-          <a:xfrm>
-            <a:off x="781050" y="3505200"/>
-            <a:ext cx="10048875" cy="981075"/>
-          </a:xfrm>
-          <a:prstGeom prst="rect">
-            <a:avLst/>
-          </a:prstGeom>
-          <a:noFill/>
-          <a:ln w="0">
-            <a:noFill/>
-          </a:ln>
-        </p:spPr>
-        <p:txBody>
-          <a:bodyPr>
-            <a:noAutofit/>
-          </a:bodyPr>
-          <a:lstStyle/>
-          <a:p>
-            <a:pPr>
-              <a:defRPr sz="1725" b="0">
-                <a:solidFill>
-                  <a:srgbClr val="333333"/>
-                </a:solidFill>
-                <a:latin typeface="Trebuchet MS"/>
-                <a:ea typeface="Trebuchet MS"/>
-                <a:cs typeface="Trebuchet MS"/>
-              </a:defRPr>
-            </a:pPr>
-            <a:r>
-              <a:rPr sz="1725" b="0">
-                <a:solidFill>
-                  <a:srgbClr val="333333"/>
-                </a:solidFill>
-                <a:latin typeface="Trebuchet MS"/>
-                <a:ea typeface="Trebuchet MS"/>
-                <a:cs typeface="Trebuchet MS"/>
-              </a:rPr>
-              <a:t>Δύο πλεονεκτήματα και δύο μειονεκτήματα των ασύρματων δικτύων.</a:t>
-            </a:r>
-          </a:p>
-        </p:txBody>
-      </p:sp>
-      <p:sp>
-        <p:nvSpPr>
-          <p:cNvPr id="12" name="Block heading 3">
-            <a:extLst>
-              <a:ext uri="{FF2B5EF4-FFF2-40B4-BE49-F238E27FC236}">
-                <a16:creationId xmlns:a16="http://schemas.microsoft.com/office/drawing/2014/main" id="{AE655A56-D8EC-4757-9C79-6C99C56BCAA4}"/>
-              </a:ext>
-            </a:extLst>
-          </p:cNvPr>
-          <p:cNvSpPr>
-            <a:spLocks noGrp="1"/>
-          </p:cNvSpPr>
-          <p:nvPr/>
-        </p:nvSpPr>
-        <p:spPr>
-          <a:xfrm>
-            <a:off x="781050" y="4524375"/>
-            <a:ext cx="10048875" cy="285750"/>
-          </a:xfrm>
-          <a:prstGeom prst="rect">
-            <a:avLst/>
-          </a:prstGeom>
-          <a:noFill/>
-          <a:ln w="0">
-            <a:noFill/>
-          </a:ln>
-        </p:spPr>
-        <p:txBody>
-          <a:bodyPr>
-            <a:noAutofit/>
-          </a:bodyPr>
-          <a:lstStyle/>
-          <a:p>
-            <a:pPr>
-              <a:defRPr sz="1800" b="1">
-                <a:solidFill>
-                  <a:srgbClr val="18A7CC"/>
-                </a:solidFill>
-                <a:latin typeface="Trebuchet MS"/>
-                <a:ea typeface="Trebuchet MS"/>
-                <a:cs typeface="Trebuchet MS"/>
-              </a:defRPr>
-            </a:pPr>
-            <a:r>
-              <a:rPr sz="1800" b="1">
-                <a:solidFill>
-                  <a:srgbClr val="18A7CC"/>
-                </a:solidFill>
-                <a:latin typeface="Trebuchet MS"/>
-                <a:ea typeface="Trebuchet MS"/>
-                <a:cs typeface="Trebuchet MS"/>
-              </a:rPr>
-              <a:t>6</a:t>
-            </a:r>
-          </a:p>
-        </p:txBody>
-      </p:sp>
-      <p:sp>
-        <p:nvSpPr>
-          <p:cNvPr id="13" name="Block body 3">
-            <a:extLst>
-              <a:ext uri="{FF2B5EF4-FFF2-40B4-BE49-F238E27FC236}">
-                <a16:creationId xmlns:a16="http://schemas.microsoft.com/office/drawing/2014/main" id="{B4DC63C6-0C8E-43C9-B123-0A03F72B47BA}"/>
-              </a:ext>
-            </a:extLst>
-          </p:cNvPr>
-          <p:cNvSpPr>
-            <a:spLocks noGrp="1"/>
-          </p:cNvSpPr>
-          <p:nvPr/>
-        </p:nvSpPr>
-        <p:spPr>
-          <a:xfrm>
-            <a:off x="781050" y="4838700"/>
-            <a:ext cx="10048875" cy="981075"/>
-          </a:xfrm>
-          <a:prstGeom prst="rect">
-            <a:avLst/>
-          </a:prstGeom>
-          <a:noFill/>
-          <a:ln w="0">
-            <a:noFill/>
-          </a:ln>
-        </p:spPr>
-        <p:txBody>
-          <a:bodyPr>
-            <a:noAutofit/>
-          </a:bodyPr>
-          <a:lstStyle/>
-          <a:p>
-            <a:pPr>
-              <a:defRPr sz="1725" b="0">
-                <a:solidFill>
-                  <a:srgbClr val="333333"/>
-                </a:solidFill>
-                <a:latin typeface="Trebuchet MS"/>
-                <a:ea typeface="Trebuchet MS"/>
-                <a:cs typeface="Trebuchet MS"/>
-              </a:defRPr>
-            </a:pPr>
-            <a:r>
-              <a:rPr sz="1725" b="0">
-                <a:solidFill>
-                  <a:srgbClr val="333333"/>
-                </a:solidFill>
-                <a:latin typeface="Trebuchet MS"/>
-                <a:ea typeface="Trebuchet MS"/>
-                <a:cs typeface="Trebuchet MS"/>
-              </a:rPr>
-              <a:t>Δύο υπηρεσίες του Διαδικτύου.</a:t>
-            </a:r>
-          </a:p>
-        </p:txBody>
-      </p:sp>
-    </p:spTree>
-    <p:extLst>
-      <p:ext uri="{BB962C8B-B14F-4D97-AF65-F5344CB8AC3E}">
-        <p14:creationId xmlns:p14="http://schemas.microsoft.com/office/powerpoint/2010/main" val="2467819896"/>
-      </p:ext>
-    </p:extLst>
-  </p:cSld>
-  <p:clrMapOvr>
-    <a:masterClrMapping/>
-  </p:clrMapOvr>
-</p:sld>
-</file>
-
 <file path=ppt/slides/slide2.xml><?xml version="1.0" encoding="utf-8"?>
 <p:sld xmlns:a="http://schemas.openxmlformats.org/drawingml/2006/main" xmlns:r="http://schemas.openxmlformats.org/officeDocument/2006/relationships" xmlns:p="http://schemas.openxmlformats.org/presentationml/2006/main">
   <p:cSld>
@@ -10658,7 +10005,7 @@
               </a:defRPr>
             </a:pPr>
             <a:r>
-              <a:rPr sz="1650" b="0">
+              <a:rPr sz="1650" b="0" dirty="0">
                 <a:solidFill>
                   <a:srgbClr val="333333"/>
                 </a:solidFill>
@@ -10666,8 +10013,71 @@
                 <a:ea typeface="Trebuchet MS"/>
                 <a:cs typeface="Trebuchet MS"/>
               </a:rPr>
-              <a:t>Αποτελούν συνηθισμένα καλώδια για σύνδεση υπολογιστών σε τοπικό δίκτυο.</a:t>
-            </a:r>
+              <a:t>Απ</a:t>
+            </a:r>
+            <a:r>
+              <a:rPr sz="1650" b="0" dirty="0" err="1">
+                <a:solidFill>
+                  <a:srgbClr val="333333"/>
+                </a:solidFill>
+                <a:latin typeface="Trebuchet MS"/>
+                <a:ea typeface="Trebuchet MS"/>
+                <a:cs typeface="Trebuchet MS"/>
+              </a:rPr>
+              <a:t>οτελούν</a:t>
+            </a:r>
+            <a:r>
+              <a:rPr sz="1650" b="0" dirty="0">
+                <a:solidFill>
+                  <a:srgbClr val="333333"/>
+                </a:solidFill>
+                <a:latin typeface="Trebuchet MS"/>
+                <a:ea typeface="Trebuchet MS"/>
+                <a:cs typeface="Trebuchet MS"/>
+              </a:rPr>
+              <a:t> </a:t>
+            </a:r>
+            <a:r>
+              <a:rPr sz="1650" b="0" dirty="0" err="1">
+                <a:solidFill>
+                  <a:srgbClr val="333333"/>
+                </a:solidFill>
+                <a:latin typeface="Trebuchet MS"/>
+                <a:ea typeface="Trebuchet MS"/>
+                <a:cs typeface="Trebuchet MS"/>
+              </a:rPr>
+              <a:t>συνηθισμέν</a:t>
+            </a:r>
+            <a:r>
+              <a:rPr sz="1650" b="0" dirty="0">
+                <a:solidFill>
+                  <a:srgbClr val="333333"/>
+                </a:solidFill>
+                <a:latin typeface="Trebuchet MS"/>
+                <a:ea typeface="Trebuchet MS"/>
+                <a:cs typeface="Trebuchet MS"/>
+              </a:rPr>
+              <a:t>α καλώδια για σύνδεση υπολογιστών σε τοπικό δίκτυο.</a:t>
+            </a:r>
+            <a:r>
+              <a:rPr lang="en-US" sz="1650" b="0" dirty="0">
+                <a:solidFill>
+                  <a:srgbClr val="333333"/>
+                </a:solidFill>
+                <a:latin typeface="Trebuchet MS"/>
+                <a:ea typeface="Trebuchet MS"/>
+                <a:cs typeface="Trebuchet MS"/>
+              </a:rPr>
+              <a:t> </a:t>
+            </a:r>
+            <a:endParaRPr sz="1650" b="0" dirty="0">
+              <a:solidFill>
+                <a:srgbClr val="333333"/>
+              </a:solidFill>
+              <a:latin typeface="Trebuchet MS"/>
+              <a:ea typeface="Trebuchet MS"/>
+              <a:cs typeface="Trebuchet MS"/>
+            </a:endParaRPr>
           </a:p>
         </p:txBody>
       </p:sp>
@@ -10715,7 +10125,7 @@
               </a:defRPr>
             </a:pPr>
             <a:r>
-              <a:rPr sz="1575" b="1">
+              <a:rPr sz="1575" b="1" dirty="0">
                 <a:solidFill>
                   <a:srgbClr val="18A7CC"/>
                 </a:solidFill>
@@ -10723,7 +10133,29 @@
                 <a:ea typeface="Trebuchet MS"/>
                 <a:cs typeface="Trebuchet MS"/>
               </a:rPr>
-              <a:t>Υποδοχή RJ45</a:t>
+              <a:t>Υπ</a:t>
+            </a:r>
+            <a:r>
+              <a:rPr sz="1575" b="1" dirty="0" err="1">
+                <a:solidFill>
+                  <a:srgbClr val="18A7CC"/>
+                </a:solidFill>
+                <a:latin typeface="Trebuchet MS"/>
+                <a:ea typeface="Trebuchet MS"/>
+                <a:cs typeface="Trebuchet MS"/>
+              </a:rPr>
+              <a:t>οδοχή</a:t>
+            </a:r>
+            <a:r>
+              <a:rPr sz="1575" b="1" dirty="0">
+                <a:solidFill>
+                  <a:srgbClr val="18A7CC"/>
+                </a:solidFill>
+                <a:latin typeface="Trebuchet MS"/>
+                <a:ea typeface="Trebuchet MS"/>
+                <a:cs typeface="Trebuchet MS"/>
+              </a:rPr>
+              <a:t> RJ45</a:t>
             </a:r>
           </a:p>
         </p:txBody>
@@ -10772,7 +10204,7 @@
               </a:defRPr>
             </a:pPr>
             <a:r>
-              <a:rPr sz="1650" b="0">
+              <a:rPr sz="1650" b="0" dirty="0" err="1">
                 <a:solidFill>
                   <a:srgbClr val="333333"/>
                 </a:solidFill>
@@ -10780,7 +10212,128 @@
                 <a:ea typeface="Trebuchet MS"/>
                 <a:cs typeface="Trebuchet MS"/>
               </a:rPr>
-              <a:t>Το καλώδιο καταλήγει σε ειδικό βύσμα που συνδέεται στην κάρτα δικτύου ή στο switch.</a:t>
+              <a:t>Το</a:t>
+            </a:r>
+            <a:r>
+              <a:rPr sz="1650" b="0" dirty="0">
+                <a:solidFill>
+                  <a:srgbClr val="333333"/>
+                </a:solidFill>
+                <a:latin typeface="Trebuchet MS"/>
+                <a:ea typeface="Trebuchet MS"/>
+                <a:cs typeface="Trebuchet MS"/>
+              </a:rPr>
+              <a:t> κα</a:t>
+            </a:r>
+            <a:r>
+              <a:rPr sz="1650" b="0" dirty="0" err="1">
+                <a:solidFill>
+                  <a:srgbClr val="333333"/>
+                </a:solidFill>
+                <a:latin typeface="Trebuchet MS"/>
+                <a:ea typeface="Trebuchet MS"/>
+                <a:cs typeface="Trebuchet MS"/>
+              </a:rPr>
+              <a:t>λώδιο</a:t>
+            </a:r>
+            <a:r>
+              <a:rPr sz="1650" b="0" dirty="0">
+                <a:solidFill>
+                  <a:srgbClr val="333333"/>
+                </a:solidFill>
+                <a:latin typeface="Trebuchet MS"/>
+                <a:ea typeface="Trebuchet MS"/>
+                <a:cs typeface="Trebuchet MS"/>
+              </a:rPr>
+              <a:t> κατα</a:t>
+            </a:r>
+            <a:r>
+              <a:rPr sz="1650" b="0" dirty="0" err="1">
+                <a:solidFill>
+                  <a:srgbClr val="333333"/>
+                </a:solidFill>
+                <a:latin typeface="Trebuchet MS"/>
+                <a:ea typeface="Trebuchet MS"/>
+                <a:cs typeface="Trebuchet MS"/>
+              </a:rPr>
+              <a:t>λήγει</a:t>
+            </a:r>
+            <a:r>
+              <a:rPr sz="1650" b="0" dirty="0">
+                <a:solidFill>
+                  <a:srgbClr val="333333"/>
+                </a:solidFill>
+                <a:latin typeface="Trebuchet MS"/>
+                <a:ea typeface="Trebuchet MS"/>
+                <a:cs typeface="Trebuchet MS"/>
+              </a:rPr>
+              <a:t> </a:t>
+            </a:r>
+            <a:r>
+              <a:rPr sz="1650" b="0" dirty="0" err="1">
+                <a:solidFill>
+                  <a:srgbClr val="333333"/>
+                </a:solidFill>
+                <a:latin typeface="Trebuchet MS"/>
+                <a:ea typeface="Trebuchet MS"/>
+                <a:cs typeface="Trebuchet MS"/>
+              </a:rPr>
+              <a:t>σε</a:t>
+            </a:r>
+            <a:r>
+              <a:rPr sz="1650" b="0" dirty="0">
+                <a:solidFill>
+                  <a:srgbClr val="333333"/>
+                </a:solidFill>
+                <a:latin typeface="Trebuchet MS"/>
+                <a:ea typeface="Trebuchet MS"/>
+                <a:cs typeface="Trebuchet MS"/>
+              </a:rPr>
+              <a:t> </a:t>
+            </a:r>
+            <a:r>
+              <a:rPr sz="1650" b="0" dirty="0" err="1">
+                <a:solidFill>
+                  <a:srgbClr val="333333"/>
+                </a:solidFill>
+                <a:latin typeface="Trebuchet MS"/>
+                <a:ea typeface="Trebuchet MS"/>
+                <a:cs typeface="Trebuchet MS"/>
+              </a:rPr>
+              <a:t>ειδικό</a:t>
+            </a:r>
+            <a:r>
+              <a:rPr sz="1650" b="0" dirty="0">
+                <a:solidFill>
+                  <a:srgbClr val="333333"/>
+                </a:solidFill>
+                <a:latin typeface="Trebuchet MS"/>
+                <a:ea typeface="Trebuchet MS"/>
+                <a:cs typeface="Trebuchet MS"/>
+              </a:rPr>
+              <a:t> β</a:t>
+            </a:r>
+            <a:r>
+              <a:rPr sz="1650" b="0" dirty="0" err="1">
+                <a:solidFill>
+                  <a:srgbClr val="333333"/>
+                </a:solidFill>
+                <a:latin typeface="Trebuchet MS"/>
+                <a:ea typeface="Trebuchet MS"/>
+                <a:cs typeface="Trebuchet MS"/>
+              </a:rPr>
+              <a:t>ύσμ</a:t>
+            </a:r>
+            <a:r>
+              <a:rPr sz="1650" b="0" dirty="0">
+                <a:solidFill>
+                  <a:srgbClr val="333333"/>
+                </a:solidFill>
+                <a:latin typeface="Trebuchet MS"/>
+                <a:ea typeface="Trebuchet MS"/>
+                <a:cs typeface="Trebuchet MS"/>
+              </a:rPr>
+              <a:t>α που συνδέεται στην κάρτα δικτύου ή στο switch.</a:t>
             </a:r>
           </a:p>
         </p:txBody>
@@ -12028,7 +11581,7 @@
               </a:defRPr>
             </a:pPr>
             <a:r>
-              <a:rPr sz="1650" b="0">
+              <a:rPr sz="1650" b="0" dirty="0" err="1">
                 <a:solidFill>
                   <a:srgbClr val="333333"/>
                 </a:solidFill>
@@ -12036,7 +11589,139 @@
                 <a:ea typeface="Trebuchet MS"/>
                 <a:cs typeface="Trebuchet MS"/>
               </a:rPr>
-              <a:t>Άλλες ασύρματες συσκευές μπορεί να προκαλέσουν παρεμβολές. Το δίκτυο χρειάζεται κατάλληλη προστασία.</a:t>
+              <a:t>Άλλες</a:t>
+            </a:r>
+            <a:r>
+              <a:rPr sz="1650" b="0" dirty="0">
+                <a:solidFill>
+                  <a:srgbClr val="333333"/>
+                </a:solidFill>
+                <a:latin typeface="Trebuchet MS"/>
+                <a:ea typeface="Trebuchet MS"/>
+                <a:cs typeface="Trebuchet MS"/>
+              </a:rPr>
+              <a:t> α</a:t>
+            </a:r>
+            <a:r>
+              <a:rPr sz="1650" b="0" dirty="0" err="1">
+                <a:solidFill>
+                  <a:srgbClr val="333333"/>
+                </a:solidFill>
+                <a:latin typeface="Trebuchet MS"/>
+                <a:ea typeface="Trebuchet MS"/>
+                <a:cs typeface="Trebuchet MS"/>
+              </a:rPr>
+              <a:t>σύρμ</a:t>
+            </a:r>
+            <a:r>
+              <a:rPr sz="1650" b="0" dirty="0">
+                <a:solidFill>
+                  <a:srgbClr val="333333"/>
+                </a:solidFill>
+                <a:latin typeface="Trebuchet MS"/>
+                <a:ea typeface="Trebuchet MS"/>
+                <a:cs typeface="Trebuchet MS"/>
+              </a:rPr>
+              <a:t>ατες συσκευές μπορεί να προκαλέσουν παρεμβολές. </a:t>
+            </a:r>
+            <a:r>
+              <a:rPr sz="1650" b="0" dirty="0" err="1">
+                <a:solidFill>
+                  <a:srgbClr val="333333"/>
+                </a:solidFill>
+                <a:latin typeface="Trebuchet MS"/>
+                <a:ea typeface="Trebuchet MS"/>
+                <a:cs typeface="Trebuchet MS"/>
+              </a:rPr>
+              <a:t>Το</a:t>
+            </a:r>
+            <a:r>
+              <a:rPr sz="1650" b="0" dirty="0">
+                <a:solidFill>
+                  <a:srgbClr val="333333"/>
+                </a:solidFill>
+                <a:latin typeface="Trebuchet MS"/>
+                <a:ea typeface="Trebuchet MS"/>
+                <a:cs typeface="Trebuchet MS"/>
+              </a:rPr>
+              <a:t> </a:t>
+            </a:r>
+            <a:r>
+              <a:rPr sz="1650" b="0" dirty="0" err="1">
+                <a:solidFill>
+                  <a:srgbClr val="333333"/>
+                </a:solidFill>
+                <a:latin typeface="Trebuchet MS"/>
+                <a:ea typeface="Trebuchet MS"/>
+                <a:cs typeface="Trebuchet MS"/>
+              </a:rPr>
+              <a:t>δίκτυο</a:t>
+            </a:r>
+            <a:r>
+              <a:rPr sz="1650" b="0" dirty="0">
+                <a:solidFill>
+                  <a:srgbClr val="333333"/>
+                </a:solidFill>
+                <a:latin typeface="Trebuchet MS"/>
+                <a:ea typeface="Trebuchet MS"/>
+                <a:cs typeface="Trebuchet MS"/>
+              </a:rPr>
+              <a:t> </a:t>
+            </a:r>
+            <a:r>
+              <a:rPr sz="1650" b="0" dirty="0" err="1">
+                <a:solidFill>
+                  <a:srgbClr val="333333"/>
+                </a:solidFill>
+                <a:latin typeface="Trebuchet MS"/>
+                <a:ea typeface="Trebuchet MS"/>
+                <a:cs typeface="Trebuchet MS"/>
+              </a:rPr>
+              <a:t>χρειάζετ</a:t>
+            </a:r>
+            <a:r>
+              <a:rPr sz="1650" b="0" dirty="0">
+                <a:solidFill>
+                  <a:srgbClr val="333333"/>
+                </a:solidFill>
+                <a:latin typeface="Trebuchet MS"/>
+                <a:ea typeface="Trebuchet MS"/>
+                <a:cs typeface="Trebuchet MS"/>
+              </a:rPr>
+              <a:t>αι κατάλληλη προστασία</a:t>
+            </a:r>
+            <a:r>
+              <a:rPr lang="en-US" sz="1650" b="0" dirty="0">
+                <a:solidFill>
+                  <a:srgbClr val="333333"/>
+                </a:solidFill>
+                <a:latin typeface="Trebuchet MS"/>
+                <a:ea typeface="Trebuchet MS"/>
+                <a:cs typeface="Trebuchet MS"/>
+              </a:rPr>
+              <a:t> </a:t>
+            </a:r>
+            <a:r>
+              <a:rPr lang="el-GR" sz="1650" b="0" dirty="0">
+                <a:solidFill>
+                  <a:srgbClr val="333333"/>
+                </a:solidFill>
+                <a:latin typeface="Trebuchet MS"/>
+                <a:ea typeface="Trebuchet MS"/>
+                <a:cs typeface="Trebuchet MS"/>
+              </a:rPr>
+              <a:t>από υποκλοπές</a:t>
+            </a:r>
+            <a:r>
+              <a:rPr sz="1650" b="0" dirty="0">
+                <a:solidFill>
+                  <a:srgbClr val="333333"/>
+                </a:solidFill>
+                <a:latin typeface="Trebuchet MS"/>
+                <a:ea typeface="Trebuchet MS"/>
+                <a:cs typeface="Trebuchet MS"/>
+              </a:rPr>
+              <a:t>.</a:t>
             </a:r>
           </a:p>
         </p:txBody>
@@ -12079,14 +11764,6 @@
 <file path=ppt/slides/slide6.xml><?xml version="1.0" encoding="utf-8"?>
 <p:sld xmlns:a="http://schemas.openxmlformats.org/drawingml/2006/main" xmlns:r="http://schemas.openxmlformats.org/officeDocument/2006/relationships" xmlns:p="http://schemas.openxmlformats.org/presentationml/2006/main">
   <p:cSld>
-    <p:bg>
-      <p:bgPr>
-        <a:solidFill>
-          <a:schemeClr val="bg1"/>
-        </a:solidFill>
-        <a:effectLst/>
-      </p:bgPr>
-    </p:bg>
     <p:spTree>
       <p:nvGrpSpPr>
         <p:cNvPr id="1" name=""/>
@@ -12103,671 +11780,7 @@
       </p:grpSpPr>
       <p:sp>
         <p:nvSpPr>
-          <p:cNvPr id="11" name="Straight Connector 10">
-            <a:extLst>
-              <a:ext uri="{FF2B5EF4-FFF2-40B4-BE49-F238E27FC236}">
-                <a16:creationId xmlns:a16="http://schemas.microsoft.com/office/drawing/2014/main" id="{3DE7BDB4-5B22-4942-A5BF-1BC290BB60C6}"/>
-              </a:ext>
-            </a:extLst>
-          </p:cNvPr>
-          <p:cNvSpPr>
-            <a:spLocks noGrp="1"/>
-          </p:cNvSpPr>
-          <p:nvPr/>
-        </p:nvSpPr>
-        <p:spPr>
-          <a:xfrm>
-            <a:off x="9371012" y="0"/>
-            <a:ext cx="1219200" cy="6858000"/>
-          </a:xfrm>
-          <a:prstGeom prst="line">
-            <a:avLst/>
-          </a:prstGeom>
-          <a:ln w="9525">
-            <a:solidFill>
-              <a:schemeClr val="accent1">
-                <a:alpha val="70000"/>
-              </a:schemeClr>
-            </a:solidFill>
-          </a:ln>
-        </p:spPr>
-        <p:style>
-          <a:lnRef idx="2">
-            <a:schemeClr val="accent1"/>
-          </a:lnRef>
-          <a:fillRef idx="0">
-            <a:schemeClr val="accent1"/>
-          </a:fillRef>
-          <a:effectRef idx="1">
-            <a:schemeClr val="accent1"/>
-          </a:effectRef>
-          <a:fontRef idx="minor">
-            <a:schemeClr val="tx1"/>
-          </a:fontRef>
-        </p:style>
-        <p:txBody>
-          <a:bodyPr/>
-          <a:lstStyle/>
-          <a:p>
-            <a:endParaRPr lang="en-GB"/>
-          </a:p>
-        </p:txBody>
-      </p:sp>
-      <p:sp>
-        <p:nvSpPr>
-          <p:cNvPr id="12" name="Straight Connector 11">
-            <a:extLst>
-              <a:ext uri="{FF2B5EF4-FFF2-40B4-BE49-F238E27FC236}">
-                <a16:creationId xmlns:a16="http://schemas.microsoft.com/office/drawing/2014/main" id="{F972E8AA-2DAA-4786-A1DC-793A00EB1F59}"/>
-              </a:ext>
-            </a:extLst>
-          </p:cNvPr>
-          <p:cNvSpPr>
-            <a:spLocks noGrp="1"/>
-          </p:cNvSpPr>
-          <p:nvPr/>
-        </p:nvSpPr>
-        <p:spPr>
-          <a:xfrm flipH="1">
-            <a:off x="7425267" y="3681413"/>
-            <a:ext cx="4763558" cy="3176587"/>
-          </a:xfrm>
-          <a:prstGeom prst="line">
-            <a:avLst/>
-          </a:prstGeom>
-          <a:ln w="9525">
-            <a:solidFill>
-              <a:schemeClr val="accent1">
-                <a:alpha val="70000"/>
-              </a:schemeClr>
-            </a:solidFill>
-          </a:ln>
-        </p:spPr>
-        <p:style>
-          <a:lnRef idx="2">
-            <a:schemeClr val="accent1"/>
-          </a:lnRef>
-          <a:fillRef idx="0">
-            <a:schemeClr val="accent1"/>
-          </a:fillRef>
-          <a:effectRef idx="1">
-            <a:schemeClr val="accent1"/>
-          </a:effectRef>
-          <a:fontRef idx="minor">
-            <a:schemeClr val="tx1"/>
-          </a:fontRef>
-        </p:style>
-        <p:txBody>
-          <a:bodyPr/>
-          <a:lstStyle/>
-          <a:p>
-            <a:endParaRPr lang="en-GB"/>
-          </a:p>
-        </p:txBody>
-      </p:sp>
-      <p:sp>
-        <p:nvSpPr>
-          <p:cNvPr id="13" name="Rectangle 23">
-            <a:extLst>
-              <a:ext uri="{FF2B5EF4-FFF2-40B4-BE49-F238E27FC236}">
-                <a16:creationId xmlns:a16="http://schemas.microsoft.com/office/drawing/2014/main" id="{6778DC79-DE09-4F89-81B1-275C542D7FB4}"/>
-              </a:ext>
-            </a:extLst>
-          </p:cNvPr>
-          <p:cNvSpPr>
-            <a:spLocks noGrp="1"/>
-          </p:cNvSpPr>
-          <p:nvPr/>
-        </p:nvSpPr>
-        <p:spPr>
-          <a:xfrm>
-            <a:off x="9181476" y="-8467"/>
-            <a:ext cx="3007349" cy="6866467"/>
-          </a:xfrm>
-          <a:custGeom>
-            <a:avLst/>
-            <a:gdLst/>
-            <a:ahLst/>
-            <a:cxnLst/>
-            <a:rect l="l" t="t" r="r" b="b"/>
-            <a:pathLst>
-              <a:path w="3007349" h="6866467">
-                <a:moveTo>
-                  <a:pt x="2045532" y="0"/>
-                </a:moveTo>
-                <a:lnTo>
-                  <a:pt x="3007349" y="0"/>
-                </a:lnTo>
-                <a:lnTo>
-                  <a:pt x="3007349" y="6866467"/>
-                </a:lnTo>
-                <a:lnTo>
-                  <a:pt x="0" y="6866467"/>
-                </a:lnTo>
-                <a:lnTo>
-                  <a:pt x="2045532" y="0"/>
-                </a:lnTo>
-                <a:close/>
-              </a:path>
-            </a:pathLst>
-          </a:custGeom>
-          <a:solidFill>
-            <a:schemeClr val="accent1">
-              <a:alpha val="36000"/>
-            </a:schemeClr>
-          </a:solidFill>
-          <a:ln>
-            <a:noFill/>
-          </a:ln>
-        </p:spPr>
-        <p:style>
-          <a:lnRef idx="1">
-            <a:schemeClr val="accent1"/>
-          </a:lnRef>
-          <a:fillRef idx="3">
-            <a:schemeClr val="accent1"/>
-          </a:fillRef>
-          <a:effectRef idx="2">
-            <a:schemeClr val="accent1"/>
-          </a:effectRef>
-          <a:fontRef idx="minor">
-            <a:schemeClr val="lt1"/>
-          </a:fontRef>
-        </p:style>
-        <p:txBody>
-          <a:bodyPr/>
-          <a:lstStyle/>
-          <a:p>
-            <a:endParaRPr lang="en-GB"/>
-          </a:p>
-        </p:txBody>
-      </p:sp>
-      <p:sp>
-        <p:nvSpPr>
-          <p:cNvPr id="14" name="Rectangle 25">
-            <a:extLst>
-              <a:ext uri="{FF2B5EF4-FFF2-40B4-BE49-F238E27FC236}">
-                <a16:creationId xmlns:a16="http://schemas.microsoft.com/office/drawing/2014/main" id="{EAEC370A-1F34-4D8E-B065-81F6F568AA75}"/>
-              </a:ext>
-            </a:extLst>
-          </p:cNvPr>
-          <p:cNvSpPr>
-            <a:spLocks noGrp="1"/>
-          </p:cNvSpPr>
-          <p:nvPr/>
-        </p:nvSpPr>
-        <p:spPr>
-          <a:xfrm>
-            <a:off x="9603442" y="-8467"/>
-            <a:ext cx="2588558" cy="6866467"/>
-          </a:xfrm>
-          <a:custGeom>
-            <a:avLst/>
-            <a:gdLst/>
-            <a:ahLst/>
-            <a:cxnLst/>
-            <a:rect l="l" t="t" r="r" b="b"/>
-            <a:pathLst>
-              <a:path w="2573311" h="6866467">
-                <a:moveTo>
-                  <a:pt x="0" y="0"/>
-                </a:moveTo>
-                <a:lnTo>
-                  <a:pt x="2573311" y="0"/>
-                </a:lnTo>
-                <a:lnTo>
-                  <a:pt x="2573311" y="6866467"/>
-                </a:lnTo>
-                <a:lnTo>
-                  <a:pt x="1202336" y="6866467"/>
-                </a:lnTo>
-                <a:lnTo>
-                  <a:pt x="0" y="0"/>
-                </a:lnTo>
-                <a:close/>
-              </a:path>
-            </a:pathLst>
-          </a:custGeom>
-          <a:solidFill>
-            <a:schemeClr val="accent1">
-              <a:alpha val="20000"/>
-            </a:schemeClr>
-          </a:solidFill>
-          <a:ln>
-            <a:noFill/>
-          </a:ln>
-        </p:spPr>
-        <p:style>
-          <a:lnRef idx="1">
-            <a:schemeClr val="accent1"/>
-          </a:lnRef>
-          <a:fillRef idx="3">
-            <a:schemeClr val="accent1"/>
-          </a:fillRef>
-          <a:effectRef idx="2">
-            <a:schemeClr val="accent1"/>
-          </a:effectRef>
-          <a:fontRef idx="minor">
-            <a:schemeClr val="lt1"/>
-          </a:fontRef>
-        </p:style>
-        <p:txBody>
-          <a:bodyPr/>
-          <a:lstStyle/>
-          <a:p>
-            <a:endParaRPr lang="en-GB"/>
-          </a:p>
-        </p:txBody>
-      </p:sp>
-      <p:sp>
-        <p:nvSpPr>
-          <p:cNvPr id="15" name="Isosceles Triangle 14">
-            <a:extLst>
-              <a:ext uri="{FF2B5EF4-FFF2-40B4-BE49-F238E27FC236}">
-                <a16:creationId xmlns:a16="http://schemas.microsoft.com/office/drawing/2014/main" id="{A816EDF3-D9EE-488C-AFDC-0223815139E3}"/>
-              </a:ext>
-            </a:extLst>
-          </p:cNvPr>
-          <p:cNvSpPr>
-            <a:spLocks noGrp="1"/>
-          </p:cNvSpPr>
-          <p:nvPr/>
-        </p:nvSpPr>
-        <p:spPr>
-          <a:xfrm>
-            <a:off x="8932333" y="3048000"/>
-            <a:ext cx="3259667" cy="3810000"/>
-          </a:xfrm>
-          <a:prstGeom prst="triangle">
-            <a:avLst>
-              <a:gd name="adj" fmla="val 100000"/>
-            </a:avLst>
-          </a:prstGeom>
-          <a:solidFill>
-            <a:schemeClr val="accent1">
-              <a:lumMod val="75000"/>
-              <a:alpha val="66000"/>
-            </a:schemeClr>
-          </a:solidFill>
-          <a:ln>
-            <a:noFill/>
-          </a:ln>
-        </p:spPr>
-        <p:style>
-          <a:lnRef idx="1">
-            <a:schemeClr val="accent1"/>
-          </a:lnRef>
-          <a:fillRef idx="3">
-            <a:schemeClr val="accent1"/>
-          </a:fillRef>
-          <a:effectRef idx="2">
-            <a:schemeClr val="accent1"/>
-          </a:effectRef>
-          <a:fontRef idx="minor">
-            <a:schemeClr val="lt1"/>
-          </a:fontRef>
-        </p:style>
-        <p:txBody>
-          <a:bodyPr/>
-          <a:lstStyle/>
-          <a:p>
-            <a:endParaRPr lang="en-GB"/>
-          </a:p>
-        </p:txBody>
-      </p:sp>
-      <p:sp>
-        <p:nvSpPr>
-          <p:cNvPr id="16" name="Rectangle 27">
-            <a:extLst>
-              <a:ext uri="{FF2B5EF4-FFF2-40B4-BE49-F238E27FC236}">
-                <a16:creationId xmlns:a16="http://schemas.microsoft.com/office/drawing/2014/main" id="{E8330BD4-97D9-4D24-815A-0E557B04F96A}"/>
-              </a:ext>
-            </a:extLst>
-          </p:cNvPr>
-          <p:cNvSpPr>
-            <a:spLocks noGrp="1"/>
-          </p:cNvSpPr>
-          <p:nvPr/>
-        </p:nvSpPr>
-        <p:spPr>
-          <a:xfrm>
-            <a:off x="9334500" y="-8467"/>
-            <a:ext cx="2854326" cy="6866467"/>
-          </a:xfrm>
-          <a:custGeom>
-            <a:avLst/>
-            <a:gdLst/>
-            <a:ahLst/>
-            <a:cxnLst/>
-            <a:rect l="l" t="t" r="r" b="b"/>
-            <a:pathLst>
-              <a:path w="2858013" h="6866467">
-                <a:moveTo>
-                  <a:pt x="0" y="0"/>
-                </a:moveTo>
-                <a:lnTo>
-                  <a:pt x="2858013" y="0"/>
-                </a:lnTo>
-                <a:lnTo>
-                  <a:pt x="2858013" y="6866467"/>
-                </a:lnTo>
-                <a:lnTo>
-                  <a:pt x="2473942" y="6866467"/>
-                </a:lnTo>
-                <a:lnTo>
-                  <a:pt x="0" y="0"/>
-                </a:lnTo>
-                <a:close/>
-              </a:path>
-            </a:pathLst>
-          </a:custGeom>
-          <a:solidFill>
-            <a:schemeClr val="accent1">
-              <a:lumMod val="75000"/>
-              <a:alpha val="50000"/>
-            </a:schemeClr>
-          </a:solidFill>
-          <a:ln>
-            <a:noFill/>
-          </a:ln>
-        </p:spPr>
-        <p:style>
-          <a:lnRef idx="1">
-            <a:schemeClr val="accent1"/>
-          </a:lnRef>
-          <a:fillRef idx="3">
-            <a:schemeClr val="accent1"/>
-          </a:fillRef>
-          <a:effectRef idx="2">
-            <a:schemeClr val="accent1"/>
-          </a:effectRef>
-          <a:fontRef idx="minor">
-            <a:schemeClr val="lt1"/>
-          </a:fontRef>
-        </p:style>
-        <p:txBody>
-          <a:bodyPr/>
-          <a:lstStyle/>
-          <a:p>
-            <a:endParaRPr lang="en-GB"/>
-          </a:p>
-        </p:txBody>
-      </p:sp>
-      <p:sp>
-        <p:nvSpPr>
-          <p:cNvPr id="17" name="Rectangle 28">
-            <a:extLst>
-              <a:ext uri="{FF2B5EF4-FFF2-40B4-BE49-F238E27FC236}">
-                <a16:creationId xmlns:a16="http://schemas.microsoft.com/office/drawing/2014/main" id="{EA8EDE67-BAC0-478C-99D9-BBC5AD532084}"/>
-              </a:ext>
-            </a:extLst>
-          </p:cNvPr>
-          <p:cNvSpPr>
-            <a:spLocks noGrp="1"/>
-          </p:cNvSpPr>
-          <p:nvPr/>
-        </p:nvSpPr>
-        <p:spPr>
-          <a:xfrm>
-            <a:off x="10898730" y="-8467"/>
-            <a:ext cx="1290094" cy="6866467"/>
-          </a:xfrm>
-          <a:custGeom>
-            <a:avLst/>
-            <a:gdLst/>
-            <a:ahLst/>
-            <a:cxnLst/>
-            <a:rect l="l" t="t" r="r" b="b"/>
-            <a:pathLst>
-              <a:path w="1290094" h="6858000">
-                <a:moveTo>
-                  <a:pt x="1019735" y="0"/>
-                </a:moveTo>
-                <a:lnTo>
-                  <a:pt x="1290094" y="0"/>
-                </a:lnTo>
-                <a:lnTo>
-                  <a:pt x="1290094" y="6858000"/>
-                </a:lnTo>
-                <a:lnTo>
-                  <a:pt x="0" y="6858000"/>
-                </a:lnTo>
-                <a:lnTo>
-                  <a:pt x="1019735" y="0"/>
-                </a:lnTo>
-                <a:close/>
-              </a:path>
-            </a:pathLst>
-          </a:custGeom>
-          <a:solidFill>
-            <a:schemeClr val="accent2">
-              <a:alpha val="70000"/>
-            </a:schemeClr>
-          </a:solidFill>
-          <a:ln>
-            <a:noFill/>
-          </a:ln>
-        </p:spPr>
-        <p:style>
-          <a:lnRef idx="1">
-            <a:schemeClr val="accent1"/>
-          </a:lnRef>
-          <a:fillRef idx="3">
-            <a:schemeClr val="accent1"/>
-          </a:fillRef>
-          <a:effectRef idx="2">
-            <a:schemeClr val="accent1"/>
-          </a:effectRef>
-          <a:fontRef idx="minor">
-            <a:schemeClr val="lt1"/>
-          </a:fontRef>
-        </p:style>
-        <p:txBody>
-          <a:bodyPr/>
-          <a:lstStyle/>
-          <a:p>
-            <a:endParaRPr lang="en-GB"/>
-          </a:p>
-        </p:txBody>
-      </p:sp>
-      <p:sp>
-        <p:nvSpPr>
-          <p:cNvPr id="18" name="Rectangle 29">
-            <a:extLst>
-              <a:ext uri="{FF2B5EF4-FFF2-40B4-BE49-F238E27FC236}">
-                <a16:creationId xmlns:a16="http://schemas.microsoft.com/office/drawing/2014/main" id="{33DFB3F3-2523-4F1F-BC2B-B97C172F2C47}"/>
-              </a:ext>
-            </a:extLst>
-          </p:cNvPr>
-          <p:cNvSpPr>
-            <a:spLocks noGrp="1"/>
-          </p:cNvSpPr>
-          <p:nvPr/>
-        </p:nvSpPr>
-        <p:spPr>
-          <a:xfrm>
-            <a:off x="10938999" y="-8467"/>
-            <a:ext cx="1249825" cy="6866467"/>
-          </a:xfrm>
-          <a:custGeom>
-            <a:avLst/>
-            <a:gdLst/>
-            <a:ahLst/>
-            <a:cxnLst/>
-            <a:rect l="l" t="t" r="r" b="b"/>
-            <a:pathLst>
-              <a:path w="1249825" h="6858000">
-                <a:moveTo>
-                  <a:pt x="0" y="0"/>
-                </a:moveTo>
-                <a:lnTo>
-                  <a:pt x="1249825" y="0"/>
-                </a:lnTo>
-                <a:lnTo>
-                  <a:pt x="1249825" y="6858000"/>
-                </a:lnTo>
-                <a:lnTo>
-                  <a:pt x="1109382" y="6858000"/>
-                </a:lnTo>
-                <a:lnTo>
-                  <a:pt x="0" y="0"/>
-                </a:lnTo>
-                <a:close/>
-              </a:path>
-            </a:pathLst>
-          </a:custGeom>
-          <a:solidFill>
-            <a:schemeClr val="accent2">
-              <a:lumMod val="75000"/>
-              <a:alpha val="80000"/>
-            </a:schemeClr>
-          </a:solidFill>
-          <a:ln>
-            <a:noFill/>
-          </a:ln>
-        </p:spPr>
-        <p:style>
-          <a:lnRef idx="1">
-            <a:schemeClr val="accent1"/>
-          </a:lnRef>
-          <a:fillRef idx="3">
-            <a:schemeClr val="accent1"/>
-          </a:fillRef>
-          <a:effectRef idx="2">
-            <a:schemeClr val="accent1"/>
-          </a:effectRef>
-          <a:fontRef idx="minor">
-            <a:schemeClr val="lt1"/>
-          </a:fontRef>
-        </p:style>
-        <p:txBody>
-          <a:bodyPr/>
-          <a:lstStyle/>
-          <a:p>
-            <a:endParaRPr lang="en-GB"/>
-          </a:p>
-        </p:txBody>
-      </p:sp>
-      <p:sp>
-        <p:nvSpPr>
-          <p:cNvPr id="19" name="Isosceles Triangle 18">
-            <a:extLst>
-              <a:ext uri="{FF2B5EF4-FFF2-40B4-BE49-F238E27FC236}">
-                <a16:creationId xmlns:a16="http://schemas.microsoft.com/office/drawing/2014/main" id="{5E5660E4-7443-4FCC-AD43-9D1AE972B5C4}"/>
-              </a:ext>
-            </a:extLst>
-          </p:cNvPr>
-          <p:cNvSpPr>
-            <a:spLocks noGrp="1"/>
-          </p:cNvSpPr>
-          <p:nvPr/>
-        </p:nvSpPr>
-        <p:spPr>
-          <a:xfrm>
-            <a:off x="10371666" y="3589867"/>
-            <a:ext cx="1817159" cy="3268133"/>
-          </a:xfrm>
-          <a:prstGeom prst="triangle">
-            <a:avLst>
-              <a:gd name="adj" fmla="val 100000"/>
-            </a:avLst>
-          </a:prstGeom>
-          <a:solidFill>
-            <a:schemeClr val="accent1">
-              <a:lumMod val="75000"/>
-              <a:alpha val="66000"/>
-            </a:schemeClr>
-          </a:solidFill>
-          <a:ln>
-            <a:noFill/>
-          </a:ln>
-        </p:spPr>
-        <p:style>
-          <a:lnRef idx="1">
-            <a:schemeClr val="accent1"/>
-          </a:lnRef>
-          <a:fillRef idx="3">
-            <a:schemeClr val="accent1"/>
-          </a:fillRef>
-          <a:effectRef idx="2">
-            <a:schemeClr val="accent1"/>
-          </a:effectRef>
-          <a:fontRef idx="minor">
-            <a:schemeClr val="lt1"/>
-          </a:fontRef>
-        </p:style>
-        <p:txBody>
-          <a:bodyPr/>
-          <a:lstStyle/>
-          <a:p>
-            <a:endParaRPr lang="en-GB"/>
-          </a:p>
-        </p:txBody>
-      </p:sp>
-      <p:sp>
-        <p:nvSpPr>
-          <p:cNvPr id="20" name="Isosceles Triangle 19">
-            <a:extLst>
-              <a:ext uri="{FF2B5EF4-FFF2-40B4-BE49-F238E27FC236}">
-                <a16:creationId xmlns:a16="http://schemas.microsoft.com/office/drawing/2014/main" id="{4EDF9C36-B365-4426-85B9-82E0DE187A59}"/>
-              </a:ext>
-            </a:extLst>
-          </p:cNvPr>
-          <p:cNvSpPr>
-            <a:spLocks noGrp="1"/>
-          </p:cNvSpPr>
-          <p:nvPr/>
-        </p:nvSpPr>
-        <p:spPr>
-          <a:xfrm>
-            <a:off x="0" y="4013200"/>
-            <a:ext cx="448733" cy="2844800"/>
-          </a:xfrm>
-          <a:prstGeom prst="triangle">
-            <a:avLst>
-              <a:gd name="adj" fmla="val 0"/>
-            </a:avLst>
-          </a:prstGeom>
-          <a:solidFill>
-            <a:schemeClr val="accent1">
-              <a:alpha val="70000"/>
-            </a:schemeClr>
-          </a:solidFill>
-          <a:ln>
-            <a:noFill/>
-          </a:ln>
-        </p:spPr>
-        <p:style>
-          <a:lnRef idx="1">
-            <a:schemeClr val="accent1"/>
-          </a:lnRef>
-          <a:fillRef idx="3">
-            <a:schemeClr val="accent1"/>
-          </a:fillRef>
-          <a:effectRef idx="2">
-            <a:schemeClr val="accent1"/>
-          </a:effectRef>
-          <a:fontRef idx="minor">
-            <a:schemeClr val="lt1"/>
-          </a:fontRef>
-        </p:style>
-        <p:txBody>
-          <a:bodyPr/>
-          <a:lstStyle/>
-          <a:p>
-            <a:endParaRPr lang="en-GB"/>
-          </a:p>
-        </p:txBody>
-      </p:sp>
-      <p:sp>
-        <p:nvSpPr>
-          <p:cNvPr id="2" name="Title 1">
-            <a:extLst>
-              <a:ext uri="{FF2B5EF4-FFF2-40B4-BE49-F238E27FC236}">
-                <a16:creationId xmlns:a16="http://schemas.microsoft.com/office/drawing/2014/main" id="{62A92CD4-88DD-4F68-B449-EA9821C3EFD3}"/>
-              </a:ext>
-            </a:extLst>
-          </p:cNvPr>
+          <p:cNvPr id="2" name="Title 1"/>
           <p:cNvSpPr>
             <a:spLocks noGrp="1"/>
           </p:cNvSpPr>
@@ -12775,33 +11788,101 @@
             <p:ph type="title"/>
           </p:nvPr>
         </p:nvSpPr>
-        <p:spPr>
-          <a:xfrm>
-            <a:off x="677333" y="609600"/>
-            <a:ext cx="3851123" cy="1320800"/>
-          </a:xfrm>
-        </p:spPr>
-        <p:txBody>
-          <a:bodyPr vert="horz" lIns="91440" tIns="45720" rIns="91440" bIns="45720" anchor="t">
-            <a:normAutofit/>
-          </a:bodyPr>
-          <a:lstStyle/>
-          <a:p>
-            <a:r>
-              <a:t>Ταχύτητα</a:t>
-            </a:r>
-          </a:p>
-        </p:txBody>
-      </p:sp>
-      <p:sp>
-        <p:nvSpPr>
-          <p:cNvPr id="4" name="Content Placeholder 3">
-            <a:extLst>
-              <a:ext uri="{FF2B5EF4-FFF2-40B4-BE49-F238E27FC236}">
-                <a16:creationId xmlns:a16="http://schemas.microsoft.com/office/drawing/2014/main" id="{A98A4CE2-B83D-4007-86B1-3CC11CF360D6}"/>
-              </a:ext>
-            </a:extLst>
-          </p:cNvPr>
+        <p:spPr/>
+        <p:txBody>
+          <a:bodyPr/>
+          <a:lstStyle/>
+          <a:p>
+            <a:r>
+              <a:rPr lang="el-GR" dirty="0"/>
+              <a:t>Ταχύτητες Μεταφοράς Δεδομένων </a:t>
+            </a:r>
+            <a:br>
+              <a:rPr lang="el-GR" dirty="0"/>
+            </a:br>
+            <a:r>
+              <a:rPr lang="el-GR" dirty="0">
+                <a:solidFill>
+                  <a:srgbClr val="FF0000"/>
+                </a:solidFill>
+              </a:rPr>
+              <a:t>(</a:t>
+            </a:r>
+            <a:r>
+              <a:rPr lang="el-GR" dirty="0" err="1">
+                <a:solidFill>
+                  <a:srgbClr val="FF0000"/>
+                </a:solidFill>
+              </a:rPr>
+              <a:t>bps</a:t>
+            </a:r>
+            <a:r>
+              <a:rPr lang="el-GR" dirty="0">
+                <a:solidFill>
+                  <a:srgbClr val="FF0000"/>
+                </a:solidFill>
+              </a:rPr>
+              <a:t>, </a:t>
+            </a:r>
+            <a:r>
+              <a:rPr lang="el-GR" dirty="0" err="1">
+                <a:solidFill>
+                  <a:srgbClr val="FF0000"/>
+                </a:solidFill>
+              </a:rPr>
+              <a:t>Kbps</a:t>
+            </a:r>
+            <a:r>
+              <a:rPr lang="el-GR" dirty="0">
+                <a:solidFill>
+                  <a:srgbClr val="FF0000"/>
+                </a:solidFill>
+              </a:rPr>
+              <a:t>, </a:t>
+            </a:r>
+            <a:r>
+              <a:rPr lang="el-GR" dirty="0" err="1">
+                <a:solidFill>
+                  <a:srgbClr val="FF0000"/>
+                </a:solidFill>
+              </a:rPr>
+              <a:t>Mbps</a:t>
+            </a:r>
+            <a:r>
+              <a:rPr lang="el-GR" dirty="0">
+                <a:solidFill>
+                  <a:srgbClr val="FF0000"/>
+                </a:solidFill>
+              </a:rPr>
+              <a:t> και </a:t>
+            </a:r>
+            <a:r>
+              <a:rPr lang="el-GR" dirty="0" err="1">
+                <a:solidFill>
+                  <a:srgbClr val="FF0000"/>
+                </a:solidFill>
+              </a:rPr>
+              <a:t>Gbps</a:t>
+            </a:r>
+            <a:r>
+              <a:rPr lang="el-GR" dirty="0">
+                <a:solidFill>
+                  <a:srgbClr val="FF0000"/>
+                </a:solidFill>
+              </a:rPr>
+              <a:t>) </a:t>
+            </a:r>
+            <a:endParaRPr lang="en-US" dirty="0">
+              <a:solidFill>
+                <a:srgbClr val="FF0000"/>
+              </a:solidFill>
+            </a:endParaRPr>
+          </a:p>
+        </p:txBody>
+      </p:sp>
+      <p:sp>
+        <p:nvSpPr>
+          <p:cNvPr id="3" name="Content Placeholder 2"/>
           <p:cNvSpPr>
             <a:spLocks noGrp="1"/>
           </p:cNvSpPr>
@@ -12809,1067 +11890,88 @@
             <p:ph idx="1"/>
           </p:nvPr>
         </p:nvSpPr>
-        <p:spPr>
-          <a:xfrm>
-            <a:off x="677334" y="2160589"/>
-            <a:ext cx="3851122" cy="3880773"/>
-          </a:xfrm>
-        </p:spPr>
-        <p:txBody>
-          <a:bodyPr vert="horz" lIns="91440" tIns="45720" rIns="91440" bIns="45720">
+        <p:spPr/>
+        <p:txBody>
+          <a:bodyPr>
             <a:normAutofit/>
           </a:bodyPr>
           <a:lstStyle/>
           <a:p>
-            <a:pPr marL="0" indent="0">
-              <a:buNone/>
+            <a:r>
+              <a:rPr lang="el-GR" sz="3000" dirty="0"/>
+              <a:t>Τα πολλαπλάσια του </a:t>
+            </a:r>
+            <a:r>
+              <a:rPr lang="el-GR" sz="3000" dirty="0" err="1"/>
+              <a:t>bps</a:t>
+            </a:r>
+            <a:r>
+              <a:rPr lang="el-GR" sz="3000" dirty="0"/>
+              <a:t> είναι:</a:t>
+            </a:r>
+          </a:p>
+          <a:p>
+            <a:pPr marL="914400" lvl="1" indent="-514350">
+              <a:buFont typeface="+mj-lt"/>
+              <a:buAutoNum type="arabicPeriod"/>
             </a:pPr>
-            <a:endParaRPr/>
-          </a:p>
-        </p:txBody>
-      </p:sp>
-      <p:sp>
-        <p:nvSpPr>
-          <p:cNvPr id="22" name="Straight Connector 21">
-            <a:extLst>
-              <a:ext uri="{FF2B5EF4-FFF2-40B4-BE49-F238E27FC236}">
-                <a16:creationId xmlns:a16="http://schemas.microsoft.com/office/drawing/2014/main" id="{58A65593-EBC9-4FFD-A2E3-84A86F9898AA}"/>
-              </a:ext>
-            </a:extLst>
-          </p:cNvPr>
-          <p:cNvSpPr>
-            <a:spLocks noGrp="1"/>
-          </p:cNvSpPr>
-          <p:nvPr/>
-        </p:nvSpPr>
-        <p:spPr>
-          <a:xfrm>
-            <a:off x="9371012" y="0"/>
-            <a:ext cx="1219200" cy="6858000"/>
-          </a:xfrm>
-          <a:prstGeom prst="line">
-            <a:avLst/>
-          </a:prstGeom>
-          <a:ln w="9525">
-            <a:solidFill>
-              <a:schemeClr val="bg1">
-                <a:lumMod val="75000"/>
-              </a:schemeClr>
-            </a:solidFill>
-          </a:ln>
-        </p:spPr>
-        <p:style>
-          <a:lnRef idx="2">
-            <a:schemeClr val="accent1"/>
-          </a:lnRef>
-          <a:fillRef idx="0">
-            <a:schemeClr val="accent1"/>
-          </a:fillRef>
-          <a:effectRef idx="1">
-            <a:schemeClr val="accent1"/>
-          </a:effectRef>
-          <a:fontRef idx="minor">
-            <a:schemeClr val="tx1"/>
-          </a:fontRef>
-        </p:style>
-        <p:txBody>
-          <a:bodyPr/>
-          <a:lstStyle/>
-          <a:p>
-            <a:endParaRPr lang="en-GB"/>
-          </a:p>
-        </p:txBody>
-      </p:sp>
-      <p:sp>
-        <p:nvSpPr>
-          <p:cNvPr id="24" name="Straight Connector 23">
-            <a:extLst>
-              <a:ext uri="{FF2B5EF4-FFF2-40B4-BE49-F238E27FC236}">
-                <a16:creationId xmlns:a16="http://schemas.microsoft.com/office/drawing/2014/main" id="{46DF67F7-9F42-4763-BDC4-3162061DA391}"/>
-              </a:ext>
-            </a:extLst>
-          </p:cNvPr>
-          <p:cNvSpPr>
-            <a:spLocks noGrp="1"/>
-          </p:cNvSpPr>
-          <p:nvPr/>
-        </p:nvSpPr>
-        <p:spPr>
-          <a:xfrm flipH="1">
-            <a:off x="7425267" y="3681413"/>
-            <a:ext cx="4763558" cy="3176587"/>
-          </a:xfrm>
-          <a:prstGeom prst="line">
-            <a:avLst/>
-          </a:prstGeom>
-          <a:ln w="9525">
-            <a:solidFill>
-              <a:schemeClr val="bg1">
-                <a:lumMod val="85000"/>
-              </a:schemeClr>
-            </a:solidFill>
-          </a:ln>
-        </p:spPr>
-        <p:style>
-          <a:lnRef idx="2">
-            <a:schemeClr val="accent1"/>
-          </a:lnRef>
-          <a:fillRef idx="0">
-            <a:schemeClr val="accent1"/>
-          </a:fillRef>
-          <a:effectRef idx="1">
-            <a:schemeClr val="accent1"/>
-          </a:effectRef>
-          <a:fontRef idx="minor">
-            <a:schemeClr val="tx1"/>
-          </a:fontRef>
-        </p:style>
-        <p:txBody>
-          <a:bodyPr/>
-          <a:lstStyle/>
-          <a:p>
-            <a:endParaRPr lang="en-GB"/>
-          </a:p>
-        </p:txBody>
-      </p:sp>
-      <p:sp>
-        <p:nvSpPr>
-          <p:cNvPr id="26" name="Rectangle 23">
-            <a:extLst>
-              <a:ext uri="{FF2B5EF4-FFF2-40B4-BE49-F238E27FC236}">
-                <a16:creationId xmlns:a16="http://schemas.microsoft.com/office/drawing/2014/main" id="{3F088236-D655-4F88-B238-E16762358025}"/>
-              </a:ext>
-            </a:extLst>
-          </p:cNvPr>
-          <p:cNvSpPr>
-            <a:spLocks noGrp="1"/>
-          </p:cNvSpPr>
-          <p:nvPr/>
-        </p:nvSpPr>
-        <p:spPr>
-          <a:xfrm>
-            <a:off x="9181476" y="-8467"/>
-            <a:ext cx="3007349" cy="6866467"/>
-          </a:xfrm>
-          <a:custGeom>
-            <a:avLst/>
-            <a:gdLst/>
-            <a:ahLst/>
-            <a:cxnLst/>
-            <a:rect l="l" t="t" r="r" b="b"/>
-            <a:pathLst>
-              <a:path w="3007349" h="6866467">
-                <a:moveTo>
-                  <a:pt x="2045532" y="0"/>
-                </a:moveTo>
-                <a:lnTo>
-                  <a:pt x="3007349" y="0"/>
-                </a:lnTo>
-                <a:lnTo>
-                  <a:pt x="3007349" y="6866467"/>
-                </a:lnTo>
-                <a:lnTo>
-                  <a:pt x="0" y="6866467"/>
-                </a:lnTo>
-                <a:lnTo>
-                  <a:pt x="2045532" y="0"/>
-                </a:lnTo>
-                <a:close/>
-              </a:path>
-            </a:pathLst>
-          </a:custGeom>
-          <a:solidFill>
-            <a:schemeClr val="accent1">
-              <a:alpha val="30000"/>
-            </a:schemeClr>
-          </a:solidFill>
-          <a:ln>
-            <a:noFill/>
-          </a:ln>
-        </p:spPr>
-        <p:style>
-          <a:lnRef idx="1">
-            <a:schemeClr val="accent1"/>
-          </a:lnRef>
-          <a:fillRef idx="3">
-            <a:schemeClr val="accent1"/>
-          </a:fillRef>
-          <a:effectRef idx="2">
-            <a:schemeClr val="accent1"/>
-          </a:effectRef>
-          <a:fontRef idx="minor">
-            <a:schemeClr val="lt1"/>
-          </a:fontRef>
-        </p:style>
-        <p:txBody>
-          <a:bodyPr/>
-          <a:lstStyle/>
-          <a:p>
-            <a:endParaRPr lang="en-GB"/>
-          </a:p>
-        </p:txBody>
-      </p:sp>
-      <p:sp>
-        <p:nvSpPr>
-          <p:cNvPr id="28" name="Rectangle 25">
-            <a:extLst>
-              <a:ext uri="{FF2B5EF4-FFF2-40B4-BE49-F238E27FC236}">
-                <a16:creationId xmlns:a16="http://schemas.microsoft.com/office/drawing/2014/main" id="{3DAC0C92-199E-475C-9390-119A9B027276}"/>
-              </a:ext>
-            </a:extLst>
-          </p:cNvPr>
-          <p:cNvSpPr>
-            <a:spLocks noGrp="1"/>
-          </p:cNvSpPr>
-          <p:nvPr/>
-        </p:nvSpPr>
-        <p:spPr>
-          <a:xfrm>
-            <a:off x="9603442" y="-8467"/>
-            <a:ext cx="2588558" cy="6866467"/>
-          </a:xfrm>
-          <a:custGeom>
-            <a:avLst/>
-            <a:gdLst/>
-            <a:ahLst/>
-            <a:cxnLst/>
-            <a:rect l="l" t="t" r="r" b="b"/>
-            <a:pathLst>
-              <a:path w="2573311" h="6866467">
-                <a:moveTo>
-                  <a:pt x="0" y="0"/>
-                </a:moveTo>
-                <a:lnTo>
-                  <a:pt x="2573311" y="0"/>
-                </a:lnTo>
-                <a:lnTo>
-                  <a:pt x="2573311" y="6866467"/>
-                </a:lnTo>
-                <a:lnTo>
-                  <a:pt x="1202336" y="6866467"/>
-                </a:lnTo>
-                <a:lnTo>
-                  <a:pt x="0" y="0"/>
-                </a:lnTo>
-                <a:close/>
-              </a:path>
-            </a:pathLst>
-          </a:custGeom>
-          <a:solidFill>
-            <a:schemeClr val="accent1">
-              <a:alpha val="20000"/>
-            </a:schemeClr>
-          </a:solidFill>
-          <a:ln>
-            <a:noFill/>
-          </a:ln>
-        </p:spPr>
-        <p:style>
-          <a:lnRef idx="1">
-            <a:schemeClr val="accent1"/>
-          </a:lnRef>
-          <a:fillRef idx="3">
-            <a:schemeClr val="accent1"/>
-          </a:fillRef>
-          <a:effectRef idx="2">
-            <a:schemeClr val="accent1"/>
-          </a:effectRef>
-          <a:fontRef idx="minor">
-            <a:schemeClr val="lt1"/>
-          </a:fontRef>
-        </p:style>
-        <p:txBody>
-          <a:bodyPr/>
-          <a:lstStyle/>
-          <a:p>
-            <a:endParaRPr lang="en-GB"/>
-          </a:p>
-        </p:txBody>
-      </p:sp>
-      <p:sp>
-        <p:nvSpPr>
-          <p:cNvPr id="30" name="Isosceles Triangle 24">
-            <a:extLst>
-              <a:ext uri="{FF2B5EF4-FFF2-40B4-BE49-F238E27FC236}">
-                <a16:creationId xmlns:a16="http://schemas.microsoft.com/office/drawing/2014/main" id="{C4CFB339-0ED8-4FE2-9EF1-6D1375B8499B}"/>
-              </a:ext>
-            </a:extLst>
-          </p:cNvPr>
-          <p:cNvSpPr>
-            <a:spLocks noGrp="1"/>
-          </p:cNvSpPr>
-          <p:nvPr/>
-        </p:nvSpPr>
-        <p:spPr>
-          <a:xfrm>
-            <a:off x="8932333" y="3048000"/>
-            <a:ext cx="3259667" cy="3810000"/>
-          </a:xfrm>
-          <a:prstGeom prst="triangle">
-            <a:avLst>
-              <a:gd name="adj" fmla="val 100000"/>
-            </a:avLst>
-          </a:prstGeom>
-          <a:solidFill>
-            <a:schemeClr val="accent2">
-              <a:alpha val="72000"/>
-            </a:schemeClr>
-          </a:solidFill>
-          <a:ln>
-            <a:noFill/>
-          </a:ln>
-        </p:spPr>
-        <p:style>
-          <a:lnRef idx="1">
-            <a:schemeClr val="accent1"/>
-          </a:lnRef>
-          <a:fillRef idx="3">
-            <a:schemeClr val="accent1"/>
-          </a:fillRef>
-          <a:effectRef idx="2">
-            <a:schemeClr val="accent1"/>
-          </a:effectRef>
-          <a:fontRef idx="minor">
-            <a:schemeClr val="lt1"/>
-          </a:fontRef>
-        </p:style>
-        <p:txBody>
-          <a:bodyPr/>
-          <a:lstStyle/>
-          <a:p>
-            <a:endParaRPr lang="en-GB"/>
-          </a:p>
-        </p:txBody>
-      </p:sp>
-      <p:sp>
-        <p:nvSpPr>
-          <p:cNvPr id="32" name="Rectangle 27">
-            <a:extLst>
-              <a:ext uri="{FF2B5EF4-FFF2-40B4-BE49-F238E27FC236}">
-                <a16:creationId xmlns:a16="http://schemas.microsoft.com/office/drawing/2014/main" id="{31896C80-2069-4431-9C19-83B913734490}"/>
-              </a:ext>
-            </a:extLst>
-          </p:cNvPr>
-          <p:cNvSpPr>
-            <a:spLocks noGrp="1"/>
-          </p:cNvSpPr>
-          <p:nvPr/>
-        </p:nvSpPr>
-        <p:spPr>
-          <a:xfrm>
-            <a:off x="9334500" y="-8467"/>
-            <a:ext cx="2854326" cy="6866467"/>
-          </a:xfrm>
-          <a:custGeom>
-            <a:avLst/>
-            <a:gdLst/>
-            <a:ahLst/>
-            <a:cxnLst/>
-            <a:rect l="l" t="t" r="r" b="b"/>
-            <a:pathLst>
-              <a:path w="2858013" h="6866467">
-                <a:moveTo>
-                  <a:pt x="0" y="0"/>
-                </a:moveTo>
-                <a:lnTo>
-                  <a:pt x="2858013" y="0"/>
-                </a:lnTo>
-                <a:lnTo>
-                  <a:pt x="2858013" y="6866467"/>
-                </a:lnTo>
-                <a:lnTo>
-                  <a:pt x="2473942" y="6866467"/>
-                </a:lnTo>
-                <a:lnTo>
-                  <a:pt x="0" y="0"/>
-                </a:lnTo>
-                <a:close/>
-              </a:path>
-            </a:pathLst>
-          </a:custGeom>
-          <a:solidFill>
-            <a:schemeClr val="accent2">
-              <a:lumMod val="75000"/>
-              <a:alpha val="47000"/>
-            </a:schemeClr>
-          </a:solidFill>
-          <a:ln>
-            <a:noFill/>
-          </a:ln>
-        </p:spPr>
-        <p:style>
-          <a:lnRef idx="1">
-            <a:schemeClr val="accent1"/>
-          </a:lnRef>
-          <a:fillRef idx="3">
-            <a:schemeClr val="accent1"/>
-          </a:fillRef>
-          <a:effectRef idx="2">
-            <a:schemeClr val="accent1"/>
-          </a:effectRef>
-          <a:fontRef idx="minor">
-            <a:schemeClr val="lt1"/>
-          </a:fontRef>
-        </p:style>
-        <p:txBody>
-          <a:bodyPr/>
-          <a:lstStyle/>
-          <a:p>
-            <a:endParaRPr lang="en-GB"/>
-          </a:p>
-        </p:txBody>
-      </p:sp>
-      <p:sp>
-        <p:nvSpPr>
-          <p:cNvPr id="34" name="Rectangle 28">
-            <a:extLst>
-              <a:ext uri="{FF2B5EF4-FFF2-40B4-BE49-F238E27FC236}">
-                <a16:creationId xmlns:a16="http://schemas.microsoft.com/office/drawing/2014/main" id="{BF120A21-0841-4823-B0C4-28AEBCEF9B78}"/>
-              </a:ext>
-            </a:extLst>
-          </p:cNvPr>
-          <p:cNvSpPr>
-            <a:spLocks noGrp="1"/>
-          </p:cNvSpPr>
-          <p:nvPr/>
-        </p:nvSpPr>
-        <p:spPr>
-          <a:xfrm>
-            <a:off x="10898730" y="-8467"/>
-            <a:ext cx="1290094" cy="6866467"/>
-          </a:xfrm>
-          <a:custGeom>
-            <a:avLst/>
-            <a:gdLst/>
-            <a:ahLst/>
-            <a:cxnLst/>
-            <a:rect l="l" t="t" r="r" b="b"/>
-            <a:pathLst>
-              <a:path w="1290094" h="6858000">
-                <a:moveTo>
-                  <a:pt x="1019735" y="0"/>
-                </a:moveTo>
-                <a:lnTo>
-                  <a:pt x="1290094" y="0"/>
-                </a:lnTo>
-                <a:lnTo>
-                  <a:pt x="1290094" y="6858000"/>
-                </a:lnTo>
-                <a:lnTo>
-                  <a:pt x="0" y="6858000"/>
-                </a:lnTo>
-                <a:lnTo>
-                  <a:pt x="1019735" y="0"/>
-                </a:lnTo>
-                <a:close/>
-              </a:path>
-            </a:pathLst>
-          </a:custGeom>
-          <a:solidFill>
-            <a:schemeClr val="accent1">
-              <a:lumMod val="60000"/>
-              <a:lumOff val="40000"/>
-              <a:alpha val="70000"/>
-            </a:schemeClr>
-          </a:solidFill>
-          <a:ln>
-            <a:noFill/>
-          </a:ln>
-        </p:spPr>
-        <p:style>
-          <a:lnRef idx="1">
-            <a:schemeClr val="accent1"/>
-          </a:lnRef>
-          <a:fillRef idx="3">
-            <a:schemeClr val="accent1"/>
-          </a:fillRef>
-          <a:effectRef idx="2">
-            <a:schemeClr val="accent1"/>
-          </a:effectRef>
-          <a:fontRef idx="minor">
-            <a:schemeClr val="lt1"/>
-          </a:fontRef>
-        </p:style>
-        <p:txBody>
-          <a:bodyPr/>
-          <a:lstStyle/>
-          <a:p>
-            <a:endParaRPr lang="en-GB"/>
-          </a:p>
-        </p:txBody>
-      </p:sp>
-      <p:sp>
-        <p:nvSpPr>
-          <p:cNvPr id="36" name="Rectangle 29">
-            <a:extLst>
-              <a:ext uri="{FF2B5EF4-FFF2-40B4-BE49-F238E27FC236}">
-                <a16:creationId xmlns:a16="http://schemas.microsoft.com/office/drawing/2014/main" id="{DBB05BAE-BBD3-4289-899F-A6851503C6B0}"/>
-              </a:ext>
-            </a:extLst>
-          </p:cNvPr>
-          <p:cNvSpPr>
-            <a:spLocks noGrp="1"/>
-          </p:cNvSpPr>
-          <p:nvPr/>
-        </p:nvSpPr>
-        <p:spPr>
-          <a:xfrm>
-            <a:off x="10938999" y="-8467"/>
-            <a:ext cx="1249825" cy="6866467"/>
-          </a:xfrm>
-          <a:custGeom>
-            <a:avLst/>
-            <a:gdLst/>
-            <a:ahLst/>
-            <a:cxnLst/>
-            <a:rect l="l" t="t" r="r" b="b"/>
-            <a:pathLst>
-              <a:path w="1249825" h="6858000">
-                <a:moveTo>
-                  <a:pt x="0" y="0"/>
-                </a:moveTo>
-                <a:lnTo>
-                  <a:pt x="1249825" y="0"/>
-                </a:lnTo>
-                <a:lnTo>
-                  <a:pt x="1249825" y="6858000"/>
-                </a:lnTo>
-                <a:lnTo>
-                  <a:pt x="1109382" y="6858000"/>
-                </a:lnTo>
-                <a:lnTo>
-                  <a:pt x="0" y="0"/>
-                </a:lnTo>
-                <a:close/>
-              </a:path>
-            </a:pathLst>
-          </a:custGeom>
-          <a:solidFill>
-            <a:schemeClr val="accent1">
-              <a:alpha val="65000"/>
-            </a:schemeClr>
-          </a:solidFill>
-          <a:ln>
-            <a:noFill/>
-          </a:ln>
-        </p:spPr>
-        <p:style>
-          <a:lnRef idx="1">
-            <a:schemeClr val="accent1"/>
-          </a:lnRef>
-          <a:fillRef idx="3">
-            <a:schemeClr val="accent1"/>
-          </a:fillRef>
-          <a:effectRef idx="2">
-            <a:schemeClr val="accent1"/>
-          </a:effectRef>
-          <a:fontRef idx="minor">
-            <a:schemeClr val="lt1"/>
-          </a:fontRef>
-        </p:style>
-        <p:txBody>
-          <a:bodyPr/>
-          <a:lstStyle/>
-          <a:p>
-            <a:endParaRPr lang="en-GB"/>
-          </a:p>
-        </p:txBody>
-      </p:sp>
-      <p:sp>
-        <p:nvSpPr>
-          <p:cNvPr id="38" name="Isosceles Triangle 29">
-            <a:extLst>
-              <a:ext uri="{FF2B5EF4-FFF2-40B4-BE49-F238E27FC236}">
-                <a16:creationId xmlns:a16="http://schemas.microsoft.com/office/drawing/2014/main" id="{9874D11C-36F5-4BBE-A490-019A54E953B0}"/>
-              </a:ext>
-            </a:extLst>
-          </p:cNvPr>
-          <p:cNvSpPr>
-            <a:spLocks noGrp="1"/>
-          </p:cNvSpPr>
-          <p:nvPr/>
-        </p:nvSpPr>
-        <p:spPr>
-          <a:xfrm>
-            <a:off x="10371666" y="3589867"/>
-            <a:ext cx="1817159" cy="3268133"/>
-          </a:xfrm>
-          <a:prstGeom prst="triangle">
-            <a:avLst>
-              <a:gd name="adj" fmla="val 100000"/>
-            </a:avLst>
-          </a:prstGeom>
-          <a:solidFill>
-            <a:schemeClr val="accent1">
-              <a:alpha val="80000"/>
-            </a:schemeClr>
-          </a:solidFill>
-          <a:ln>
-            <a:noFill/>
-          </a:ln>
-        </p:spPr>
-        <p:style>
-          <a:lnRef idx="1">
-            <a:schemeClr val="accent1"/>
-          </a:lnRef>
-          <a:fillRef idx="3">
-            <a:schemeClr val="accent1"/>
-          </a:fillRef>
-          <a:effectRef idx="2">
-            <a:schemeClr val="accent1"/>
-          </a:effectRef>
-          <a:fontRef idx="minor">
-            <a:schemeClr val="lt1"/>
-          </a:fontRef>
-        </p:style>
-        <p:txBody>
-          <a:bodyPr/>
-          <a:lstStyle/>
-          <a:p>
-            <a:endParaRPr lang="en-GB"/>
-          </a:p>
-        </p:txBody>
-      </p:sp>
-      <p:sp>
-        <p:nvSpPr>
-          <p:cNvPr id="39" name="Clean content area">
-            <a:extLst>
-              <a:ext uri="{FF2B5EF4-FFF2-40B4-BE49-F238E27FC236}">
-                <a16:creationId xmlns:a16="http://schemas.microsoft.com/office/drawing/2014/main" id="{5AC6E51A-2553-4EAC-84B5-CC8A0E54FFC0}"/>
-              </a:ext>
-            </a:extLst>
-          </p:cNvPr>
-          <p:cNvSpPr>
-            <a:spLocks noGrp="1"/>
-          </p:cNvSpPr>
-          <p:nvPr/>
-        </p:nvSpPr>
-        <p:spPr>
-          <a:xfrm>
-            <a:off x="590550" y="1352550"/>
-            <a:ext cx="11049000" cy="5000625"/>
-          </a:xfrm>
-          <a:prstGeom prst="rect">
-            <a:avLst/>
-          </a:prstGeom>
-          <a:solidFill>
-            <a:srgbClr val="FFFFFF"/>
-          </a:solidFill>
-          <a:ln w="0">
-            <a:noFill/>
-          </a:ln>
-        </p:spPr>
-        <p:txBody>
-          <a:bodyPr/>
-          <a:lstStyle/>
-          <a:p>
-            <a:endParaRPr lang="en-GB"/>
-          </a:p>
-        </p:txBody>
-      </p:sp>
-      <p:sp>
-        <p:nvSpPr>
-          <p:cNvPr id="40" name="Section reference">
-            <a:extLst>
-              <a:ext uri="{FF2B5EF4-FFF2-40B4-BE49-F238E27FC236}">
-                <a16:creationId xmlns:a16="http://schemas.microsoft.com/office/drawing/2014/main" id="{7EC71942-C115-4154-8688-97C8FC3B8B2B}"/>
-              </a:ext>
-            </a:extLst>
-          </p:cNvPr>
-          <p:cNvSpPr>
-            <a:spLocks noGrp="1"/>
-          </p:cNvSpPr>
-          <p:nvPr/>
-        </p:nvSpPr>
-        <p:spPr>
-          <a:xfrm>
-            <a:off x="781050" y="1466850"/>
-            <a:ext cx="5334000" cy="266700"/>
-          </a:xfrm>
-          <a:prstGeom prst="rect">
-            <a:avLst/>
-          </a:prstGeom>
-          <a:noFill/>
-          <a:ln w="0">
-            <a:noFill/>
-          </a:ln>
-        </p:spPr>
-        <p:txBody>
-          <a:bodyPr>
-            <a:noAutofit/>
-          </a:bodyPr>
-          <a:lstStyle/>
-          <a:p>
-            <a:pPr>
-              <a:defRPr sz="1275" b="1">
-                <a:solidFill>
-                  <a:srgbClr val="168EAD"/>
-                </a:solidFill>
-                <a:latin typeface="Trebuchet MS"/>
-                <a:ea typeface="Trebuchet MS"/>
-                <a:cs typeface="Trebuchet MS"/>
-              </a:defRPr>
+            <a:r>
+              <a:rPr lang="el-GR" sz="2800" dirty="0"/>
+              <a:t>1 </a:t>
+            </a:r>
+            <a:r>
+              <a:rPr lang="en-US" sz="2800" dirty="0"/>
+              <a:t>Kbps ≈ 1.000 bps </a:t>
+            </a:r>
+          </a:p>
+          <a:p>
+            <a:pPr marL="914400" lvl="1" indent="-514350">
+              <a:buFont typeface="+mj-lt"/>
+              <a:buAutoNum type="arabicPeriod"/>
             </a:pPr>
             <a:r>
-              <a:rPr sz="1275" b="1">
-                <a:solidFill>
-                  <a:srgbClr val="168EAD"/>
-                </a:solidFill>
-                <a:latin typeface="Trebuchet MS"/>
-                <a:ea typeface="Trebuchet MS"/>
-                <a:cs typeface="Trebuchet MS"/>
-              </a:rPr>
-              <a:t>A.5.M1 | Θεωρία | Μέρος 2</a:t>
-            </a:r>
-          </a:p>
-        </p:txBody>
-      </p:sp>
-      <p:sp>
-        <p:nvSpPr>
-          <p:cNvPr id="41" name="Block heading 1">
-            <a:extLst>
-              <a:ext uri="{FF2B5EF4-FFF2-40B4-BE49-F238E27FC236}">
-                <a16:creationId xmlns:a16="http://schemas.microsoft.com/office/drawing/2014/main" id="{BD2F4B4B-DB2B-4CD9-BDC4-390A30E57A92}"/>
-              </a:ext>
-            </a:extLst>
-          </p:cNvPr>
-          <p:cNvSpPr>
-            <a:spLocks noGrp="1"/>
-          </p:cNvSpPr>
-          <p:nvPr/>
-        </p:nvSpPr>
-        <p:spPr>
-          <a:xfrm>
-            <a:off x="781050" y="1857375"/>
-            <a:ext cx="10048875" cy="285750"/>
-          </a:xfrm>
-          <a:prstGeom prst="rect">
-            <a:avLst/>
-          </a:prstGeom>
-          <a:noFill/>
-          <a:ln w="0">
-            <a:noFill/>
-          </a:ln>
-        </p:spPr>
-        <p:txBody>
-          <a:bodyPr>
-            <a:noAutofit/>
-          </a:bodyPr>
-          <a:lstStyle/>
-          <a:p>
-            <a:pPr>
-              <a:defRPr sz="1575" b="1">
-                <a:solidFill>
-                  <a:srgbClr val="18A7CC"/>
-                </a:solidFill>
-                <a:latin typeface="Trebuchet MS"/>
-                <a:ea typeface="Trebuchet MS"/>
-                <a:cs typeface="Trebuchet MS"/>
-              </a:defRPr>
+              <a:rPr lang="el-GR" sz="2800" dirty="0"/>
+              <a:t>1 </a:t>
+            </a:r>
+            <a:r>
+              <a:rPr lang="en-US" sz="2800" dirty="0"/>
+              <a:t>Mbps ≈ 1.000.000 bps </a:t>
+            </a:r>
+          </a:p>
+          <a:p>
+            <a:pPr marL="914400" lvl="1" indent="-514350">
+              <a:buFont typeface="+mj-lt"/>
+              <a:buAutoNum type="arabicPeriod"/>
             </a:pPr>
             <a:r>
-              <a:rPr sz="1575" b="1">
-                <a:solidFill>
-                  <a:srgbClr val="18A7CC"/>
-                </a:solidFill>
-                <a:latin typeface="Trebuchet MS"/>
-                <a:ea typeface="Trebuchet MS"/>
-                <a:cs typeface="Trebuchet MS"/>
-              </a:rPr>
-              <a:t>bps</a:t>
-            </a:r>
-          </a:p>
-        </p:txBody>
-      </p:sp>
-      <p:sp>
-        <p:nvSpPr>
-          <p:cNvPr id="42" name="Block body 1">
-            <a:extLst>
-              <a:ext uri="{FF2B5EF4-FFF2-40B4-BE49-F238E27FC236}">
-                <a16:creationId xmlns:a16="http://schemas.microsoft.com/office/drawing/2014/main" id="{55E9E526-A8D8-49A3-8C7D-BCD6034D159A}"/>
-              </a:ext>
-            </a:extLst>
-          </p:cNvPr>
-          <p:cNvSpPr>
-            <a:spLocks noGrp="1"/>
-          </p:cNvSpPr>
-          <p:nvPr/>
-        </p:nvSpPr>
-        <p:spPr>
-          <a:xfrm>
-            <a:off x="781050" y="2171700"/>
-            <a:ext cx="10048875" cy="981075"/>
-          </a:xfrm>
-          <a:prstGeom prst="rect">
-            <a:avLst/>
-          </a:prstGeom>
-          <a:noFill/>
-          <a:ln w="0">
-            <a:noFill/>
-          </a:ln>
-        </p:spPr>
-        <p:txBody>
-          <a:bodyPr>
-            <a:noAutofit/>
-          </a:bodyPr>
-          <a:lstStyle/>
-          <a:p>
-            <a:pPr>
-              <a:defRPr sz="1650" b="0">
-                <a:solidFill>
-                  <a:srgbClr val="333333"/>
-                </a:solidFill>
-                <a:latin typeface="Trebuchet MS"/>
-                <a:ea typeface="Trebuchet MS"/>
-                <a:cs typeface="Trebuchet MS"/>
-              </a:defRPr>
+              <a:rPr lang="el-GR" sz="2800" dirty="0"/>
+              <a:t>1 </a:t>
+            </a:r>
+            <a:r>
+              <a:rPr lang="en-US" sz="2800" dirty="0" err="1"/>
+              <a:t>Gbps</a:t>
+            </a:r>
+            <a:r>
+              <a:rPr lang="en-US" sz="2800" dirty="0"/>
+              <a:t> ≈ 1.000.000.000 bps </a:t>
+            </a:r>
+          </a:p>
+          <a:p>
+            <a:pPr marL="0" indent="0" algn="just">
+              <a:buNone/>
             </a:pPr>
-            <a:r>
-              <a:rPr sz="1650" b="0">
-                <a:solidFill>
-                  <a:srgbClr val="333333"/>
-                </a:solidFill>
-                <a:latin typeface="Trebuchet MS"/>
-                <a:ea typeface="Trebuchet MS"/>
-                <a:cs typeface="Trebuchet MS"/>
-              </a:rPr>
-              <a:t>Η ταχύτητα δείχνει πόσα bits μεταφέρονται ανά δευτερόλεπτο.</a:t>
-            </a:r>
-          </a:p>
-        </p:txBody>
-      </p:sp>
-      <p:sp>
-        <p:nvSpPr>
-          <p:cNvPr id="43" name="Block heading 2">
-            <a:extLst>
-              <a:ext uri="{FF2B5EF4-FFF2-40B4-BE49-F238E27FC236}">
-                <a16:creationId xmlns:a16="http://schemas.microsoft.com/office/drawing/2014/main" id="{DF67FA99-2A3D-4100-BD08-9937E9976E36}"/>
-              </a:ext>
-            </a:extLst>
-          </p:cNvPr>
-          <p:cNvSpPr>
-            <a:spLocks noGrp="1"/>
-          </p:cNvSpPr>
-          <p:nvPr/>
-        </p:nvSpPr>
-        <p:spPr>
-          <a:xfrm>
-            <a:off x="781050" y="3190875"/>
-            <a:ext cx="10048875" cy="285750"/>
-          </a:xfrm>
-          <a:prstGeom prst="rect">
-            <a:avLst/>
-          </a:prstGeom>
-          <a:noFill/>
-          <a:ln w="0">
-            <a:noFill/>
-          </a:ln>
-        </p:spPr>
-        <p:txBody>
-          <a:bodyPr>
-            <a:noAutofit/>
-          </a:bodyPr>
-          <a:lstStyle/>
-          <a:p>
-            <a:pPr>
-              <a:defRPr sz="1575" b="1">
-                <a:solidFill>
-                  <a:srgbClr val="18A7CC"/>
-                </a:solidFill>
-                <a:latin typeface="Trebuchet MS"/>
-                <a:ea typeface="Trebuchet MS"/>
-                <a:cs typeface="Trebuchet MS"/>
-              </a:defRPr>
-            </a:pPr>
-            <a:r>
-              <a:rPr sz="1575" b="1">
-                <a:solidFill>
-                  <a:srgbClr val="18A7CC"/>
-                </a:solidFill>
-                <a:latin typeface="Trebuchet MS"/>
-                <a:ea typeface="Trebuchet MS"/>
-                <a:cs typeface="Trebuchet MS"/>
-              </a:rPr>
-              <a:t>Μονάδες</a:t>
-            </a:r>
-          </a:p>
-        </p:txBody>
-      </p:sp>
-      <p:sp>
-        <p:nvSpPr>
-          <p:cNvPr id="44" name="Block body 2">
-            <a:extLst>
-              <a:ext uri="{FF2B5EF4-FFF2-40B4-BE49-F238E27FC236}">
-                <a16:creationId xmlns:a16="http://schemas.microsoft.com/office/drawing/2014/main" id="{6FF537DB-5C30-41AF-8D84-44216D166F24}"/>
-              </a:ext>
-            </a:extLst>
-          </p:cNvPr>
-          <p:cNvSpPr>
-            <a:spLocks noGrp="1"/>
-          </p:cNvSpPr>
-          <p:nvPr/>
-        </p:nvSpPr>
-        <p:spPr>
-          <a:xfrm>
-            <a:off x="781050" y="3505200"/>
-            <a:ext cx="10048875" cy="981075"/>
-          </a:xfrm>
-          <a:prstGeom prst="rect">
-            <a:avLst/>
-          </a:prstGeom>
-          <a:noFill/>
-          <a:ln w="0">
-            <a:noFill/>
-          </a:ln>
-        </p:spPr>
-        <p:txBody>
-          <a:bodyPr>
-            <a:noAutofit/>
-          </a:bodyPr>
-          <a:lstStyle/>
-          <a:p>
-            <a:pPr>
-              <a:defRPr sz="1650" b="0">
-                <a:solidFill>
-                  <a:srgbClr val="333333"/>
-                </a:solidFill>
-                <a:latin typeface="Trebuchet MS"/>
-                <a:ea typeface="Trebuchet MS"/>
-                <a:cs typeface="Trebuchet MS"/>
-              </a:defRPr>
-            </a:pPr>
-            <a:r>
-              <a:rPr sz="1650" b="0">
-                <a:solidFill>
-                  <a:srgbClr val="333333"/>
-                </a:solidFill>
-                <a:latin typeface="Trebuchet MS"/>
-                <a:ea typeface="Trebuchet MS"/>
-                <a:cs typeface="Trebuchet MS"/>
-              </a:rPr>
-              <a:t>Οι συνηθισμένες μονάδες είναι Kbps, Mbps και Gbps.</a:t>
-            </a:r>
-          </a:p>
-        </p:txBody>
-      </p:sp>
-      <p:sp>
-        <p:nvSpPr>
-          <p:cNvPr id="45" name="Block heading 3">
-            <a:extLst>
-              <a:ext uri="{FF2B5EF4-FFF2-40B4-BE49-F238E27FC236}">
-                <a16:creationId xmlns:a16="http://schemas.microsoft.com/office/drawing/2014/main" id="{6F498E4C-8543-4F4D-A939-FB29A4F5F48E}"/>
-              </a:ext>
-            </a:extLst>
-          </p:cNvPr>
-          <p:cNvSpPr>
-            <a:spLocks noGrp="1"/>
-          </p:cNvSpPr>
-          <p:nvPr/>
-        </p:nvSpPr>
-        <p:spPr>
-          <a:xfrm>
-            <a:off x="781050" y="4524375"/>
-            <a:ext cx="10048875" cy="285750"/>
-          </a:xfrm>
-          <a:prstGeom prst="rect">
-            <a:avLst/>
-          </a:prstGeom>
-          <a:noFill/>
-          <a:ln w="0">
-            <a:noFill/>
-          </a:ln>
-        </p:spPr>
-        <p:txBody>
-          <a:bodyPr>
-            <a:noAutofit/>
-          </a:bodyPr>
-          <a:lstStyle/>
-          <a:p>
-            <a:pPr>
-              <a:defRPr sz="1575" b="1">
-                <a:solidFill>
-                  <a:srgbClr val="18A7CC"/>
-                </a:solidFill>
-                <a:latin typeface="Trebuchet MS"/>
-                <a:ea typeface="Trebuchet MS"/>
-                <a:cs typeface="Trebuchet MS"/>
-              </a:defRPr>
-            </a:pPr>
-            <a:r>
-              <a:rPr sz="1575" b="1">
-                <a:solidFill>
-                  <a:srgbClr val="18A7CC"/>
-                </a:solidFill>
-                <a:latin typeface="Trebuchet MS"/>
-                <a:ea typeface="Trebuchet MS"/>
-                <a:cs typeface="Trebuchet MS"/>
-              </a:rPr>
-              <a:t>Παράγοντες</a:t>
-            </a:r>
-          </a:p>
-        </p:txBody>
-      </p:sp>
-      <p:sp>
-        <p:nvSpPr>
-          <p:cNvPr id="46" name="Block body 3">
-            <a:extLst>
-              <a:ext uri="{FF2B5EF4-FFF2-40B4-BE49-F238E27FC236}">
-                <a16:creationId xmlns:a16="http://schemas.microsoft.com/office/drawing/2014/main" id="{A3CE1A48-CEF0-4B05-AE13-BD17F3B30844}"/>
-              </a:ext>
-            </a:extLst>
-          </p:cNvPr>
-          <p:cNvSpPr>
-            <a:spLocks noGrp="1"/>
-          </p:cNvSpPr>
-          <p:nvPr/>
-        </p:nvSpPr>
-        <p:spPr>
-          <a:xfrm>
-            <a:off x="781050" y="4838700"/>
-            <a:ext cx="10048875" cy="981075"/>
-          </a:xfrm>
-          <a:prstGeom prst="rect">
-            <a:avLst/>
-          </a:prstGeom>
-          <a:noFill/>
-          <a:ln w="0">
-            <a:noFill/>
-          </a:ln>
-        </p:spPr>
-        <p:txBody>
-          <a:bodyPr>
-            <a:noAutofit/>
-          </a:bodyPr>
-          <a:lstStyle/>
-          <a:p>
-            <a:pPr>
-              <a:defRPr sz="1650" b="0">
-                <a:solidFill>
-                  <a:srgbClr val="333333"/>
-                </a:solidFill>
-                <a:latin typeface="Trebuchet MS"/>
-                <a:ea typeface="Trebuchet MS"/>
-                <a:cs typeface="Trebuchet MS"/>
-              </a:defRPr>
-            </a:pPr>
-            <a:r>
-              <a:rPr sz="1650" b="0">
-                <a:solidFill>
-                  <a:srgbClr val="333333"/>
-                </a:solidFill>
-                <a:latin typeface="Trebuchet MS"/>
-                <a:ea typeface="Trebuchet MS"/>
-                <a:cs typeface="Trebuchet MS"/>
-              </a:rPr>
-              <a:t>Η πραγματική ταχύτητα εξαρτάται από το μέσο σύνδεσης και τις δυνατότητες των συσκευών.</a:t>
-            </a:r>
+            <a:endParaRPr lang="el-GR" sz="4000" b="1" i="1" dirty="0">
+              <a:solidFill>
+                <a:srgbClr val="FF0000"/>
+              </a:solidFill>
+            </a:endParaRPr>
           </a:p>
         </p:txBody>
       </p:sp>
     </p:spTree>
     <p:extLst>
       <p:ext uri="{BB962C8B-B14F-4D97-AF65-F5344CB8AC3E}">
-        <p14:creationId xmlns:p14="http://schemas.microsoft.com/office/powerpoint/2010/main" val="1459875993"/>
+        <p14:creationId xmlns:p14="http://schemas.microsoft.com/office/powerpoint/2010/main" val="3963452469"/>
       </p:ext>
     </p:extLst>
   </p:cSld>
@@ -13898,7 +12000,13 @@
       </p:grpSpPr>
       <p:sp>
         <p:nvSpPr>
-          <p:cNvPr id="2" name="Title 1"/>
+          <p:cNvPr id="2" name="Title 1">
+            <a:extLst>
+              <a:ext uri="{FF2B5EF4-FFF2-40B4-BE49-F238E27FC236}">
+                <a16:creationId xmlns:a16="http://schemas.microsoft.com/office/drawing/2014/main" id="{B66EAA72-EC7F-4ECD-B4EF-D54E871C6881}"/>
+              </a:ext>
+            </a:extLst>
+          </p:cNvPr>
           <p:cNvSpPr>
             <a:spLocks noGrp="1"/>
           </p:cNvSpPr>
@@ -13906,101 +12014,33 @@
             <p:ph type="title"/>
           </p:nvPr>
         </p:nvSpPr>
-        <p:spPr/>
-        <p:txBody>
-          <a:bodyPr/>
-          <a:lstStyle/>
-          <a:p>
-            <a:r>
-              <a:rPr lang="el-GR" dirty="0"/>
-              <a:t>Ταχύτητες Μεταφοράς Δεδομένων </a:t>
-            </a:r>
-            <a:br>
-              <a:rPr lang="el-GR" dirty="0"/>
-            </a:br>
-            <a:r>
-              <a:rPr lang="el-GR" dirty="0">
-                <a:solidFill>
-                  <a:srgbClr val="FF0000"/>
-                </a:solidFill>
-              </a:rPr>
-              <a:t>(</a:t>
-            </a:r>
-            <a:r>
-              <a:rPr lang="el-GR" dirty="0" err="1">
-                <a:solidFill>
-                  <a:srgbClr val="FF0000"/>
-                </a:solidFill>
-              </a:rPr>
-              <a:t>bps</a:t>
-            </a:r>
-            <a:r>
-              <a:rPr lang="el-GR" dirty="0">
-                <a:solidFill>
-                  <a:srgbClr val="FF0000"/>
-                </a:solidFill>
-              </a:rPr>
-              <a:t>, </a:t>
-            </a:r>
-            <a:r>
-              <a:rPr lang="el-GR" dirty="0" err="1">
-                <a:solidFill>
-                  <a:srgbClr val="FF0000"/>
-                </a:solidFill>
-              </a:rPr>
-              <a:t>Kbps</a:t>
-            </a:r>
-            <a:r>
-              <a:rPr lang="el-GR" dirty="0">
-                <a:solidFill>
-                  <a:srgbClr val="FF0000"/>
-                </a:solidFill>
-              </a:rPr>
-              <a:t>, </a:t>
-            </a:r>
-            <a:r>
-              <a:rPr lang="el-GR" dirty="0" err="1">
-                <a:solidFill>
-                  <a:srgbClr val="FF0000"/>
-                </a:solidFill>
-              </a:rPr>
-              <a:t>Mbps</a:t>
-            </a:r>
-            <a:r>
-              <a:rPr lang="el-GR" dirty="0">
-                <a:solidFill>
-                  <a:srgbClr val="FF0000"/>
-                </a:solidFill>
-              </a:rPr>
-              <a:t> και </a:t>
-            </a:r>
-            <a:r>
-              <a:rPr lang="el-GR" dirty="0" err="1">
-                <a:solidFill>
-                  <a:srgbClr val="FF0000"/>
-                </a:solidFill>
-              </a:rPr>
-              <a:t>Gbps</a:t>
-            </a:r>
-            <a:r>
-              <a:rPr lang="el-GR" dirty="0">
-                <a:solidFill>
-                  <a:srgbClr val="FF0000"/>
-                </a:solidFill>
-              </a:rPr>
-              <a:t>) </a:t>
-            </a:r>
-            <a:endParaRPr lang="en-US" dirty="0">
-              <a:solidFill>
-                <a:srgbClr val="FF0000"/>
-              </a:solidFill>
-            </a:endParaRPr>
-          </a:p>
-        </p:txBody>
-      </p:sp>
-      <p:sp>
-        <p:nvSpPr>
-          <p:cNvPr id="3" name="Content Placeholder 2"/>
+        <p:spPr>
+          <a:xfrm>
+            <a:off x="677332" y="609600"/>
+            <a:ext cx="5825735" cy="1320800"/>
+          </a:xfrm>
+        </p:spPr>
+        <p:txBody>
+          <a:bodyPr vert="horz" lIns="91440" tIns="45720" rIns="91440" bIns="45720" anchor="t">
+            <a:normAutofit/>
+          </a:bodyPr>
+          <a:lstStyle/>
+          <a:p>
+            <a:r>
+              <a:t>Υπηρεσίες δικτύου</a:t>
+            </a:r>
+          </a:p>
+        </p:txBody>
+      </p:sp>
+      <p:sp>
+        <p:nvSpPr>
+          <p:cNvPr id="4" name="Content Placeholder 2">
+            <a:extLst>
+              <a:ext uri="{FF2B5EF4-FFF2-40B4-BE49-F238E27FC236}">
+                <a16:creationId xmlns:a16="http://schemas.microsoft.com/office/drawing/2014/main" id="{EB3F7303-CEA4-CFC4-5052-5C4AC627408E}"/>
+              </a:ext>
+            </a:extLst>
+          </p:cNvPr>
           <p:cNvSpPr>
             <a:spLocks noGrp="1"/>
           </p:cNvSpPr>
@@ -14010,8 +12050,8 @@
         </p:nvSpPr>
         <p:spPr>
           <a:xfrm>
-            <a:off x="806730" y="1850038"/>
-            <a:ext cx="8596668" cy="3880773"/>
+            <a:off x="677333" y="2160589"/>
+            <a:ext cx="6716071" cy="3880772"/>
           </a:xfrm>
         </p:spPr>
         <p:txBody>
@@ -14020,232 +12060,456 @@
           </a:bodyPr>
           <a:lstStyle/>
           <a:p>
-            <a:r>
-              <a:rPr lang="el-GR" sz="3200" dirty="0">
-                <a:solidFill>
-                  <a:schemeClr val="accent2">
-                    <a:lumMod val="50000"/>
-                  </a:schemeClr>
-                </a:solidFill>
+            <a:endParaRPr/>
+          </a:p>
+        </p:txBody>
+      </p:sp>
+      <p:sp>
+        <p:nvSpPr>
+          <p:cNvPr id="5" name="Clean content area">
+            <a:extLst>
+              <a:ext uri="{FF2B5EF4-FFF2-40B4-BE49-F238E27FC236}">
+                <a16:creationId xmlns:a16="http://schemas.microsoft.com/office/drawing/2014/main" id="{2665A598-14EA-47CE-8D97-710DB5118506}"/>
+              </a:ext>
+            </a:extLst>
+          </p:cNvPr>
+          <p:cNvSpPr>
+            <a:spLocks noGrp="1"/>
+          </p:cNvSpPr>
+          <p:nvPr/>
+        </p:nvSpPr>
+        <p:spPr>
+          <a:xfrm>
+            <a:off x="590550" y="1352550"/>
+            <a:ext cx="11049000" cy="5000625"/>
+          </a:xfrm>
+          <a:prstGeom prst="rect">
+            <a:avLst/>
+          </a:prstGeom>
+          <a:solidFill>
+            <a:srgbClr val="FFFFFF"/>
+          </a:solidFill>
+          <a:ln w="0">
+            <a:noFill/>
+          </a:ln>
+        </p:spPr>
+        <p:txBody>
+          <a:bodyPr/>
+          <a:lstStyle/>
+          <a:p>
+            <a:endParaRPr lang="en-GB"/>
+          </a:p>
+        </p:txBody>
+      </p:sp>
+      <p:sp>
+        <p:nvSpPr>
+          <p:cNvPr id="6" name="Section reference">
+            <a:extLst>
+              <a:ext uri="{FF2B5EF4-FFF2-40B4-BE49-F238E27FC236}">
+                <a16:creationId xmlns:a16="http://schemas.microsoft.com/office/drawing/2014/main" id="{B912E555-D9EC-422C-B2C8-039D3FA6DE11}"/>
+              </a:ext>
+            </a:extLst>
+          </p:cNvPr>
+          <p:cNvSpPr>
+            <a:spLocks noGrp="1"/>
+          </p:cNvSpPr>
+          <p:nvPr/>
+        </p:nvSpPr>
+        <p:spPr>
+          <a:xfrm>
+            <a:off x="781050" y="1466850"/>
+            <a:ext cx="5334000" cy="266700"/>
+          </a:xfrm>
+          <a:prstGeom prst="rect">
+            <a:avLst/>
+          </a:prstGeom>
+          <a:noFill/>
+          <a:ln w="0">
+            <a:noFill/>
+          </a:ln>
+        </p:spPr>
+        <p:txBody>
+          <a:bodyPr>
+            <a:noAutofit/>
+          </a:bodyPr>
+          <a:lstStyle/>
+          <a:p>
+            <a:pPr>
+              <a:defRPr sz="1275" b="1">
+                <a:solidFill>
+                  <a:srgbClr val="168EAD"/>
+                </a:solidFill>
+                <a:latin typeface="Trebuchet MS"/>
+                <a:ea typeface="Trebuchet MS"/>
+                <a:cs typeface="Trebuchet MS"/>
+              </a:defRPr>
+            </a:pPr>
+            <a:r>
+              <a:rPr sz="1275" b="1">
+                <a:solidFill>
+                  <a:srgbClr val="168EAD"/>
+                </a:solidFill>
+                <a:latin typeface="Trebuchet MS"/>
+                <a:ea typeface="Trebuchet MS"/>
+                <a:cs typeface="Trebuchet MS"/>
               </a:rPr>
-              <a:t>Ο αριθμός δυαδικών ψηφίων (</a:t>
-            </a:r>
-            <a:r>
-              <a:rPr lang="el-GR" sz="3200" dirty="0" err="1">
-                <a:solidFill>
-                  <a:schemeClr val="accent2">
-                    <a:lumMod val="50000"/>
-                  </a:schemeClr>
-                </a:solidFill>
+              <a:t>A.5.M1 | Θεωρία | Μέρος 2</a:t>
+            </a:r>
+          </a:p>
+        </p:txBody>
+      </p:sp>
+      <p:sp>
+        <p:nvSpPr>
+          <p:cNvPr id="7" name="Block heading 1">
+            <a:extLst>
+              <a:ext uri="{FF2B5EF4-FFF2-40B4-BE49-F238E27FC236}">
+                <a16:creationId xmlns:a16="http://schemas.microsoft.com/office/drawing/2014/main" id="{EC0A44CB-5D23-4C66-B72B-0E57B2B3C902}"/>
+              </a:ext>
+            </a:extLst>
+          </p:cNvPr>
+          <p:cNvSpPr>
+            <a:spLocks noGrp="1"/>
+          </p:cNvSpPr>
+          <p:nvPr/>
+        </p:nvSpPr>
+        <p:spPr>
+          <a:xfrm>
+            <a:off x="781050" y="1857375"/>
+            <a:ext cx="10048875" cy="285750"/>
+          </a:xfrm>
+          <a:prstGeom prst="rect">
+            <a:avLst/>
+          </a:prstGeom>
+          <a:noFill/>
+          <a:ln w="0">
+            <a:noFill/>
+          </a:ln>
+        </p:spPr>
+        <p:txBody>
+          <a:bodyPr>
+            <a:noAutofit/>
+          </a:bodyPr>
+          <a:lstStyle/>
+          <a:p>
+            <a:pPr>
+              <a:defRPr sz="1575" b="1">
+                <a:solidFill>
+                  <a:srgbClr val="18A7CC"/>
+                </a:solidFill>
+                <a:latin typeface="Trebuchet MS"/>
+                <a:ea typeface="Trebuchet MS"/>
+                <a:cs typeface="Trebuchet MS"/>
+              </a:defRPr>
+            </a:pPr>
+            <a:r>
+              <a:rPr sz="1575" b="1">
+                <a:solidFill>
+                  <a:srgbClr val="18A7CC"/>
+                </a:solidFill>
+                <a:latin typeface="Trebuchet MS"/>
+                <a:ea typeface="Trebuchet MS"/>
+                <a:cs typeface="Trebuchet MS"/>
               </a:rPr>
-              <a:t>bits</a:t>
-            </a:r>
-            <a:r>
-              <a:rPr lang="el-GR" sz="3200" dirty="0">
-                <a:solidFill>
-                  <a:schemeClr val="accent2">
-                    <a:lumMod val="50000"/>
-                  </a:schemeClr>
-                </a:solidFill>
+              <a:t>Τοπικό δίκτυο</a:t>
+            </a:r>
+          </a:p>
+        </p:txBody>
+      </p:sp>
+      <p:sp>
+        <p:nvSpPr>
+          <p:cNvPr id="8" name="Block body 1">
+            <a:extLst>
+              <a:ext uri="{FF2B5EF4-FFF2-40B4-BE49-F238E27FC236}">
+                <a16:creationId xmlns:a16="http://schemas.microsoft.com/office/drawing/2014/main" id="{DA9AE494-1D41-4B99-9FA2-68B4C6F0629D}"/>
+              </a:ext>
+            </a:extLst>
+          </p:cNvPr>
+          <p:cNvSpPr>
+            <a:spLocks noGrp="1"/>
+          </p:cNvSpPr>
+          <p:nvPr/>
+        </p:nvSpPr>
+        <p:spPr>
+          <a:xfrm>
+            <a:off x="781050" y="2171700"/>
+            <a:ext cx="10048875" cy="981075"/>
+          </a:xfrm>
+          <a:prstGeom prst="rect">
+            <a:avLst/>
+          </a:prstGeom>
+          <a:noFill/>
+          <a:ln w="0">
+            <a:noFill/>
+          </a:ln>
+        </p:spPr>
+        <p:txBody>
+          <a:bodyPr>
+            <a:noAutofit/>
+          </a:bodyPr>
+          <a:lstStyle/>
+          <a:p>
+            <a:pPr>
+              <a:defRPr sz="1650" b="0">
+                <a:solidFill>
+                  <a:srgbClr val="333333"/>
+                </a:solidFill>
+                <a:latin typeface="Trebuchet MS"/>
+                <a:ea typeface="Trebuchet MS"/>
+                <a:cs typeface="Trebuchet MS"/>
+              </a:defRPr>
+            </a:pPr>
+            <a:r>
+              <a:rPr sz="1650" b="0">
+                <a:solidFill>
+                  <a:srgbClr val="333333"/>
+                </a:solidFill>
+                <a:latin typeface="Trebuchet MS"/>
+                <a:ea typeface="Trebuchet MS"/>
+                <a:cs typeface="Trebuchet MS"/>
               </a:rPr>
-              <a:t>) που μεταφέρονται από συσκευή σε συσκευή ανά δευτερόλεπτο (</a:t>
-            </a:r>
-            <a:r>
-              <a:rPr lang="el-GR" sz="3200" dirty="0" err="1">
-                <a:solidFill>
-                  <a:schemeClr val="accent2">
-                    <a:lumMod val="50000"/>
-                  </a:schemeClr>
-                </a:solidFill>
+              <a:t>Μπορεί να παρέχει κοινόχρηστα αρχεία, λογισμικό και εκτυπωτές.</a:t>
+            </a:r>
+          </a:p>
+        </p:txBody>
+      </p:sp>
+      <p:sp>
+        <p:nvSpPr>
+          <p:cNvPr id="9" name="Block heading 2">
+            <a:extLst>
+              <a:ext uri="{FF2B5EF4-FFF2-40B4-BE49-F238E27FC236}">
+                <a16:creationId xmlns:a16="http://schemas.microsoft.com/office/drawing/2014/main" id="{4339F8F6-22FD-4B7B-A618-B6AF147C937C}"/>
+              </a:ext>
+            </a:extLst>
+          </p:cNvPr>
+          <p:cNvSpPr>
+            <a:spLocks noGrp="1"/>
+          </p:cNvSpPr>
+          <p:nvPr/>
+        </p:nvSpPr>
+        <p:spPr>
+          <a:xfrm>
+            <a:off x="781050" y="3190875"/>
+            <a:ext cx="10048875" cy="285750"/>
+          </a:xfrm>
+          <a:prstGeom prst="rect">
+            <a:avLst/>
+          </a:prstGeom>
+          <a:noFill/>
+          <a:ln w="0">
+            <a:noFill/>
+          </a:ln>
+        </p:spPr>
+        <p:txBody>
+          <a:bodyPr>
+            <a:noAutofit/>
+          </a:bodyPr>
+          <a:lstStyle/>
+          <a:p>
+            <a:pPr>
+              <a:defRPr sz="1575" b="1">
+                <a:solidFill>
+                  <a:srgbClr val="18A7CC"/>
+                </a:solidFill>
+                <a:latin typeface="Trebuchet MS"/>
+                <a:ea typeface="Trebuchet MS"/>
+                <a:cs typeface="Trebuchet MS"/>
+              </a:defRPr>
+            </a:pPr>
+            <a:r>
+              <a:rPr sz="1575" b="1">
+                <a:solidFill>
+                  <a:srgbClr val="18A7CC"/>
+                </a:solidFill>
+                <a:latin typeface="Trebuchet MS"/>
+                <a:ea typeface="Trebuchet MS"/>
+                <a:cs typeface="Trebuchet MS"/>
               </a:rPr>
-              <a:t>second</a:t>
-            </a:r>
-            <a:r>
-              <a:rPr lang="el-GR" sz="3200" dirty="0">
-                <a:solidFill>
-                  <a:schemeClr val="accent2">
-                    <a:lumMod val="50000"/>
-                  </a:schemeClr>
-                </a:solidFill>
+              <a:t>Παγκόσμιος Ιστός</a:t>
+            </a:r>
+          </a:p>
+        </p:txBody>
+      </p:sp>
+      <p:sp>
+        <p:nvSpPr>
+          <p:cNvPr id="10" name="Block body 2">
+            <a:extLst>
+              <a:ext uri="{FF2B5EF4-FFF2-40B4-BE49-F238E27FC236}">
+                <a16:creationId xmlns:a16="http://schemas.microsoft.com/office/drawing/2014/main" id="{69D5182C-071A-4BC3-B17B-4FD64AD7CA8C}"/>
+              </a:ext>
+            </a:extLst>
+          </p:cNvPr>
+          <p:cNvSpPr>
+            <a:spLocks noGrp="1"/>
+          </p:cNvSpPr>
+          <p:nvPr/>
+        </p:nvSpPr>
+        <p:spPr>
+          <a:xfrm>
+            <a:off x="781050" y="3505200"/>
+            <a:ext cx="10048875" cy="981075"/>
+          </a:xfrm>
+          <a:prstGeom prst="rect">
+            <a:avLst/>
+          </a:prstGeom>
+          <a:noFill/>
+          <a:ln w="0">
+            <a:noFill/>
+          </a:ln>
+        </p:spPr>
+        <p:txBody>
+          <a:bodyPr>
+            <a:noAutofit/>
+          </a:bodyPr>
+          <a:lstStyle/>
+          <a:p>
+            <a:pPr>
+              <a:defRPr sz="1650" b="0">
+                <a:solidFill>
+                  <a:srgbClr val="333333"/>
+                </a:solidFill>
+                <a:latin typeface="Trebuchet MS"/>
+                <a:ea typeface="Trebuchet MS"/>
+                <a:cs typeface="Trebuchet MS"/>
+              </a:defRPr>
+            </a:pPr>
+            <a:r>
+              <a:rPr sz="1650" b="0">
+                <a:solidFill>
+                  <a:srgbClr val="333333"/>
+                </a:solidFill>
+                <a:latin typeface="Trebuchet MS"/>
+                <a:ea typeface="Trebuchet MS"/>
+                <a:cs typeface="Trebuchet MS"/>
               </a:rPr>
-              <a:t>) - </a:t>
-            </a:r>
-            <a:r>
-              <a:rPr lang="el-GR" sz="3200" dirty="0" err="1">
-                <a:solidFill>
-                  <a:schemeClr val="accent2">
-                    <a:lumMod val="50000"/>
-                  </a:schemeClr>
-                </a:solidFill>
+              <a:t>Μεταφέρει ιστοσελίδες και άλλα αρχεία ανάμεσα σε web servers και φυλλομετρητές.</a:t>
+            </a:r>
+          </a:p>
+        </p:txBody>
+      </p:sp>
+      <p:sp>
+        <p:nvSpPr>
+          <p:cNvPr id="11" name="Block heading 3">
+            <a:extLst>
+              <a:ext uri="{FF2B5EF4-FFF2-40B4-BE49-F238E27FC236}">
+                <a16:creationId xmlns:a16="http://schemas.microsoft.com/office/drawing/2014/main" id="{027FD00B-01FA-462B-9F5B-C94B8F9E4FBE}"/>
+              </a:ext>
+            </a:extLst>
+          </p:cNvPr>
+          <p:cNvSpPr>
+            <a:spLocks noGrp="1"/>
+          </p:cNvSpPr>
+          <p:nvPr/>
+        </p:nvSpPr>
+        <p:spPr>
+          <a:xfrm>
+            <a:off x="781050" y="4524375"/>
+            <a:ext cx="10048875" cy="285750"/>
+          </a:xfrm>
+          <a:prstGeom prst="rect">
+            <a:avLst/>
+          </a:prstGeom>
+          <a:noFill/>
+          <a:ln w="0">
+            <a:noFill/>
+          </a:ln>
+        </p:spPr>
+        <p:txBody>
+          <a:bodyPr>
+            <a:noAutofit/>
+          </a:bodyPr>
+          <a:lstStyle/>
+          <a:p>
+            <a:pPr>
+              <a:defRPr sz="1575" b="1">
+                <a:solidFill>
+                  <a:srgbClr val="18A7CC"/>
+                </a:solidFill>
+                <a:latin typeface="Trebuchet MS"/>
+                <a:ea typeface="Trebuchet MS"/>
+                <a:cs typeface="Trebuchet MS"/>
+              </a:defRPr>
+            </a:pPr>
+            <a:r>
+              <a:rPr sz="1575" b="1">
+                <a:solidFill>
+                  <a:srgbClr val="18A7CC"/>
+                </a:solidFill>
+                <a:latin typeface="Trebuchet MS"/>
+                <a:ea typeface="Trebuchet MS"/>
+                <a:cs typeface="Trebuchet MS"/>
               </a:rPr>
-              <a:t>bits</a:t>
-            </a:r>
-            <a:r>
-              <a:rPr lang="el-GR" sz="3200" dirty="0">
-                <a:solidFill>
-                  <a:schemeClr val="accent2">
-                    <a:lumMod val="50000"/>
-                  </a:schemeClr>
-                </a:solidFill>
+              <a:t>Άλλες υπηρεσίες</a:t>
+            </a:r>
+          </a:p>
+        </p:txBody>
+      </p:sp>
+      <p:sp>
+        <p:nvSpPr>
+          <p:cNvPr id="12" name="Block body 3">
+            <a:extLst>
+              <a:ext uri="{FF2B5EF4-FFF2-40B4-BE49-F238E27FC236}">
+                <a16:creationId xmlns:a16="http://schemas.microsoft.com/office/drawing/2014/main" id="{3326F68E-53BC-46F3-A6A2-D071D9D188E2}"/>
+              </a:ext>
+            </a:extLst>
+          </p:cNvPr>
+          <p:cNvSpPr>
+            <a:spLocks noGrp="1"/>
+          </p:cNvSpPr>
+          <p:nvPr/>
+        </p:nvSpPr>
+        <p:spPr>
+          <a:xfrm>
+            <a:off x="781050" y="4838700"/>
+            <a:ext cx="10048875" cy="981075"/>
+          </a:xfrm>
+          <a:prstGeom prst="rect">
+            <a:avLst/>
+          </a:prstGeom>
+          <a:noFill/>
+          <a:ln w="0">
+            <a:noFill/>
+          </a:ln>
+        </p:spPr>
+        <p:txBody>
+          <a:bodyPr>
+            <a:noAutofit/>
+          </a:bodyPr>
+          <a:lstStyle/>
+          <a:p>
+            <a:pPr>
+              <a:defRPr sz="1650" b="0">
+                <a:solidFill>
+                  <a:srgbClr val="333333"/>
+                </a:solidFill>
+                <a:latin typeface="Trebuchet MS"/>
+                <a:ea typeface="Trebuchet MS"/>
+                <a:cs typeface="Trebuchet MS"/>
+              </a:defRPr>
+            </a:pPr>
+            <a:r>
+              <a:rPr sz="1650" b="0">
+                <a:solidFill>
+                  <a:srgbClr val="333333"/>
+                </a:solidFill>
+                <a:latin typeface="Trebuchet MS"/>
+                <a:ea typeface="Trebuchet MS"/>
+                <a:cs typeface="Trebuchet MS"/>
               </a:rPr>
-              <a:t> per </a:t>
-            </a:r>
-            <a:r>
-              <a:rPr lang="el-GR" sz="3200" dirty="0" err="1">
-                <a:solidFill>
-                  <a:schemeClr val="accent2">
-                    <a:lumMod val="50000"/>
-                  </a:schemeClr>
-                </a:solidFill>
-              </a:rPr>
-              <a:t>second</a:t>
-            </a:r>
-            <a:r>
-              <a:rPr lang="el-GR" sz="3200" dirty="0">
-                <a:solidFill>
-                  <a:schemeClr val="accent2">
-                    <a:lumMod val="50000"/>
-                  </a:schemeClr>
-                </a:solidFill>
-              </a:rPr>
-              <a:t> (</a:t>
-            </a:r>
-            <a:r>
-              <a:rPr lang="el-GR" sz="3200" dirty="0" err="1">
-                <a:solidFill>
-                  <a:schemeClr val="accent2">
-                    <a:lumMod val="50000"/>
-                  </a:schemeClr>
-                </a:solidFill>
-              </a:rPr>
-              <a:t>bps</a:t>
-            </a:r>
-            <a:r>
-              <a:rPr lang="el-GR" sz="3200" dirty="0">
-                <a:solidFill>
-                  <a:schemeClr val="accent2">
-                    <a:lumMod val="50000"/>
-                  </a:schemeClr>
-                </a:solidFill>
-              </a:rPr>
-              <a:t>, ή b/s).</a:t>
-            </a:r>
-          </a:p>
-          <a:p>
-            <a:endParaRPr lang="el-GR" sz="3200" dirty="0">
-              <a:solidFill>
-                <a:schemeClr val="accent2">
-                  <a:lumMod val="50000"/>
-                </a:schemeClr>
-              </a:solidFill>
-            </a:endParaRPr>
-          </a:p>
-          <a:p>
-            <a:r>
-              <a:rPr lang="el-GR" sz="2800" b="1" dirty="0">
-                <a:solidFill>
-                  <a:srgbClr val="FF0000"/>
-                </a:solidFill>
-              </a:rPr>
-              <a:t>Εξαρτάται από τη δυνατότητα της συσκευής και το είδος του μέσου μετάδοσης. </a:t>
-            </a:r>
-            <a:endParaRPr lang="el-GR" sz="4000" b="1" dirty="0">
-              <a:solidFill>
-                <a:srgbClr val="FF0000"/>
-              </a:solidFill>
-            </a:endParaRPr>
+              <a:t>Το ηλεκτρονικό ταχυδρομείο, η μεταφορά αρχείων και η διαδραστική επικοινωνία λειτουργούν μέσω δικτύων.</a:t>
+            </a:r>
           </a:p>
         </p:txBody>
       </p:sp>
     </p:spTree>
     <p:extLst>
       <p:ext uri="{BB962C8B-B14F-4D97-AF65-F5344CB8AC3E}">
-        <p14:creationId xmlns:p14="http://schemas.microsoft.com/office/powerpoint/2010/main" val="457266055"/>
+        <p14:creationId xmlns:p14="http://schemas.microsoft.com/office/powerpoint/2010/main" val="3786659628"/>
       </p:ext>
     </p:extLst>
   </p:cSld>
   <p:clrMapOvr>
     <a:masterClrMapping/>
   </p:clrMapOvr>
-  <p:timing>
-    <p:tnLst>
-      <p:par>
-        <p:cTn id="1" dur="indefinite" restart="never" nodeType="tmRoot">
-          <p:childTnLst>
-            <p:seq concurrent="1" nextAc="seek">
-              <p:cTn id="2" dur="indefinite" nodeType="mainSeq">
-                <p:childTnLst>
-                  <p:par>
-                    <p:cTn id="3" fill="hold">
-                      <p:stCondLst>
-                        <p:cond delay="indefinite"/>
-                      </p:stCondLst>
-                      <p:childTnLst>
-                        <p:par>
-                          <p:cTn id="4" fill="hold">
-                            <p:stCondLst>
-                              <p:cond delay="0"/>
-                            </p:stCondLst>
-                            <p:childTnLst>
-                              <p:par>
-                                <p:cTn id="5" presetID="1" presetClass="entr" presetSubtype="0" fill="hold" nodeType="clickEffect">
-                                  <p:stCondLst>
-                                    <p:cond delay="0"/>
-                                  </p:stCondLst>
-                                  <p:childTnLst>
-                                    <p:set>
-                                      <p:cBhvr>
-                                        <p:cTn id="6" dur="1" fill="hold">
-                                          <p:stCondLst>
-                                            <p:cond delay="0"/>
-                                          </p:stCondLst>
-                                        </p:cTn>
-                                        <p:tgtEl>
-                                          <p:spTgt spid="3">
-                                            <p:txEl>
-                                              <p:pRg st="2" end="2"/>
-                                            </p:txEl>
-                                          </p:spTgt>
-                                        </p:tgtEl>
-                                        <p:attrNameLst>
-                                          <p:attrName>style.visibility</p:attrName>
-                                        </p:attrNameLst>
-                                      </p:cBhvr>
-                                      <p:to>
-                                        <p:strVal val="visible"/>
-                                      </p:to>
-                                    </p:set>
-                                  </p:childTnLst>
-                                </p:cTn>
-                              </p:par>
-                            </p:childTnLst>
-                          </p:cTn>
-                        </p:par>
-                      </p:childTnLst>
-                    </p:cTn>
-                  </p:par>
-                </p:childTnLst>
-              </p:cTn>
-              <p:prevCondLst>
-                <p:cond evt="onPrev" delay="0">
-                  <p:tgtEl>
-                    <p:sldTgt/>
-                  </p:tgtEl>
-                </p:cond>
-              </p:prevCondLst>
-              <p:nextCondLst>
-                <p:cond evt="onNext" delay="0">
-                  <p:tgtEl>
-                    <p:sldTgt/>
-                  </p:tgtEl>
-                </p:cond>
-              </p:nextCondLst>
-            </p:seq>
-          </p:childTnLst>
-        </p:cTn>
-      </p:par>
-    </p:tnLst>
-  </p:timing>
 </p:sld>
 </file>
 
@@ -14268,7 +12532,13 @@
       </p:grpSpPr>
       <p:sp>
         <p:nvSpPr>
-          <p:cNvPr id="2" name="Title 1"/>
+          <p:cNvPr id="2" name="Title 1">
+            <a:extLst>
+              <a:ext uri="{FF2B5EF4-FFF2-40B4-BE49-F238E27FC236}">
+                <a16:creationId xmlns:a16="http://schemas.microsoft.com/office/drawing/2014/main" id="{00E24EE7-B9BA-0224-B2C0-9853440AA6E9}"/>
+              </a:ext>
+            </a:extLst>
+          </p:cNvPr>
           <p:cNvSpPr>
             <a:spLocks noGrp="1"/>
           </p:cNvSpPr>
@@ -14276,288 +12546,96 @@
             <p:ph type="title"/>
           </p:nvPr>
         </p:nvSpPr>
-        <p:spPr/>
+        <p:spPr>
+          <a:xfrm>
+            <a:off x="677334" y="609600"/>
+            <a:ext cx="8596668" cy="713001"/>
+          </a:xfrm>
+        </p:spPr>
         <p:txBody>
           <a:bodyPr/>
           <a:lstStyle/>
           <a:p>
             <a:r>
-              <a:rPr lang="el-GR" dirty="0"/>
-              <a:t>Ταχύτητες Μεταφοράς Δεδομένων </a:t>
-            </a:r>
-            <a:br>
-              <a:rPr lang="el-GR" dirty="0"/>
-            </a:br>
-            <a:r>
-              <a:rPr lang="el-GR" dirty="0">
-                <a:solidFill>
-                  <a:srgbClr val="FF0000"/>
-                </a:solidFill>
-              </a:rPr>
-              <a:t>(</a:t>
-            </a:r>
-            <a:r>
-              <a:rPr lang="el-GR" dirty="0" err="1">
-                <a:solidFill>
-                  <a:srgbClr val="FF0000"/>
-                </a:solidFill>
-              </a:rPr>
-              <a:t>bps</a:t>
-            </a:r>
-            <a:r>
-              <a:rPr lang="el-GR" dirty="0">
-                <a:solidFill>
-                  <a:srgbClr val="FF0000"/>
-                </a:solidFill>
-              </a:rPr>
-              <a:t>, </a:t>
-            </a:r>
-            <a:r>
-              <a:rPr lang="el-GR" dirty="0" err="1">
-                <a:solidFill>
-                  <a:srgbClr val="FF0000"/>
-                </a:solidFill>
-              </a:rPr>
-              <a:t>Kbps</a:t>
-            </a:r>
-            <a:r>
-              <a:rPr lang="el-GR" dirty="0">
-                <a:solidFill>
-                  <a:srgbClr val="FF0000"/>
-                </a:solidFill>
-              </a:rPr>
-              <a:t>, </a:t>
-            </a:r>
-            <a:r>
-              <a:rPr lang="el-GR" dirty="0" err="1">
-                <a:solidFill>
-                  <a:srgbClr val="FF0000"/>
-                </a:solidFill>
-              </a:rPr>
-              <a:t>Mbps</a:t>
-            </a:r>
-            <a:r>
-              <a:rPr lang="el-GR" dirty="0">
-                <a:solidFill>
-                  <a:srgbClr val="FF0000"/>
-                </a:solidFill>
-              </a:rPr>
-              <a:t> και </a:t>
-            </a:r>
-            <a:r>
-              <a:rPr lang="el-GR" dirty="0" err="1">
-                <a:solidFill>
-                  <a:srgbClr val="FF0000"/>
-                </a:solidFill>
-              </a:rPr>
-              <a:t>Gbps</a:t>
-            </a:r>
-            <a:r>
-              <a:rPr lang="el-GR" dirty="0">
-                <a:solidFill>
-                  <a:srgbClr val="FF0000"/>
-                </a:solidFill>
-              </a:rPr>
-              <a:t>) </a:t>
-            </a:r>
-            <a:endParaRPr lang="en-US" dirty="0">
-              <a:solidFill>
-                <a:srgbClr val="FF0000"/>
-              </a:solidFill>
-            </a:endParaRPr>
-          </a:p>
-        </p:txBody>
-      </p:sp>
-      <p:sp>
-        <p:nvSpPr>
-          <p:cNvPr id="3" name="Content Placeholder 2"/>
+              <a:t>Δραστηριότητες Εμπέδωσης</a:t>
+            </a:r>
+          </a:p>
+        </p:txBody>
+      </p:sp>
+      <p:sp>
+        <p:nvSpPr>
+          <p:cNvPr id="4" name="Text Placeholder 3">
+            <a:extLst>
+              <a:ext uri="{FF2B5EF4-FFF2-40B4-BE49-F238E27FC236}">
+                <a16:creationId xmlns:a16="http://schemas.microsoft.com/office/drawing/2014/main" id="{4F7059D2-7234-9A18-8EC3-97389EC073B3}"/>
+              </a:ext>
+            </a:extLst>
+          </p:cNvPr>
           <p:cNvSpPr>
             <a:spLocks noGrp="1"/>
           </p:cNvSpPr>
           <p:nvPr>
-            <p:ph idx="1"/>
+            <p:ph type="body" idx="1"/>
           </p:nvPr>
         </p:nvSpPr>
-        <p:spPr/>
+        <p:spPr>
+          <a:xfrm>
+            <a:off x="675745" y="1528147"/>
+            <a:ext cx="7080326" cy="576262"/>
+          </a:xfrm>
+          <a:prstGeom prst="rect">
+            <a:avLst/>
+          </a:prstGeom>
+          <a:solidFill>
+            <a:schemeClr val="accent1"/>
+          </a:solidFill>
+        </p:spPr>
+        <p:txBody>
+          <a:bodyPr/>
+          <a:lstStyle/>
+          <a:p>
+            <a:endParaRPr/>
+          </a:p>
+        </p:txBody>
+      </p:sp>
+      <p:sp>
+        <p:nvSpPr>
+          <p:cNvPr id="5" name="Content Placeholder 4">
+            <a:extLst>
+              <a:ext uri="{FF2B5EF4-FFF2-40B4-BE49-F238E27FC236}">
+                <a16:creationId xmlns:a16="http://schemas.microsoft.com/office/drawing/2014/main" id="{9BF9A9EA-A3CB-AC85-3752-6360C044E602}"/>
+              </a:ext>
+            </a:extLst>
+          </p:cNvPr>
+          <p:cNvSpPr>
+            <a:spLocks noGrp="1"/>
+          </p:cNvSpPr>
+          <p:nvPr>
+            <p:ph idx="2"/>
+          </p:nvPr>
+        </p:nvSpPr>
+        <p:spPr>
+          <a:xfrm>
+            <a:off x="675745" y="2309955"/>
+            <a:ext cx="4185623" cy="3304117"/>
+          </a:xfrm>
+        </p:spPr>
         <p:txBody>
           <a:bodyPr>
             <a:normAutofit/>
           </a:bodyPr>
           <a:lstStyle/>
           <a:p>
-            <a:r>
-              <a:rPr lang="el-GR" sz="3000" dirty="0"/>
-              <a:t>Τα πολλαπλάσια του </a:t>
-            </a:r>
-            <a:r>
-              <a:rPr lang="el-GR" sz="3000" dirty="0" err="1"/>
-              <a:t>bps</a:t>
-            </a:r>
-            <a:r>
-              <a:rPr lang="el-GR" sz="3000" dirty="0"/>
-              <a:t> είναι:</a:t>
-            </a:r>
-          </a:p>
-          <a:p>
-            <a:pPr marL="914400" lvl="1" indent="-514350">
-              <a:buFont typeface="+mj-lt"/>
-              <a:buAutoNum type="arabicPeriod"/>
-            </a:pPr>
-            <a:r>
-              <a:rPr lang="el-GR" sz="2800" dirty="0"/>
-              <a:t>1 </a:t>
-            </a:r>
-            <a:r>
-              <a:rPr lang="en-US" sz="2800" dirty="0"/>
-              <a:t>Kbps ≈ 1.000 bps </a:t>
-            </a:r>
-          </a:p>
-          <a:p>
-            <a:pPr marL="914400" lvl="1" indent="-514350">
-              <a:buFont typeface="+mj-lt"/>
-              <a:buAutoNum type="arabicPeriod"/>
-            </a:pPr>
-            <a:r>
-              <a:rPr lang="el-GR" sz="2800" dirty="0"/>
-              <a:t>1 </a:t>
-            </a:r>
-            <a:r>
-              <a:rPr lang="en-US" sz="2800" dirty="0"/>
-              <a:t>Mbps ≈ 1.000.000 bps </a:t>
-            </a:r>
-          </a:p>
-          <a:p>
-            <a:pPr marL="914400" lvl="1" indent="-514350">
-              <a:buFont typeface="+mj-lt"/>
-              <a:buAutoNum type="arabicPeriod"/>
-            </a:pPr>
-            <a:r>
-              <a:rPr lang="el-GR" sz="2800" dirty="0"/>
-              <a:t>1 </a:t>
-            </a:r>
-            <a:r>
-              <a:rPr lang="en-US" sz="2800" dirty="0" err="1"/>
-              <a:t>Gbps</a:t>
-            </a:r>
-            <a:r>
-              <a:rPr lang="en-US" sz="2800" dirty="0"/>
-              <a:t> ≈ 1.000.000.000 bps </a:t>
-            </a:r>
-          </a:p>
-          <a:p>
-            <a:pPr marL="0" indent="0" algn="just">
-              <a:buNone/>
-            </a:pPr>
-            <a:endParaRPr lang="el-GR" sz="4000" b="1" i="1" dirty="0">
-              <a:solidFill>
-                <a:srgbClr val="FF0000"/>
-              </a:solidFill>
-            </a:endParaRPr>
-          </a:p>
-        </p:txBody>
-      </p:sp>
-    </p:spTree>
-    <p:extLst>
-      <p:ext uri="{BB962C8B-B14F-4D97-AF65-F5344CB8AC3E}">
-        <p14:creationId xmlns:p14="http://schemas.microsoft.com/office/powerpoint/2010/main" val="3963452469"/>
-      </p:ext>
-    </p:extLst>
-  </p:cSld>
-  <p:clrMapOvr>
-    <a:masterClrMapping/>
-  </p:clrMapOvr>
-</p:sld>
-</file>
-
-<file path=ppt/slides/slide9.xml><?xml version="1.0" encoding="utf-8"?>
-<p:sld xmlns:a="http://schemas.openxmlformats.org/drawingml/2006/main" xmlns:r="http://schemas.openxmlformats.org/officeDocument/2006/relationships" xmlns:p="http://schemas.openxmlformats.org/presentationml/2006/main">
-  <p:cSld>
-    <p:spTree>
-      <p:nvGrpSpPr>
-        <p:cNvPr id="1" name=""/>
-        <p:cNvGrpSpPr/>
-        <p:nvPr/>
-      </p:nvGrpSpPr>
-      <p:grpSpPr>
-        <a:xfrm>
-          <a:off x="0" y="0"/>
-          <a:ext cx="0" cy="0"/>
-          <a:chOff x="0" y="0"/>
-          <a:chExt cx="0" cy="0"/>
-        </a:xfrm>
-      </p:grpSpPr>
-      <p:sp>
-        <p:nvSpPr>
-          <p:cNvPr id="2" name="Title 1">
-            <a:extLst>
-              <a:ext uri="{FF2B5EF4-FFF2-40B4-BE49-F238E27FC236}">
-                <a16:creationId xmlns:a16="http://schemas.microsoft.com/office/drawing/2014/main" id="{B66EAA72-EC7F-4ECD-B4EF-D54E871C6881}"/>
-              </a:ext>
-            </a:extLst>
-          </p:cNvPr>
-          <p:cNvSpPr>
-            <a:spLocks noGrp="1"/>
-          </p:cNvSpPr>
-          <p:nvPr>
-            <p:ph type="title"/>
-          </p:nvPr>
-        </p:nvSpPr>
-        <p:spPr>
-          <a:xfrm>
-            <a:off x="677332" y="609600"/>
-            <a:ext cx="5825735" cy="1320800"/>
-          </a:xfrm>
-        </p:spPr>
-        <p:txBody>
-          <a:bodyPr vert="horz" lIns="91440" tIns="45720" rIns="91440" bIns="45720" anchor="t">
-            <a:normAutofit/>
-          </a:bodyPr>
-          <a:lstStyle/>
-          <a:p>
-            <a:r>
-              <a:t>Υπηρεσίες δικτύου</a:t>
-            </a:r>
-          </a:p>
-        </p:txBody>
-      </p:sp>
-      <p:sp>
-        <p:nvSpPr>
-          <p:cNvPr id="4" name="Content Placeholder 2">
-            <a:extLst>
-              <a:ext uri="{FF2B5EF4-FFF2-40B4-BE49-F238E27FC236}">
-                <a16:creationId xmlns:a16="http://schemas.microsoft.com/office/drawing/2014/main" id="{EB3F7303-CEA4-CFC4-5052-5C4AC627408E}"/>
-              </a:ext>
-            </a:extLst>
-          </p:cNvPr>
-          <p:cNvSpPr>
-            <a:spLocks noGrp="1"/>
-          </p:cNvSpPr>
-          <p:nvPr>
-            <p:ph idx="1"/>
-          </p:nvPr>
-        </p:nvSpPr>
-        <p:spPr>
-          <a:xfrm>
-            <a:off x="677333" y="2160589"/>
-            <a:ext cx="6716071" cy="3880772"/>
-          </a:xfrm>
-        </p:spPr>
-        <p:txBody>
-          <a:bodyPr>
-            <a:normAutofit/>
-          </a:bodyPr>
-          <a:lstStyle/>
-          <a:p>
-            <a:endParaRPr/>
-          </a:p>
-        </p:txBody>
-      </p:sp>
-      <p:sp>
-        <p:nvSpPr>
-          <p:cNvPr id="5" name="Clean content area">
-            <a:extLst>
-              <a:ext uri="{FF2B5EF4-FFF2-40B4-BE49-F238E27FC236}">
-                <a16:creationId xmlns:a16="http://schemas.microsoft.com/office/drawing/2014/main" id="{2665A598-14EA-47CE-8D97-710DB5118506}"/>
+            <a:endParaRPr sz="2400"/>
+          </a:p>
+        </p:txBody>
+      </p:sp>
+      <p:sp>
+        <p:nvSpPr>
+          <p:cNvPr id="6" name="Clean content area">
+            <a:extLst>
+              <a:ext uri="{FF2B5EF4-FFF2-40B4-BE49-F238E27FC236}">
+                <a16:creationId xmlns:a16="http://schemas.microsoft.com/office/drawing/2014/main" id="{1385200B-5A3C-4855-A173-8DF2E9CCB76F}"/>
               </a:ext>
             </a:extLst>
           </p:cNvPr>
@@ -14591,10 +12669,10 @@
       </p:sp>
       <p:sp>
         <p:nvSpPr>
-          <p:cNvPr id="6" name="Section reference">
-            <a:extLst>
-              <a:ext uri="{FF2B5EF4-FFF2-40B4-BE49-F238E27FC236}">
-                <a16:creationId xmlns:a16="http://schemas.microsoft.com/office/drawing/2014/main" id="{B912E555-D9EC-422C-B2C8-039D3FA6DE11}"/>
+          <p:cNvPr id="7" name="Section reference">
+            <a:extLst>
+              <a:ext uri="{FF2B5EF4-FFF2-40B4-BE49-F238E27FC236}">
+                <a16:creationId xmlns:a16="http://schemas.microsoft.com/office/drawing/2014/main" id="{89EFA94F-8322-4052-9DD0-EB8F102923AA}"/>
               </a:ext>
             </a:extLst>
           </p:cNvPr>
@@ -14641,17 +12719,17 @@
                 <a:ea typeface="Trebuchet MS"/>
                 <a:cs typeface="Trebuchet MS"/>
               </a:rPr>
-              <a:t>A.5.M1 | Θεωρία | Μέρος 2</a:t>
-            </a:r>
-          </a:p>
-        </p:txBody>
-      </p:sp>
-      <p:sp>
-        <p:nvSpPr>
-          <p:cNvPr id="7" name="Block heading 1">
-            <a:extLst>
-              <a:ext uri="{FF2B5EF4-FFF2-40B4-BE49-F238E27FC236}">
-                <a16:creationId xmlns:a16="http://schemas.microsoft.com/office/drawing/2014/main" id="{EC0A44CB-5D23-4C66-B72B-0E57B2B3C902}"/>
+              <a:t>A.5.M1 | Μέρος 2</a:t>
+            </a:r>
+          </a:p>
+        </p:txBody>
+      </p:sp>
+      <p:sp>
+        <p:nvSpPr>
+          <p:cNvPr id="8" name="Block heading 1">
+            <a:extLst>
+              <a:ext uri="{FF2B5EF4-FFF2-40B4-BE49-F238E27FC236}">
+                <a16:creationId xmlns:a16="http://schemas.microsoft.com/office/drawing/2014/main" id="{83997FA5-1DE0-4658-B52E-9AC082B37F3A}"/>
               </a:ext>
             </a:extLst>
           </p:cNvPr>
@@ -14680,7 +12758,7 @@
           <a:lstStyle/>
           <a:p>
             <a:pPr>
-              <a:defRPr sz="1575" b="1">
+              <a:defRPr sz="1800" b="1">
                 <a:solidFill>
                   <a:srgbClr val="18A7CC"/>
                 </a:solidFill>
@@ -14690,7 +12768,7 @@
               </a:defRPr>
             </a:pPr>
             <a:r>
-              <a:rPr sz="1575" b="1">
+              <a:rPr sz="1800" b="1">
                 <a:solidFill>
                   <a:srgbClr val="18A7CC"/>
                 </a:solidFill>
@@ -14698,17 +12776,17 @@
                 <a:ea typeface="Trebuchet MS"/>
                 <a:cs typeface="Trebuchet MS"/>
               </a:rPr>
-              <a:t>Τοπικό δίκτυο</a:t>
-            </a:r>
-          </a:p>
-        </p:txBody>
-      </p:sp>
-      <p:sp>
-        <p:nvSpPr>
-          <p:cNvPr id="8" name="Block body 1">
-            <a:extLst>
-              <a:ext uri="{FF2B5EF4-FFF2-40B4-BE49-F238E27FC236}">
-                <a16:creationId xmlns:a16="http://schemas.microsoft.com/office/drawing/2014/main" id="{DA9AE494-1D41-4B99-9FA2-68B4C6F0629D}"/>
+              <a:t>4</a:t>
+            </a:r>
+          </a:p>
+        </p:txBody>
+      </p:sp>
+      <p:sp>
+        <p:nvSpPr>
+          <p:cNvPr id="9" name="Block body 1">
+            <a:extLst>
+              <a:ext uri="{FF2B5EF4-FFF2-40B4-BE49-F238E27FC236}">
+                <a16:creationId xmlns:a16="http://schemas.microsoft.com/office/drawing/2014/main" id="{285999A5-150B-44D2-BF15-92DD95CB076E}"/>
               </a:ext>
             </a:extLst>
           </p:cNvPr>
@@ -14737,7 +12815,7 @@
           <a:lstStyle/>
           <a:p>
             <a:pPr>
-              <a:defRPr sz="1650" b="0">
+              <a:defRPr sz="1725" b="0">
                 <a:solidFill>
                   <a:srgbClr val="333333"/>
                 </a:solidFill>
@@ -14747,7 +12825,7 @@
               </a:defRPr>
             </a:pPr>
             <a:r>
-              <a:rPr sz="1650" b="0">
+              <a:rPr sz="1725" b="0">
                 <a:solidFill>
                   <a:srgbClr val="333333"/>
                 </a:solidFill>
@@ -14755,17 +12833,17 @@
                 <a:ea typeface="Trebuchet MS"/>
                 <a:cs typeface="Trebuchet MS"/>
               </a:rPr>
-              <a:t>Μπορεί να παρέχει κοινόχρηστα αρχεία, λογισμικό και εκτυπωτές.</a:t>
-            </a:r>
-          </a:p>
-        </p:txBody>
-      </p:sp>
-      <p:sp>
-        <p:nvSpPr>
-          <p:cNvPr id="9" name="Block heading 2">
-            <a:extLst>
-              <a:ext uri="{FF2B5EF4-FFF2-40B4-BE49-F238E27FC236}">
-                <a16:creationId xmlns:a16="http://schemas.microsoft.com/office/drawing/2014/main" id="{4339F8F6-22FD-4B7B-A618-B6AF147C937C}"/>
+              <a:t>Επιλογή του κατάλληλου μέσου σύνδεσης για κάθε περίπτωση.</a:t>
+            </a:r>
+          </a:p>
+        </p:txBody>
+      </p:sp>
+      <p:sp>
+        <p:nvSpPr>
+          <p:cNvPr id="10" name="Block heading 2">
+            <a:extLst>
+              <a:ext uri="{FF2B5EF4-FFF2-40B4-BE49-F238E27FC236}">
+                <a16:creationId xmlns:a16="http://schemas.microsoft.com/office/drawing/2014/main" id="{6C94165B-160A-4D73-8B1A-856215A18936}"/>
               </a:ext>
             </a:extLst>
           </p:cNvPr>
@@ -14794,7 +12872,7 @@
           <a:lstStyle/>
           <a:p>
             <a:pPr>
-              <a:defRPr sz="1575" b="1">
+              <a:defRPr sz="1800" b="1">
                 <a:solidFill>
                   <a:srgbClr val="18A7CC"/>
                 </a:solidFill>
@@ -14804,7 +12882,7 @@
               </a:defRPr>
             </a:pPr>
             <a:r>
-              <a:rPr sz="1575" b="1">
+              <a:rPr sz="1800" b="1">
                 <a:solidFill>
                   <a:srgbClr val="18A7CC"/>
                 </a:solidFill>
@@ -14812,17 +12890,17 @@
                 <a:ea typeface="Trebuchet MS"/>
                 <a:cs typeface="Trebuchet MS"/>
               </a:rPr>
-              <a:t>Παγκόσμιος Ιστός</a:t>
-            </a:r>
-          </a:p>
-        </p:txBody>
-      </p:sp>
-      <p:sp>
-        <p:nvSpPr>
-          <p:cNvPr id="10" name="Block body 2">
-            <a:extLst>
-              <a:ext uri="{FF2B5EF4-FFF2-40B4-BE49-F238E27FC236}">
-                <a16:creationId xmlns:a16="http://schemas.microsoft.com/office/drawing/2014/main" id="{69D5182C-071A-4BC3-B17B-4FD64AD7CA8C}"/>
+              <a:t>5</a:t>
+            </a:r>
+          </a:p>
+        </p:txBody>
+      </p:sp>
+      <p:sp>
+        <p:nvSpPr>
+          <p:cNvPr id="11" name="Block body 2">
+            <a:extLst>
+              <a:ext uri="{FF2B5EF4-FFF2-40B4-BE49-F238E27FC236}">
+                <a16:creationId xmlns:a16="http://schemas.microsoft.com/office/drawing/2014/main" id="{A5F9D648-81F9-4956-8EFC-E711AE7164C4}"/>
               </a:ext>
             </a:extLst>
           </p:cNvPr>
@@ -14851,7 +12929,7 @@
           <a:lstStyle/>
           <a:p>
             <a:pPr>
-              <a:defRPr sz="1650" b="0">
+              <a:defRPr sz="1725" b="0">
                 <a:solidFill>
                   <a:srgbClr val="333333"/>
                 </a:solidFill>
@@ -14861,7 +12939,7 @@
               </a:defRPr>
             </a:pPr>
             <a:r>
-              <a:rPr sz="1650" b="0">
+              <a:rPr sz="1725" b="0">
                 <a:solidFill>
                   <a:srgbClr val="333333"/>
                 </a:solidFill>
@@ -14869,17 +12947,17 @@
                 <a:ea typeface="Trebuchet MS"/>
                 <a:cs typeface="Trebuchet MS"/>
               </a:rPr>
-              <a:t>Μεταφέρει ιστοσελίδες και άλλα αρχεία ανάμεσα σε web servers και φυλλομετρητές.</a:t>
-            </a:r>
-          </a:p>
-        </p:txBody>
-      </p:sp>
-      <p:sp>
-        <p:nvSpPr>
-          <p:cNvPr id="11" name="Block heading 3">
-            <a:extLst>
-              <a:ext uri="{FF2B5EF4-FFF2-40B4-BE49-F238E27FC236}">
-                <a16:creationId xmlns:a16="http://schemas.microsoft.com/office/drawing/2014/main" id="{027FD00B-01FA-462B-9F5B-C94B8F9E4FBE}"/>
+              <a:t>Δύο πλεονεκτήματα και δύο μειονεκτήματα των ασύρματων δικτύων.</a:t>
+            </a:r>
+          </a:p>
+        </p:txBody>
+      </p:sp>
+      <p:sp>
+        <p:nvSpPr>
+          <p:cNvPr id="12" name="Block heading 3">
+            <a:extLst>
+              <a:ext uri="{FF2B5EF4-FFF2-40B4-BE49-F238E27FC236}">
+                <a16:creationId xmlns:a16="http://schemas.microsoft.com/office/drawing/2014/main" id="{AE655A56-D8EC-4757-9C79-6C99C56BCAA4}"/>
               </a:ext>
             </a:extLst>
           </p:cNvPr>
@@ -14908,7 +12986,7 @@
           <a:lstStyle/>
           <a:p>
             <a:pPr>
-              <a:defRPr sz="1575" b="1">
+              <a:defRPr sz="1800" b="1">
                 <a:solidFill>
                   <a:srgbClr val="18A7CC"/>
                 </a:solidFill>
@@ -14918,7 +12996,7 @@
               </a:defRPr>
             </a:pPr>
             <a:r>
-              <a:rPr sz="1575" b="1">
+              <a:rPr sz="1800" b="1">
                 <a:solidFill>
                   <a:srgbClr val="18A7CC"/>
                 </a:solidFill>
@@ -14926,17 +13004,17 @@
                 <a:ea typeface="Trebuchet MS"/>
                 <a:cs typeface="Trebuchet MS"/>
               </a:rPr>
-              <a:t>Άλλες υπηρεσίες</a:t>
-            </a:r>
-          </a:p>
-        </p:txBody>
-      </p:sp>
-      <p:sp>
-        <p:nvSpPr>
-          <p:cNvPr id="12" name="Block body 3">
-            <a:extLst>
-              <a:ext uri="{FF2B5EF4-FFF2-40B4-BE49-F238E27FC236}">
-                <a16:creationId xmlns:a16="http://schemas.microsoft.com/office/drawing/2014/main" id="{3326F68E-53BC-46F3-A6A2-D071D9D188E2}"/>
+              <a:t>6</a:t>
+            </a:r>
+          </a:p>
+        </p:txBody>
+      </p:sp>
+      <p:sp>
+        <p:nvSpPr>
+          <p:cNvPr id="13" name="Block body 3">
+            <a:extLst>
+              <a:ext uri="{FF2B5EF4-FFF2-40B4-BE49-F238E27FC236}">
+                <a16:creationId xmlns:a16="http://schemas.microsoft.com/office/drawing/2014/main" id="{B4DC63C6-0C8E-43C9-B123-0A03F72B47BA}"/>
               </a:ext>
             </a:extLst>
           </p:cNvPr>
@@ -14965,7 +13043,7 @@
           <a:lstStyle/>
           <a:p>
             <a:pPr>
-              <a:defRPr sz="1650" b="0">
+              <a:defRPr sz="1725" b="0">
                 <a:solidFill>
                   <a:srgbClr val="333333"/>
                 </a:solidFill>
@@ -14975,7 +13053,7 @@
               </a:defRPr>
             </a:pPr>
             <a:r>
-              <a:rPr sz="1650" b="0">
+              <a:rPr sz="1725" b="0">
                 <a:solidFill>
                   <a:srgbClr val="333333"/>
                 </a:solidFill>
@@ -14983,7 +13061,7 @@
                 <a:ea typeface="Trebuchet MS"/>
                 <a:cs typeface="Trebuchet MS"/>
               </a:rPr>
-              <a:t>Το ηλεκτρονικό ταχυδρομείο, η μεταφορά αρχείων και η διαδραστική επικοινωνία λειτουργούν μέσω δικτύων.</a:t>
+              <a:t>Δύο υπηρεσίες του Διαδικτύου.</a:t>
             </a:r>
           </a:p>
         </p:txBody>
@@ -14991,7 +13069,7 @@
     </p:spTree>
     <p:extLst>
       <p:ext uri="{BB962C8B-B14F-4D97-AF65-F5344CB8AC3E}">
-        <p14:creationId xmlns:p14="http://schemas.microsoft.com/office/powerpoint/2010/main" val="3786659628"/>
+        <p14:creationId xmlns:p14="http://schemas.microsoft.com/office/powerpoint/2010/main" val="2467819896"/>
       </p:ext>
     </p:extLst>
   </p:cSld>

--- a/schools-presentations/A Lykeiou/A5 - Computer Networks and Internet/A.5.M1 Εισαγωγή - Μέρος 2.pptx
+++ b/schools-presentations/A Lykeiou/A5 - Computer Networks and Internet/A.5.M1 Εισαγωγή - Μέρος 2.pptx
@@ -125,7 +125,7 @@
 <file path=ppt/revisionInfo.xml><?xml version="1.0" encoding="utf-8"?>
 <p1510:revInfo xmlns:a="http://schemas.openxmlformats.org/drawingml/2006/main" xmlns:r="http://schemas.openxmlformats.org/officeDocument/2006/relationships" xmlns:p1510="http://schemas.microsoft.com/office/powerpoint/2015/10/main">
   <p1510:revLst>
-    <p1510:client id="{066B80C5-57BC-47FF-B3C0-641E5B3449A0}" v="4" dt="2026-10-07T06:57:53.779"/>
+    <p1510:client id="{066B80C5-57BC-47FF-B3C0-641E5B3449A0}" v="8" dt="2026-10-08T06:57:51.807"/>
   </p1510:revLst>
 </p1510:revInfo>
 </file>
@@ -134,8 +134,8 @@
 <pc:chgInfo xmlns:a="http://schemas.openxmlformats.org/drawingml/2006/main" xmlns:r="http://schemas.openxmlformats.org/officeDocument/2006/relationships" xmlns:ac="http://schemas.microsoft.com/office/drawing/2013/main/command" xmlns:pc="http://schemas.microsoft.com/office/powerpoint/2013/main/command">
   <pc:docChgLst>
     <pc:chgData name="Άριστος Αρέστη" userId="813aa191-2d4c-464f-9d05-0a7e494d859f" providerId="ADAL" clId="{49C7B61D-1ACF-4AFF-A04E-A3B433E32474}"/>
-    <pc:docChg chg="custSel addSld delSld modSld">
-      <pc:chgData name="Άριστος Αρέστη" userId="813aa191-2d4c-464f-9d05-0a7e494d859f" providerId="ADAL" clId="{49C7B61D-1ACF-4AFF-A04E-A3B433E32474}" dt="2026-10-07T19:33:04.501" v="57" actId="47"/>
+    <pc:docChg chg="undo custSel addSld delSld modSld">
+      <pc:chgData name="Άριστος Αρέστη" userId="813aa191-2d4c-464f-9d05-0a7e494d859f" providerId="ADAL" clId="{49C7B61D-1ACF-4AFF-A04E-A3B433E32474}" dt="2026-10-08T07:04:13.161" v="123" actId="1076"/>
       <pc:docMkLst>
         <pc:docMk/>
       </pc:docMkLst>
@@ -163,11 +163,19 @@
         </pc:spChg>
       </pc:sldChg>
       <pc:sldChg chg="modSp mod">
-        <pc:chgData name="Άριστος Αρέστη" userId="813aa191-2d4c-464f-9d05-0a7e494d859f" providerId="ADAL" clId="{49C7B61D-1ACF-4AFF-A04E-A3B433E32474}" dt="2026-10-07T19:31:20.954" v="55" actId="20577"/>
+        <pc:chgData name="Άριστος Αρέστη" userId="813aa191-2d4c-464f-9d05-0a7e494d859f" providerId="ADAL" clId="{49C7B61D-1ACF-4AFF-A04E-A3B433E32474}" dt="2026-10-08T07:03:05.996" v="118" actId="20577"/>
         <pc:sldMkLst>
           <pc:docMk/>
           <pc:sldMk cId="643881412" sldId="260"/>
         </pc:sldMkLst>
+        <pc:spChg chg="mod">
+          <ac:chgData name="Άριστος Αρέστη" userId="813aa191-2d4c-464f-9d05-0a7e494d859f" providerId="ADAL" clId="{49C7B61D-1ACF-4AFF-A04E-A3B433E32474}" dt="2026-10-08T07:03:05.996" v="118" actId="20577"/>
+          <ac:spMkLst>
+            <pc:docMk/>
+            <pc:sldMk cId="643881412" sldId="260"/>
+            <ac:spMk id="11" creationId="{668701BD-DF1D-4F5C-B193-BB20A13AB5F0}"/>
+          </ac:spMkLst>
+        </pc:spChg>
         <pc:spChg chg="mod">
           <ac:chgData name="Άριστος Αρέστη" userId="813aa191-2d4c-464f-9d05-0a7e494d859f" providerId="ADAL" clId="{49C7B61D-1ACF-4AFF-A04E-A3B433E32474}" dt="2026-10-07T19:31:20.954" v="55" actId="20577"/>
           <ac:spMkLst>
@@ -183,6 +191,77 @@
           <pc:docMk/>
           <pc:sldMk cId="1459875993" sldId="261"/>
         </pc:sldMkLst>
+      </pc:sldChg>
+      <pc:sldChg chg="delSp modSp mod">
+        <pc:chgData name="Άριστος Αρέστη" userId="813aa191-2d4c-464f-9d05-0a7e494d859f" providerId="ADAL" clId="{49C7B61D-1ACF-4AFF-A04E-A3B433E32474}" dt="2026-10-08T07:04:13.161" v="123" actId="1076"/>
+        <pc:sldMkLst>
+          <pc:docMk/>
+          <pc:sldMk cId="3786659628" sldId="262"/>
+        </pc:sldMkLst>
+        <pc:spChg chg="mod">
+          <ac:chgData name="Άριστος Αρέστη" userId="813aa191-2d4c-464f-9d05-0a7e494d859f" providerId="ADAL" clId="{49C7B61D-1ACF-4AFF-A04E-A3B433E32474}" dt="2026-10-08T06:54:17.255" v="60" actId="20577"/>
+          <ac:spMkLst>
+            <pc:docMk/>
+            <pc:sldMk cId="3786659628" sldId="262"/>
+            <ac:spMk id="2" creationId="{B66EAA72-EC7F-4ECD-B4EF-D54E871C6881}"/>
+          </ac:spMkLst>
+        </pc:spChg>
+        <pc:spChg chg="del mod">
+          <ac:chgData name="Άριστος Αρέστη" userId="813aa191-2d4c-464f-9d05-0a7e494d859f" providerId="ADAL" clId="{49C7B61D-1ACF-4AFF-A04E-A3B433E32474}" dt="2026-10-08T07:04:05.290" v="122" actId="478"/>
+          <ac:spMkLst>
+            <pc:docMk/>
+            <pc:sldMk cId="3786659628" sldId="262"/>
+            <ac:spMk id="4" creationId="{EB3F7303-CEA4-CFC4-5052-5C4AC627408E}"/>
+          </ac:spMkLst>
+        </pc:spChg>
+        <pc:spChg chg="del mod">
+          <ac:chgData name="Άριστος Αρέστη" userId="813aa191-2d4c-464f-9d05-0a7e494d859f" providerId="ADAL" clId="{49C7B61D-1ACF-4AFF-A04E-A3B433E32474}" dt="2026-10-08T07:03:48.105" v="120" actId="478"/>
+          <ac:spMkLst>
+            <pc:docMk/>
+            <pc:sldMk cId="3786659628" sldId="262"/>
+            <ac:spMk id="5" creationId="{2665A598-14EA-47CE-8D97-710DB5118506}"/>
+          </ac:spMkLst>
+        </pc:spChg>
+        <pc:spChg chg="mod">
+          <ac:chgData name="Άριστος Αρέστη" userId="813aa191-2d4c-464f-9d05-0a7e494d859f" providerId="ADAL" clId="{49C7B61D-1ACF-4AFF-A04E-A3B433E32474}" dt="2026-10-08T07:04:13.161" v="123" actId="1076"/>
+          <ac:spMkLst>
+            <pc:docMk/>
+            <pc:sldMk cId="3786659628" sldId="262"/>
+            <ac:spMk id="7" creationId="{EC0A44CB-5D23-4C66-B72B-0E57B2B3C902}"/>
+          </ac:spMkLst>
+        </pc:spChg>
+        <pc:spChg chg="mod">
+          <ac:chgData name="Άριστος Αρέστη" userId="813aa191-2d4c-464f-9d05-0a7e494d859f" providerId="ADAL" clId="{49C7B61D-1ACF-4AFF-A04E-A3B433E32474}" dt="2026-10-08T06:57:17.492" v="80"/>
+          <ac:spMkLst>
+            <pc:docMk/>
+            <pc:sldMk cId="3786659628" sldId="262"/>
+            <ac:spMk id="8" creationId="{DA9AE494-1D41-4B99-9FA2-68B4C6F0629D}"/>
+          </ac:spMkLst>
+        </pc:spChg>
+        <pc:spChg chg="mod">
+          <ac:chgData name="Άριστος Αρέστη" userId="813aa191-2d4c-464f-9d05-0a7e494d859f" providerId="ADAL" clId="{49C7B61D-1ACF-4AFF-A04E-A3B433E32474}" dt="2026-10-08T06:58:55.837" v="98" actId="20577"/>
+          <ac:spMkLst>
+            <pc:docMk/>
+            <pc:sldMk cId="3786659628" sldId="262"/>
+            <ac:spMk id="9" creationId="{4339F8F6-22FD-4B7B-A618-B6AF147C937C}"/>
+          </ac:spMkLst>
+        </pc:spChg>
+        <pc:spChg chg="mod">
+          <ac:chgData name="Άριστος Αρέστη" userId="813aa191-2d4c-464f-9d05-0a7e494d859f" providerId="ADAL" clId="{49C7B61D-1ACF-4AFF-A04E-A3B433E32474}" dt="2026-10-08T06:58:11" v="88" actId="108"/>
+          <ac:spMkLst>
+            <pc:docMk/>
+            <pc:sldMk cId="3786659628" sldId="262"/>
+            <ac:spMk id="11" creationId="{027FD00B-01FA-462B-9F5B-C94B8F9E4FBE}"/>
+          </ac:spMkLst>
+        </pc:spChg>
+        <pc:spChg chg="mod">
+          <ac:chgData name="Άριστος Αρέστη" userId="813aa191-2d4c-464f-9d05-0a7e494d859f" providerId="ADAL" clId="{49C7B61D-1ACF-4AFF-A04E-A3B433E32474}" dt="2026-10-08T06:57:51.807" v="84"/>
+          <ac:spMkLst>
+            <pc:docMk/>
+            <pc:sldMk cId="3786659628" sldId="262"/>
+            <ac:spMk id="12" creationId="{3326F68E-53BC-46F3-A6A2-D071D9D188E2}"/>
+          </ac:spMkLst>
+        </pc:spChg>
       </pc:sldChg>
       <pc:sldChg chg="add del">
         <pc:chgData name="Άριστος Αρέστη" userId="813aa191-2d4c-464f-9d05-0a7e494d859f" providerId="ADAL" clId="{49C7B61D-1ACF-4AFF-A04E-A3B433E32474}" dt="2026-10-07T19:33:04.501" v="57" actId="47"/>
@@ -1899,7 +1978,7 @@
           <a:lstStyle/>
           <a:p>
             <a:fld id="{0E1AB97B-D0C7-4CCB-8568-F47C13D538D5}" type="datetimeFigureOut">
-              <a:t>07-Oct-26</a:t>
+              <a:t>08-Oct-26</a:t>
             </a:fld>
             <a:endParaRPr/>
           </a:p>
@@ -2173,7 +2252,7 @@
           <a:lstStyle/>
           <a:p>
             <a:fld id="{0E1AB97B-D0C7-4CCB-8568-F47C13D538D5}" type="datetimeFigureOut">
-              <a:t>07-Oct-26</a:t>
+              <a:t>08-Oct-26</a:t>
             </a:fld>
             <a:endParaRPr/>
           </a:p>
@@ -2517,7 +2596,7 @@
           <a:lstStyle/>
           <a:p>
             <a:fld id="{0E1AB97B-D0C7-4CCB-8568-F47C13D538D5}" type="datetimeFigureOut">
-              <a:t>07-Oct-26</a:t>
+              <a:t>08-Oct-26</a:t>
             </a:fld>
             <a:endParaRPr/>
           </a:p>
@@ -2895,7 +2974,7 @@
           <a:lstStyle/>
           <a:p>
             <a:fld id="{0E1AB97B-D0C7-4CCB-8568-F47C13D538D5}" type="datetimeFigureOut">
-              <a:t>07-Oct-26</a:t>
+              <a:t>08-Oct-26</a:t>
             </a:fld>
             <a:endParaRPr/>
           </a:p>
@@ -3239,7 +3318,7 @@
           <a:lstStyle/>
           <a:p>
             <a:fld id="{0E1AB97B-D0C7-4CCB-8568-F47C13D538D5}" type="datetimeFigureOut">
-              <a:t>07-Oct-26</a:t>
+              <a:t>08-Oct-26</a:t>
             </a:fld>
             <a:endParaRPr/>
           </a:p>
@@ -3684,7 +3763,7 @@
           <a:lstStyle/>
           <a:p>
             <a:fld id="{0E1AB97B-D0C7-4CCB-8568-F47C13D538D5}" type="datetimeFigureOut">
-              <a:t>07-Oct-26</a:t>
+              <a:t>08-Oct-26</a:t>
             </a:fld>
             <a:endParaRPr/>
           </a:p>
@@ -3879,7 +3958,7 @@
           <a:lstStyle/>
           <a:p>
             <a:fld id="{0E1AB97B-D0C7-4CCB-8568-F47C13D538D5}" type="datetimeFigureOut">
-              <a:t>07-Oct-26</a:t>
+              <a:t>08-Oct-26</a:t>
             </a:fld>
             <a:endParaRPr/>
           </a:p>
@@ -4084,7 +4163,7 @@
           <a:lstStyle/>
           <a:p>
             <a:fld id="{0E1AB97B-D0C7-4CCB-8568-F47C13D538D5}" type="datetimeFigureOut">
-              <a:t>07-Oct-26</a:t>
+              <a:t>08-Oct-26</a:t>
             </a:fld>
             <a:endParaRPr/>
           </a:p>
@@ -4279,7 +4358,7 @@
           <a:lstStyle/>
           <a:p>
             <a:fld id="{0E1AB97B-D0C7-4CCB-8568-F47C13D538D5}" type="datetimeFigureOut">
-              <a:t>07-Oct-26</a:t>
+              <a:t>08-Oct-26</a:t>
             </a:fld>
             <a:endParaRPr/>
           </a:p>
@@ -4549,7 +4628,7 @@
           <a:lstStyle/>
           <a:p>
             <a:fld id="{0E1AB97B-D0C7-4CCB-8568-F47C13D538D5}" type="datetimeFigureOut">
-              <a:t>07-Oct-26</a:t>
+              <a:t>08-Oct-26</a:t>
             </a:fld>
             <a:endParaRPr/>
           </a:p>
@@ -4816,7 +4895,7 @@
           <a:lstStyle/>
           <a:p>
             <a:fld id="{0E1AB97B-D0C7-4CCB-8568-F47C13D538D5}" type="datetimeFigureOut">
-              <a:t>07-Oct-26</a:t>
+              <a:t>08-Oct-26</a:t>
             </a:fld>
             <a:endParaRPr/>
           </a:p>
@@ -5240,7 +5319,7 @@
           <a:lstStyle/>
           <a:p>
             <a:fld id="{0E1AB97B-D0C7-4CCB-8568-F47C13D538D5}" type="datetimeFigureOut">
-              <a:t>07-Oct-26</a:t>
+              <a:t>08-Oct-26</a:t>
             </a:fld>
             <a:endParaRPr/>
           </a:p>
@@ -5378,7 +5457,7 @@
           <a:lstStyle/>
           <a:p>
             <a:fld id="{0E1AB97B-D0C7-4CCB-8568-F47C13D538D5}" type="datetimeFigureOut">
-              <a:t>07-Oct-26</a:t>
+              <a:t>08-Oct-26</a:t>
             </a:fld>
             <a:endParaRPr/>
           </a:p>
@@ -5484,7 +5563,7 @@
           <a:lstStyle/>
           <a:p>
             <a:fld id="{0E1AB97B-D0C7-4CCB-8568-F47C13D538D5}" type="datetimeFigureOut">
-              <a:t>07-Oct-26</a:t>
+              <a:t>08-Oct-26</a:t>
             </a:fld>
             <a:endParaRPr/>
           </a:p>
@@ -5772,7 +5851,7 @@
           <a:lstStyle/>
           <a:p>
             <a:fld id="{0E1AB97B-D0C7-4CCB-8568-F47C13D538D5}" type="datetimeFigureOut">
-              <a:t>07-Oct-26</a:t>
+              <a:t>08-Oct-26</a:t>
             </a:fld>
             <a:endParaRPr/>
           </a:p>
@@ -6115,7 +6194,7 @@
           <a:lstStyle/>
           <a:p>
             <a:fld id="{0E1AB97B-D0C7-4CCB-8568-F47C13D538D5}" type="datetimeFigureOut">
-              <a:t>07-Oct-26</a:t>
+              <a:t>08-Oct-26</a:t>
             </a:fld>
             <a:endParaRPr/>
           </a:p>
@@ -6959,7 +7038,7 @@
           </a:lstStyle>
           <a:p>
             <a:fld id="{0E1AB97B-D0C7-4CCB-8568-F47C13D538D5}" type="datetimeFigureOut">
-              <a:t>07-Oct-26</a:t>
+              <a:t>08-Oct-26</a:t>
             </a:fld>
             <a:endParaRPr/>
           </a:p>
@@ -11524,7 +11603,7 @@
               </a:defRPr>
             </a:pPr>
             <a:r>
-              <a:rPr sz="1575" b="1">
+              <a:rPr lang="el-GR" sz="1575" b="1" dirty="0">
                 <a:solidFill>
                   <a:srgbClr val="18A7CC"/>
                 </a:solidFill>
@@ -11532,7 +11611,40 @@
                 <a:ea typeface="Trebuchet MS"/>
                 <a:cs typeface="Trebuchet MS"/>
               </a:rPr>
-              <a:t>Παρεμβολές και ασφάλεια</a:t>
+              <a:t>Μειονεκτήματα - </a:t>
+            </a:r>
+            <a:r>
+              <a:rPr sz="1575" b="1" dirty="0">
+                <a:solidFill>
+                  <a:srgbClr val="18A7CC"/>
+                </a:solidFill>
+                <a:latin typeface="Trebuchet MS"/>
+                <a:ea typeface="Trebuchet MS"/>
+                <a:cs typeface="Trebuchet MS"/>
+              </a:rPr>
+              <a:t>Πα</a:t>
+            </a:r>
+            <a:r>
+              <a:rPr sz="1575" b="1" dirty="0" err="1">
+                <a:solidFill>
+                  <a:srgbClr val="18A7CC"/>
+                </a:solidFill>
+                <a:latin typeface="Trebuchet MS"/>
+                <a:ea typeface="Trebuchet MS"/>
+                <a:cs typeface="Trebuchet MS"/>
+              </a:rPr>
+              <a:t>ρεμ</a:t>
+            </a:r>
+            <a:r>
+              <a:rPr sz="1575" b="1" dirty="0">
+                <a:solidFill>
+                  <a:srgbClr val="18A7CC"/>
+                </a:solidFill>
+                <a:latin typeface="Trebuchet MS"/>
+                <a:ea typeface="Trebuchet MS"/>
+                <a:cs typeface="Trebuchet MS"/>
+              </a:rPr>
+              <a:t>βολές και ασφάλεια</a:t>
             </a:r>
           </a:p>
         </p:txBody>
@@ -12027,77 +12139,26 @@
           <a:lstStyle/>
           <a:p>
             <a:r>
-              <a:t>Υπηρεσίες δικτύου</a:t>
-            </a:r>
-          </a:p>
-        </p:txBody>
-      </p:sp>
-      <p:sp>
-        <p:nvSpPr>
-          <p:cNvPr id="4" name="Content Placeholder 2">
-            <a:extLst>
-              <a:ext uri="{FF2B5EF4-FFF2-40B4-BE49-F238E27FC236}">
-                <a16:creationId xmlns:a16="http://schemas.microsoft.com/office/drawing/2014/main" id="{EB3F7303-CEA4-CFC4-5052-5C4AC627408E}"/>
-              </a:ext>
-            </a:extLst>
-          </p:cNvPr>
-          <p:cNvSpPr>
-            <a:spLocks noGrp="1"/>
-          </p:cNvSpPr>
-          <p:nvPr>
-            <p:ph idx="1"/>
-          </p:nvPr>
-        </p:nvSpPr>
-        <p:spPr>
-          <a:xfrm>
-            <a:off x="677333" y="2160589"/>
-            <a:ext cx="6716071" cy="3880772"/>
-          </a:xfrm>
-        </p:spPr>
-        <p:txBody>
-          <a:bodyPr>
-            <a:normAutofit/>
-          </a:bodyPr>
-          <a:lstStyle/>
-          <a:p>
-            <a:endParaRPr/>
-          </a:p>
-        </p:txBody>
-      </p:sp>
-      <p:sp>
-        <p:nvSpPr>
-          <p:cNvPr id="5" name="Clean content area">
-            <a:extLst>
-              <a:ext uri="{FF2B5EF4-FFF2-40B4-BE49-F238E27FC236}">
-                <a16:creationId xmlns:a16="http://schemas.microsoft.com/office/drawing/2014/main" id="{2665A598-14EA-47CE-8D97-710DB5118506}"/>
-              </a:ext>
-            </a:extLst>
-          </p:cNvPr>
-          <p:cNvSpPr>
-            <a:spLocks noGrp="1"/>
-          </p:cNvSpPr>
-          <p:nvPr/>
-        </p:nvSpPr>
-        <p:spPr>
-          <a:xfrm>
-            <a:off x="590550" y="1352550"/>
-            <a:ext cx="11049000" cy="5000625"/>
-          </a:xfrm>
-          <a:prstGeom prst="rect">
-            <a:avLst/>
-          </a:prstGeom>
-          <a:solidFill>
-            <a:srgbClr val="FFFFFF"/>
-          </a:solidFill>
-          <a:ln w="0">
-            <a:noFill/>
-          </a:ln>
-        </p:spPr>
-        <p:txBody>
-          <a:bodyPr/>
-          <a:lstStyle/>
-          <a:p>
-            <a:endParaRPr lang="en-GB"/>
+              <a:rPr dirty="0"/>
+              <a:t>Υπ</a:t>
+            </a:r>
+            <a:r>
+              <a:rPr dirty="0" err="1"/>
+              <a:t>ηρεσίες</a:t>
+            </a:r>
+            <a:r>
+              <a:rPr dirty="0"/>
+              <a:t> </a:t>
+            </a:r>
+            <a:r>
+              <a:rPr lang="el-GR" dirty="0"/>
+              <a:t>δια</a:t>
+            </a:r>
+            <a:r>
+              <a:rPr dirty="0" err="1"/>
+              <a:t>δικτύου</a:t>
+            </a:r>
+            <a:endParaRPr dirty="0"/>
           </a:p>
         </p:txBody>
       </p:sp>
@@ -12174,7 +12235,7 @@
         </p:nvSpPr>
         <p:spPr>
           <a:xfrm>
-            <a:off x="781050" y="1857375"/>
+            <a:off x="781050" y="1831975"/>
             <a:ext cx="10048875" cy="285750"/>
           </a:xfrm>
           <a:prstGeom prst="rect">
@@ -12191,27 +12252,33 @@
           </a:bodyPr>
           <a:lstStyle/>
           <a:p>
-            <a:pPr>
-              <a:defRPr sz="1575" b="1">
+            <a:r>
+              <a:rPr lang="el-GR" sz="1575" b="1" dirty="0">
                 <a:solidFill>
                   <a:srgbClr val="18A7CC"/>
                 </a:solidFill>
                 <a:latin typeface="Trebuchet MS"/>
-                <a:ea typeface="Trebuchet MS"/>
-                <a:cs typeface="Trebuchet MS"/>
-              </a:defRPr>
-            </a:pPr>
-            <a:r>
-              <a:rPr sz="1575" b="1">
+              </a:rPr>
+              <a:t>Μεταφορά</a:t>
+            </a:r>
+            <a:r>
+              <a:rPr lang="el-GR" b="1" dirty="0"/>
+              <a:t> </a:t>
+            </a:r>
+            <a:r>
+              <a:rPr lang="el-GR" sz="1575" b="1" dirty="0">
                 <a:solidFill>
                   <a:srgbClr val="18A7CC"/>
                 </a:solidFill>
                 <a:latin typeface="Trebuchet MS"/>
-                <a:ea typeface="Trebuchet MS"/>
-                <a:cs typeface="Trebuchet MS"/>
               </a:rPr>
-              <a:t>Τοπικό δίκτυο</a:t>
-            </a:r>
+              <a:t>Αρχείων</a:t>
+            </a:r>
+            <a:r>
+              <a:rPr lang="en-US" b="1" dirty="0"/>
+              <a:t>(ftp)</a:t>
+            </a:r>
+            <a:endParaRPr lang="el-GR" dirty="0"/>
           </a:p>
         </p:txBody>
       </p:sp>
@@ -12259,16 +12326,45 @@
               </a:defRPr>
             </a:pPr>
             <a:r>
-              <a:rPr sz="1650" b="0">
+              <a:rPr lang="el-GR" sz="1650" dirty="0"/>
+              <a:t>Μεταφορά αρχείων από έναν συνδεδεμένο υπολογιστή (</a:t>
+            </a:r>
+            <a:r>
+              <a:rPr lang="el-GR" sz="1650" dirty="0" err="1"/>
+              <a:t>client</a:t>
+            </a:r>
+            <a:r>
+              <a:rPr lang="el-GR" sz="1650" dirty="0"/>
+              <a:t>) σε έναν διακομιστή (</a:t>
+            </a:r>
+            <a:r>
+              <a:rPr lang="el-GR" sz="1650" dirty="0" err="1"/>
+              <a:t>server</a:t>
+            </a:r>
+            <a:r>
+              <a:rPr lang="el-GR" sz="1650" dirty="0"/>
+              <a:t>) και αντίστροφα, χρησιμοποιώντας εξειδικευμένη εφαρμογή. 	</a:t>
+            </a:r>
+          </a:p>
+          <a:p>
+            <a:pPr>
+              <a:defRPr sz="1650" b="0">
                 <a:solidFill>
                   <a:srgbClr val="333333"/>
                 </a:solidFill>
                 <a:latin typeface="Trebuchet MS"/>
                 <a:ea typeface="Trebuchet MS"/>
                 <a:cs typeface="Trebuchet MS"/>
-              </a:rPr>
-              <a:t>Μπορεί να παρέχει κοινόχρηστα αρχεία, λογισμικό και εκτυπωτές.</a:t>
-            </a:r>
+              </a:defRPr>
+            </a:pPr>
+            <a:endParaRPr sz="1650" b="0" dirty="0">
+              <a:solidFill>
+                <a:srgbClr val="333333"/>
+              </a:solidFill>
+              <a:latin typeface="Trebuchet MS"/>
+              <a:ea typeface="Trebuchet MS"/>
+              <a:cs typeface="Trebuchet MS"/>
+            </a:endParaRPr>
           </a:p>
         </p:txBody>
       </p:sp>
@@ -12316,7 +12412,7 @@
               </a:defRPr>
             </a:pPr>
             <a:r>
-              <a:rPr sz="1575" b="1">
+              <a:rPr sz="1575" b="1" dirty="0">
                 <a:solidFill>
                   <a:srgbClr val="18A7CC"/>
                 </a:solidFill>
@@ -12324,8 +12420,71 @@
                 <a:ea typeface="Trebuchet MS"/>
                 <a:cs typeface="Trebuchet MS"/>
               </a:rPr>
-              <a:t>Παγκόσμιος Ιστός</a:t>
-            </a:r>
+              <a:t>Πα</a:t>
+            </a:r>
+            <a:r>
+              <a:rPr sz="1575" b="1" dirty="0" err="1">
+                <a:solidFill>
+                  <a:srgbClr val="18A7CC"/>
+                </a:solidFill>
+                <a:latin typeface="Trebuchet MS"/>
+                <a:ea typeface="Trebuchet MS"/>
+                <a:cs typeface="Trebuchet MS"/>
+              </a:rPr>
+              <a:t>γκόσμιος</a:t>
+            </a:r>
+            <a:r>
+              <a:rPr sz="1575" b="1" dirty="0">
+                <a:solidFill>
+                  <a:srgbClr val="18A7CC"/>
+                </a:solidFill>
+                <a:latin typeface="Trebuchet MS"/>
+                <a:ea typeface="Trebuchet MS"/>
+                <a:cs typeface="Trebuchet MS"/>
+              </a:rPr>
+              <a:t> </a:t>
+            </a:r>
+            <a:r>
+              <a:rPr sz="1575" b="1" dirty="0" err="1">
+                <a:solidFill>
+                  <a:srgbClr val="18A7CC"/>
+                </a:solidFill>
+                <a:latin typeface="Trebuchet MS"/>
+                <a:ea typeface="Trebuchet MS"/>
+                <a:cs typeface="Trebuchet MS"/>
+              </a:rPr>
+              <a:t>Ιστός</a:t>
+            </a:r>
+            <a:r>
+              <a:rPr lang="el-GR" sz="1575" b="1" dirty="0">
+                <a:solidFill>
+                  <a:srgbClr val="18A7CC"/>
+                </a:solidFill>
+                <a:latin typeface="Trebuchet MS"/>
+                <a:ea typeface="Trebuchet MS"/>
+                <a:cs typeface="Trebuchet MS"/>
+              </a:rPr>
+              <a:t>(</a:t>
+            </a:r>
+            <a:r>
+              <a:rPr lang="en-US" sz="1575" b="1" dirty="0">
+                <a:solidFill>
+                  <a:srgbClr val="18A7CC"/>
+                </a:solidFill>
+                <a:latin typeface="Trebuchet MS"/>
+                <a:ea typeface="Trebuchet MS"/>
+                <a:cs typeface="Trebuchet MS"/>
+              </a:rPr>
+              <a:t>www, http)</a:t>
+            </a:r>
+            <a:endParaRPr sz="1575" b="1" dirty="0">
+              <a:solidFill>
+                <a:srgbClr val="18A7CC"/>
+              </a:solidFill>
+              <a:latin typeface="Trebuchet MS"/>
+              <a:ea typeface="Trebuchet MS"/>
+              <a:cs typeface="Trebuchet MS"/>
+            </a:endParaRPr>
           </a:p>
         </p:txBody>
       </p:sp>
@@ -12373,7 +12532,7 @@
               </a:defRPr>
             </a:pPr>
             <a:r>
-              <a:rPr sz="1650" b="0">
+              <a:rPr sz="1650" b="0" dirty="0" err="1">
                 <a:solidFill>
                   <a:srgbClr val="333333"/>
                 </a:solidFill>
@@ -12381,7 +12540,18 @@
                 <a:ea typeface="Trebuchet MS"/>
                 <a:cs typeface="Trebuchet MS"/>
               </a:rPr>
-              <a:t>Μεταφέρει ιστοσελίδες και άλλα αρχεία ανάμεσα σε web servers και φυλλομετρητές.</a:t>
+              <a:t>Μετ</a:t>
+            </a:r>
+            <a:r>
+              <a:rPr sz="1650" b="0" dirty="0">
+                <a:solidFill>
+                  <a:srgbClr val="333333"/>
+                </a:solidFill>
+                <a:latin typeface="Trebuchet MS"/>
+                <a:ea typeface="Trebuchet MS"/>
+                <a:cs typeface="Trebuchet MS"/>
+              </a:rPr>
+              <a:t>αφέρει ιστοσελίδες και άλλα αρχεία ανάμεσα σε web servers και φυλλομετρητές.</a:t>
             </a:r>
           </a:p>
         </p:txBody>
@@ -12419,27 +12589,46 @@
           </a:bodyPr>
           <a:lstStyle/>
           <a:p>
-            <a:pPr>
-              <a:defRPr sz="1575" b="1">
+            <a:r>
+              <a:rPr lang="el-GR" sz="1575" b="1" dirty="0">
                 <a:solidFill>
                   <a:srgbClr val="18A7CC"/>
                 </a:solidFill>
                 <a:latin typeface="Trebuchet MS"/>
-                <a:ea typeface="Trebuchet MS"/>
-                <a:cs typeface="Trebuchet MS"/>
-              </a:defRPr>
-            </a:pPr>
-            <a:r>
-              <a:rPr sz="1575" b="1">
+              </a:rPr>
+              <a:t>Ηλεκτρονικό</a:t>
+            </a:r>
+            <a:r>
+              <a:rPr lang="el-GR" b="1" dirty="0"/>
+              <a:t> </a:t>
+            </a:r>
+            <a:r>
+              <a:rPr lang="el-GR" sz="1575" b="1" dirty="0">
                 <a:solidFill>
                   <a:srgbClr val="18A7CC"/>
                 </a:solidFill>
                 <a:latin typeface="Trebuchet MS"/>
-                <a:ea typeface="Trebuchet MS"/>
-                <a:cs typeface="Trebuchet MS"/>
               </a:rPr>
-              <a:t>Άλλες υπηρεσίες</a:t>
-            </a:r>
+              <a:t>Ταχυδρομείο</a:t>
+            </a:r>
+            <a:r>
+              <a:rPr lang="el-GR" b="1" dirty="0"/>
+              <a:t> (</a:t>
+            </a:r>
+            <a:r>
+              <a:rPr lang="en-GB" sz="1575" b="1" dirty="0">
+                <a:solidFill>
+                  <a:srgbClr val="18A7CC"/>
+                </a:solidFill>
+                <a:latin typeface="Trebuchet MS"/>
+              </a:rPr>
+              <a:t>E-mail</a:t>
+            </a:r>
+            <a:r>
+              <a:rPr lang="en-GB" b="1" dirty="0"/>
+              <a:t>) </a:t>
+            </a:r>
+            <a:endParaRPr lang="en-GB" dirty="0"/>
           </a:p>
         </p:txBody>
       </p:sp>
@@ -12487,16 +12676,29 @@
               </a:defRPr>
             </a:pPr>
             <a:r>
-              <a:rPr sz="1650" b="0">
+              <a:rPr lang="el-GR" sz="1650" dirty="0"/>
+              <a:t>Μεταφορά αλληλογραφίας ηλεκτρονικού ταχυδρομείου μεταξύ χρηστών του Διαδικτύου, μέσα από εφαρμογή ηλεκτρονικού ταχυδρομείου. 	</a:t>
+            </a:r>
+          </a:p>
+          <a:p>
+            <a:pPr>
+              <a:defRPr sz="1650" b="0">
                 <a:solidFill>
                   <a:srgbClr val="333333"/>
                 </a:solidFill>
                 <a:latin typeface="Trebuchet MS"/>
                 <a:ea typeface="Trebuchet MS"/>
                 <a:cs typeface="Trebuchet MS"/>
-              </a:rPr>
-              <a:t>Το ηλεκτρονικό ταχυδρομείο, η μεταφορά αρχείων και η διαδραστική επικοινωνία λειτουργούν μέσω δικτύων.</a:t>
-            </a:r>
+              </a:defRPr>
+            </a:pPr>
+            <a:endParaRPr sz="1650" b="0" dirty="0">
+              <a:solidFill>
+                <a:srgbClr val="333333"/>
+              </a:solidFill>
+              <a:latin typeface="Trebuchet MS"/>
+              <a:ea typeface="Trebuchet MS"/>
+              <a:cs typeface="Trebuchet MS"/>
+            </a:endParaRPr>
           </a:p>
         </p:txBody>
       </p:sp>
